--- a/docs/reports/2026-10_PEP_AI개발_리포트.pptx
+++ b/docs/reports/2026-10_PEP_AI개발_리포트.pptx
@@ -17,9 +17,10 @@
     <p:sldId id="265" r:id="rId11"/>
     <p:sldId id="266" r:id="rId12"/>
     <p:sldId id="267" r:id="rId13"/>
+    <p:sldId id="268" r:id="rId14"/>
   </p:sldIdLst>
   <p:notesMasterIdLst>
-    <p:notesMasterId r:id="rId14"/>
+    <p:notesMasterId r:id="rId15"/>
   </p:notesMasterIdLst>
   <p:sldSz cx="12192000" cy="6858000"/>
   <p:notesSz cx="6858000" cy="12192000"/>
@@ -248,25 +249,25 @@
                   <c:v>67</c:v>
                 </c:pt>
                 <c:pt idx="1">
-                  <c:v>50</c:v>
+                  <c:v>49</c:v>
                 </c:pt>
                 <c:pt idx="2">
-                  <c:v>79</c:v>
+                  <c:v>80</c:v>
                 </c:pt>
                 <c:pt idx="3">
-                  <c:v>74</c:v>
+                  <c:v>173</c:v>
                 </c:pt>
                 <c:pt idx="4">
-                  <c:v>211</c:v>
+                  <c:v>216</c:v>
                 </c:pt>
                 <c:pt idx="5">
-                  <c:v>249</c:v>
+                  <c:v>250</c:v>
                 </c:pt>
                 <c:pt idx="6">
                   <c:v>85</c:v>
                 </c:pt>
                 <c:pt idx="7">
-                  <c:v>91</c:v>
+                  <c:v>92</c:v>
                 </c:pt>
               </c:numCache>
             </c:numRef>
@@ -361,25 +362,25 @@
                   <c:v>6</c:v>
                 </c:pt>
                 <c:pt idx="1">
-                  <c:v>5</c:v>
+                  <c:v>4</c:v>
                 </c:pt>
                 <c:pt idx="2">
-                  <c:v>18</c:v>
+                  <c:v>19</c:v>
                 </c:pt>
                 <c:pt idx="3">
-                  <c:v>114</c:v>
+                  <c:v>11</c:v>
                 </c:pt>
                 <c:pt idx="4">
-                  <c:v>3</c:v>
+                  <c:v>2</c:v>
                 </c:pt>
                 <c:pt idx="5">
-                  <c:v>2</c:v>
+                  <c:v>1</c:v>
                 </c:pt>
                 <c:pt idx="6">
                   <c:v>1</c:v>
                 </c:pt>
                 <c:pt idx="7">
-                  <c:v>1</c:v>
+                  <c:v>0</c:v>
                 </c:pt>
               </c:numCache>
             </c:numRef>
@@ -761,28 +762,28 @@
                 <c:formatCode>General</c:formatCode>
                 <c:ptCount val="8"/>
                 <c:pt idx="0">
-                  <c:v>56</c:v>
+                  <c:v>53</c:v>
                 </c:pt>
                 <c:pt idx="1">
                   <c:v>54</c:v>
                 </c:pt>
                 <c:pt idx="2">
-                  <c:v>74</c:v>
+                  <c:v>68</c:v>
                 </c:pt>
                 <c:pt idx="3">
-                  <c:v>110</c:v>
+                  <c:v>99</c:v>
                 </c:pt>
                 <c:pt idx="4">
-                  <c:v>129</c:v>
+                  <c:v>116</c:v>
                 </c:pt>
                 <c:pt idx="5">
-                  <c:v>220</c:v>
+                  <c:v>183</c:v>
                 </c:pt>
                 <c:pt idx="6">
-                  <c:v>97</c:v>
+                  <c:v>87</c:v>
                 </c:pt>
                 <c:pt idx="7">
-                  <c:v>105</c:v>
+                  <c:v>90</c:v>
                 </c:pt>
               </c:numCache>
             </c:numRef>
@@ -1079,28 +1080,28 @@
                 <c:formatCode>General</c:formatCode>
                 <c:ptCount val="8"/>
                 <c:pt idx="0">
-                  <c:v>4.3</c:v>
+                  <c:v>4.1</c:v>
                 </c:pt>
                 <c:pt idx="1">
                   <c:v>4.2</c:v>
                 </c:pt>
                 <c:pt idx="2">
-                  <c:v>5.3</c:v>
+                  <c:v>5.2</c:v>
                 </c:pt>
                 <c:pt idx="3">
+                  <c:v>5</c:v>
+                </c:pt>
+                <c:pt idx="4">
                   <c:v>5.5</c:v>
                 </c:pt>
-                <c:pt idx="4">
-                  <c:v>5.9</c:v>
-                </c:pt>
                 <c:pt idx="5">
-                  <c:v>9.2</c:v>
+                  <c:v>7.6</c:v>
                 </c:pt>
                 <c:pt idx="6">
-                  <c:v>7.5</c:v>
+                  <c:v>6.7</c:v>
                 </c:pt>
                 <c:pt idx="7">
-                  <c:v>4.8</c:v>
+                  <c:v>4.1</c:v>
                 </c:pt>
               </c:numCache>
             </c:numRef>
@@ -1724,6 +1725,477 @@
 </file>
 
 <file path=ppt/charts/chart5.xml><?xml version="1.0" encoding="utf-8"?>
+<c:chartSpace xmlns:c="http://schemas.openxmlformats.org/drawingml/2006/chart" xmlns:a="http://schemas.openxmlformats.org/drawingml/2006/main" xmlns:r="http://schemas.openxmlformats.org/officeDocument/2006/relationships">
+  <c:date1904 val="0"/>
+  <c:roundedCorners val="1"/>
+  <c:chart>
+    <c:title>
+      <c:tx>
+        <c:rich>
+          <a:bodyPr/>
+          <a:lstStyle/>
+          <a:p>
+            <a:pPr>
+              <a:defRPr sz="1400" b="0" i="0" u="none" strike="noStrike">
+                <a:solidFill>
+                  <a:srgbClr val="EDEAE3"/>
+                </a:solidFill>
+                <a:latin typeface="Malgun Gothic"/>
+              </a:defRPr>
+            </a:pPr>
+            <a:r>
+              <a:rPr sz="1400" b="0" i="0" u="none" strike="noStrike">
+                <a:solidFill>
+                  <a:srgbClr val="EDEAE3"/>
+                </a:solidFill>
+                <a:latin typeface="Malgun Gothic"/>
+              </a:rPr>
+              <a:t>세대별 성장 지수 (초기 = 100)</a:t>
+            </a:r>
+          </a:p>
+        </c:rich>
+      </c:tx>
+      <c:layout/>
+      <c:overlay val="0"/>
+    </c:title>
+    <c:autoTitleDeleted val="0"/>
+    <c:plotArea>
+      <c:layout/>
+      <c:barChart>
+        <c:barDir val="col"/>
+        <c:grouping val="clustered"/>
+        <c:varyColors val="0"/>
+        <c:ser>
+          <c:idx val="0"/>
+          <c:order val="0"/>
+          <c:tx>
+            <c:strRef>
+              <c:f>Sheet1!$B$1</c:f>
+              <c:strCache>
+                <c:ptCount val="1"/>
+                <c:pt idx="0">
+                  <c:v>월 기능 PR</c:v>
+                </c:pt>
+              </c:strCache>
+            </c:strRef>
+          </c:tx>
+          <c:spPr>
+            <a:solidFill>
+              <a:srgbClr val="6E7F77"/>
+            </a:solidFill>
+            <a:effectLst/>
+          </c:spPr>
+          <c:invertIfNegative val="0"/>
+          <c:dLbls>
+            <c:numFmt formatCode="#,##0" sourceLinked="0"/>
+            <c:txPr>
+              <a:bodyPr/>
+              <a:lstStyle/>
+              <a:p>
+                <a:pPr>
+                  <a:defRPr b="0" i="0" strike="noStrike" sz="1100" u="none">
+                    <a:solidFill>
+                      <a:srgbClr val="EDEAE3"/>
+                    </a:solidFill>
+                    <a:latin typeface="Arial"/>
+                  </a:defRPr>
+                </a:pPr>
+              </a:p>
+            </c:txPr>
+            <c:showLegendKey val="0"/>
+            <c:showVal val="1"/>
+            <c:showCatName val="0"/>
+            <c:showSerName val="0"/>
+            <c:showPercent val="0"/>
+            <c:showBubbleSize val="0"/>
+            <c:showLeaderLines val="0"/>
+          </c:dLbls>
+          <c:cat>
+            <c:multiLvlStrRef>
+              <c:f>Sheet1!$A$2:$A$5</c:f>
+              <c:multiLvlStrCache>
+                <c:ptCount val="4"/>
+                <c:lvl>
+                  <c:pt idx="0">
+                    <c:v>초기 (2~4월)</c:v>
+                  </c:pt>
+                  <c:pt idx="1">
+                    <c:v>4.x (5~6월)</c:v>
+                  </c:pt>
+                  <c:pt idx="2">
+                    <c:v>5 (7~8월)</c:v>
+                  </c:pt>
+                  <c:pt idx="3">
+                    <c:v>5.x (9월)</c:v>
+                  </c:pt>
+                </c:lvl>
+              </c:multiLvlStrCache>
+            </c:multiLvlStrRef>
+          </c:cat>
+          <c:val>
+            <c:numRef>
+              <c:f>Sheet1!$B$2:$B$5</c:f>
+              <c:numCache>
+                <c:formatCode>General</c:formatCode>
+                <c:ptCount val="4"/>
+                <c:pt idx="0">
+                  <c:v>100</c:v>
+                </c:pt>
+                <c:pt idx="1">
+                  <c:v>204</c:v>
+                </c:pt>
+                <c:pt idx="2">
+                  <c:v>150</c:v>
+                </c:pt>
+                <c:pt idx="3">
+                  <c:v>93</c:v>
+                </c:pt>
+              </c:numCache>
+            </c:numRef>
+          </c:val>
+        </c:ser>
+        <c:ser>
+          <c:idx val="1"/>
+          <c:order val="1"/>
+          <c:tx>
+            <c:strRef>
+              <c:f>Sheet1!$C$1</c:f>
+              <c:strCache>
+                <c:ptCount val="1"/>
+                <c:pt idx="0">
+                  <c:v>월 코드 증가량</c:v>
+                </c:pt>
+              </c:strCache>
+            </c:strRef>
+          </c:tx>
+          <c:spPr>
+            <a:solidFill>
+              <a:srgbClr val="ABBAB2"/>
+            </a:solidFill>
+            <a:effectLst/>
+          </c:spPr>
+          <c:invertIfNegative val="0"/>
+          <c:dLbls>
+            <c:numFmt formatCode="#,##0" sourceLinked="0"/>
+            <c:txPr>
+              <a:bodyPr/>
+              <a:lstStyle/>
+              <a:p>
+                <a:pPr>
+                  <a:defRPr b="0" i="0" strike="noStrike" sz="1100" u="none">
+                    <a:solidFill>
+                      <a:srgbClr val="EDEAE3"/>
+                    </a:solidFill>
+                    <a:latin typeface="Arial"/>
+                  </a:defRPr>
+                </a:pPr>
+              </a:p>
+            </c:txPr>
+            <c:showLegendKey val="0"/>
+            <c:showVal val="1"/>
+            <c:showCatName val="0"/>
+            <c:showSerName val="0"/>
+            <c:showPercent val="0"/>
+            <c:showBubbleSize val="0"/>
+            <c:showLeaderLines val="0"/>
+          </c:dLbls>
+          <c:cat>
+            <c:multiLvlStrRef>
+              <c:f>Sheet1!$A$2:$A$5</c:f>
+              <c:multiLvlStrCache>
+                <c:ptCount val="4"/>
+                <c:lvl>
+                  <c:pt idx="0">
+                    <c:v>초기 (2~4월)</c:v>
+                  </c:pt>
+                  <c:pt idx="1">
+                    <c:v>4.x (5~6월)</c:v>
+                  </c:pt>
+                  <c:pt idx="2">
+                    <c:v>5 (7~8월)</c:v>
+                  </c:pt>
+                  <c:pt idx="3">
+                    <c:v>5.x (9월)</c:v>
+                  </c:pt>
+                </c:lvl>
+              </c:multiLvlStrCache>
+            </c:multiLvlStrRef>
+          </c:cat>
+          <c:val>
+            <c:numRef>
+              <c:f>Sheet1!$C$2:$C$5</c:f>
+              <c:numCache>
+                <c:formatCode>General</c:formatCode>
+                <c:ptCount val="4"/>
+                <c:pt idx="0">
+                  <c:v>100</c:v>
+                </c:pt>
+                <c:pt idx="1">
+                  <c:v>148</c:v>
+                </c:pt>
+                <c:pt idx="2">
+                  <c:v>176</c:v>
+                </c:pt>
+                <c:pt idx="3">
+                  <c:v>148</c:v>
+                </c:pt>
+              </c:numCache>
+            </c:numRef>
+          </c:val>
+        </c:ser>
+        <c:ser>
+          <c:idx val="2"/>
+          <c:order val="2"/>
+          <c:tx>
+            <c:strRef>
+              <c:f>Sheet1!$D$1</c:f>
+              <c:strCache>
+                <c:ptCount val="1"/>
+                <c:pt idx="0">
+                  <c:v>PR당 변경 파일</c:v>
+                </c:pt>
+              </c:strCache>
+            </c:strRef>
+          </c:tx>
+          <c:spPr>
+            <a:solidFill>
+              <a:srgbClr val="94A2DB"/>
+            </a:solidFill>
+            <a:effectLst/>
+          </c:spPr>
+          <c:invertIfNegative val="0"/>
+          <c:dLbls>
+            <c:numFmt formatCode="#,##0" sourceLinked="0"/>
+            <c:txPr>
+              <a:bodyPr/>
+              <a:lstStyle/>
+              <a:p>
+                <a:pPr>
+                  <a:defRPr b="0" i="0" strike="noStrike" sz="1100" u="none">
+                    <a:solidFill>
+                      <a:srgbClr val="EDEAE3"/>
+                    </a:solidFill>
+                    <a:latin typeface="Arial"/>
+                  </a:defRPr>
+                </a:pPr>
+              </a:p>
+            </c:txPr>
+            <c:showLegendKey val="0"/>
+            <c:showVal val="1"/>
+            <c:showCatName val="0"/>
+            <c:showSerName val="0"/>
+            <c:showPercent val="0"/>
+            <c:showBubbleSize val="0"/>
+            <c:showLeaderLines val="0"/>
+          </c:dLbls>
+          <c:cat>
+            <c:multiLvlStrRef>
+              <c:f>Sheet1!$A$2:$A$5</c:f>
+              <c:multiLvlStrCache>
+                <c:ptCount val="4"/>
+                <c:lvl>
+                  <c:pt idx="0">
+                    <c:v>초기 (2~4월)</c:v>
+                  </c:pt>
+                  <c:pt idx="1">
+                    <c:v>4.x (5~6월)</c:v>
+                  </c:pt>
+                  <c:pt idx="2">
+                    <c:v>5 (7~8월)</c:v>
+                  </c:pt>
+                  <c:pt idx="3">
+                    <c:v>5.x (9월)</c:v>
+                  </c:pt>
+                </c:lvl>
+              </c:multiLvlStrCache>
+            </c:multiLvlStrRef>
+          </c:cat>
+          <c:val>
+            <c:numRef>
+              <c:f>Sheet1!$D$2:$D$5</c:f>
+              <c:numCache>
+                <c:formatCode>General</c:formatCode>
+                <c:ptCount val="4"/>
+                <c:pt idx="0">
+                  <c:v>100</c:v>
+                </c:pt>
+                <c:pt idx="1">
+                  <c:v>140</c:v>
+                </c:pt>
+                <c:pt idx="2">
+                  <c:v>140</c:v>
+                </c:pt>
+                <c:pt idx="3">
+                  <c:v>200</c:v>
+                </c:pt>
+              </c:numCache>
+            </c:numRef>
+          </c:val>
+        </c:ser>
+        <c:dLbls>
+          <c:numFmt formatCode="#,##0" sourceLinked="0"/>
+          <c:txPr>
+            <a:bodyPr/>
+            <a:lstStyle/>
+            <a:p>
+              <a:pPr>
+                <a:defRPr b="0" i="0" strike="noStrike" sz="1100" u="none">
+                  <a:solidFill>
+                    <a:srgbClr val="EDEAE3"/>
+                  </a:solidFill>
+                  <a:latin typeface="Arial"/>
+                </a:defRPr>
+              </a:pPr>
+            </a:p>
+          </c:txPr>
+          <c:showLegendKey val="0"/>
+          <c:showVal val="1"/>
+          <c:showCatName val="0"/>
+          <c:showSerName val="0"/>
+          <c:showPercent val="0"/>
+          <c:showBubbleSize val="0"/>
+          <c:showLeaderLines val="0"/>
+        </c:dLbls>
+        <c:gapWidth val="35"/>
+        <c:overlap val="0"/>
+        <c:axId val="2094734554"/>
+        <c:axId val="2094734552"/>
+        <c:axId val="2094734556"/>
+      </c:barChart>
+      <c:catAx>
+        <c:axId val="2094734554"/>
+        <c:scaling>
+          <c:orientation val="minMax"/>
+        </c:scaling>
+        <c:delete val="0"/>
+        <c:axPos val="b"/>
+        <c:numFmt formatCode="General" sourceLinked="1"/>
+        <c:majorTickMark val="out"/>
+        <c:minorTickMark val="none"/>
+        <c:tickLblPos val="low"/>
+        <c:spPr>
+          <a:ln w="12700" cap="flat">
+            <a:noFill/>
+            <a:prstDash val="solid"/>
+            <a:round/>
+          </a:ln>
+        </c:spPr>
+        <c:txPr>
+          <a:bodyPr/>
+          <a:lstStyle/>
+          <a:p>
+            <a:pPr>
+              <a:defRPr sz="1200" b="0" i="0" u="none" strike="noStrike">
+                <a:solidFill>
+                  <a:srgbClr val="ABBAB2"/>
+                </a:solidFill>
+                <a:latin typeface="Malgun Gothic"/>
+              </a:defRPr>
+            </a:pPr>
+            <a:endParaRPr lang="en-US"/>
+          </a:p>
+        </c:txPr>
+        <c:crossAx val="2094734552"/>
+        <c:crosses val="autoZero"/>
+        <c:auto val="1"/>
+        <c:lblAlgn val="ctr"/>
+        <c:noMultiLvlLbl val="1"/>
+      </c:catAx>
+      <c:valAx>
+        <c:axId val="2094734552"/>
+        <c:scaling>
+          <c:orientation val="minMax"/>
+          <c:max val="250"/>
+          <c:min val="0"/>
+        </c:scaling>
+        <c:delete val="0"/>
+        <c:axPos val="l"/>
+        <c:majorGridlines>
+          <c:spPr>
+            <a:ln w="6350" cap="flat">
+              <a:solidFill>
+                <a:srgbClr val="364A41"/>
+              </a:solidFill>
+              <a:prstDash val="solid"/>
+              <a:round/>
+            </a:ln>
+          </c:spPr>
+        </c:majorGridlines>
+        <c:numFmt formatCode="General" sourceLinked="0"/>
+        <c:majorTickMark val="out"/>
+        <c:minorTickMark val="none"/>
+        <c:tickLblPos val="nextTo"/>
+        <c:spPr>
+          <a:ln w="12700" cap="flat">
+            <a:noFill/>
+            <a:prstDash val="solid"/>
+            <a:round/>
+          </a:ln>
+        </c:spPr>
+        <c:txPr>
+          <a:bodyPr/>
+          <a:lstStyle/>
+          <a:p>
+            <a:pPr>
+              <a:defRPr sz="1100" b="0" i="0" u="none" strike="noStrike">
+                <a:solidFill>
+                  <a:srgbClr val="ABBAB2"/>
+                </a:solidFill>
+                <a:latin typeface="Arial"/>
+              </a:defRPr>
+            </a:pPr>
+            <a:endParaRPr lang="en-US"/>
+          </a:p>
+        </c:txPr>
+        <c:crossAx val="2094734554"/>
+        <c:crosses val="autoZero"/>
+        <c:crossBetween val="between"/>
+      </c:valAx>
+      <c:spPr>
+        <a:noFill/>
+        <a:ln>
+          <a:noFill/>
+        </a:ln>
+        <a:effectLst/>
+      </c:spPr>
+    </c:plotArea>
+    <c:legend>
+      <c:legendPos val="t"/>
+      <c:overlay val="0"/>
+      <c:txPr>
+        <a:bodyPr/>
+        <a:lstStyle/>
+        <a:p>
+          <a:pPr>
+            <a:defRPr sz="1200">
+              <a:solidFill>
+                <a:srgbClr val="ABBAB2"/>
+              </a:solidFill>
+              <a:latin typeface="Malgun Gothic"/>
+              <a:cs typeface="Malgun Gothic"/>
+            </a:defRPr>
+          </a:pPr>
+          <a:endParaRPr lang="en-US"/>
+        </a:p>
+      </c:txPr>
+    </c:legend>
+    <c:plotVisOnly val="1"/>
+    <c:dispBlanksAs val="span"/>
+  </c:chart>
+  <c:spPr>
+    <a:noFill/>
+    <a:ln>
+      <a:noFill/>
+    </a:ln>
+    <a:effectLst/>
+  </c:spPr>
+  <c:externalData r:id="rId1">
+    <c:autoUpdate val="0"/>
+  </c:externalData>
+</c:chartSpace>
+</file>
+
+<file path=ppt/charts/chart6.xml><?xml version="1.0" encoding="utf-8"?>
 <c:chartSpace xmlns:c="http://schemas.openxmlformats.org/drawingml/2006/chart" xmlns:a="http://schemas.openxmlformats.org/drawingml/2006/main" xmlns:r="http://schemas.openxmlformats.org/officeDocument/2006/relationships">
   <c:date1904 val="0"/>
   <c:roundedCorners val="1"/>
@@ -2000,7 +2472,7 @@
 </c:chartSpace>
 </file>
 
-<file path=ppt/charts/chart6.xml><?xml version="1.0" encoding="utf-8"?>
+<file path=ppt/charts/chart7.xml><?xml version="1.0" encoding="utf-8"?>
 <c:chartSpace xmlns:c="http://schemas.openxmlformats.org/drawingml/2006/chart" xmlns:a="http://schemas.openxmlformats.org/drawingml/2006/main" xmlns:r="http://schemas.openxmlformats.org/officeDocument/2006/relationships">
   <c:date1904 val="0"/>
   <c:roundedCorners val="1"/>
@@ -2428,7 +2900,7 @@
 </c:chartSpace>
 </file>
 
-<file path=ppt/charts/chart7.xml><?xml version="1.0" encoding="utf-8"?>
+<file path=ppt/charts/chart8.xml><?xml version="1.0" encoding="utf-8"?>
 <c:chartSpace xmlns:c="http://schemas.openxmlformats.org/drawingml/2006/chart" xmlns:a="http://schemas.openxmlformats.org/drawingml/2006/main" xmlns:r="http://schemas.openxmlformats.org/officeDocument/2006/relationships">
   <c:date1904 val="0"/>
   <c:roundedCorners val="1"/>
@@ -3514,6 +3986,94 @@
             <a:fld id="{F7021451-1387-4CA6-816F-3879F97B5CBC}" type="slidenum">
               <a:rPr lang="en-US"/>
               <a:t>12</a:t>
+            </a:fld>
+            <a:endParaRPr lang="en-US"/>
+          </a:p>
+        </p:txBody>
+      </p:sp>
+    </p:spTree>
+    <p:extLst>
+      <p:ext uri="{BB962C8B-B14F-4D97-AF65-F5344CB8AC3E}">
+        <p14:creationId xmlns:p14="http://schemas.microsoft.com/office/powerpoint/2010/main" val="1024086991"/>
+      </p:ext>
+    </p:extLst>
+  </p:cSld>
+  <p:clrMapOvr>
+    <a:masterClrMapping/>
+  </p:clrMapOvr>
+</p:notes>
+</file>
+
+<file path=ppt/notesSlides/notesSlide13.xml><?xml version="1.0" encoding="utf-8"?>
+<p:notes xmlns:a="http://schemas.openxmlformats.org/drawingml/2006/main" xmlns:r="http://schemas.openxmlformats.org/officeDocument/2006/relationships" xmlns:p="http://schemas.openxmlformats.org/presentationml/2006/main">
+  <p:cSld>
+    <p:spTree>
+      <p:nvGrpSpPr>
+        <p:cNvPr id="1" name=""/>
+        <p:cNvGrpSpPr/>
+        <p:nvPr/>
+      </p:nvGrpSpPr>
+      <p:grpSpPr>
+        <a:xfrm>
+          <a:off x="0" y="0"/>
+          <a:ext cx="0" cy="0"/>
+          <a:chOff x="0" y="0"/>
+          <a:chExt cx="0" cy="0"/>
+        </a:xfrm>
+      </p:grpSpPr>
+      <p:sp>
+        <p:nvSpPr>
+          <p:cNvPr id="2" name="Slide Image Placeholder 1"/>
+          <p:cNvSpPr>
+            <a:spLocks noGrp="1" noRot="1" noChangeAspect="1"/>
+          </p:cNvSpPr>
+          <p:nvPr>
+            <p:ph type="sldImg"/>
+          </p:nvPr>
+        </p:nvSpPr>
+        <p:spPr/>
+      </p:sp>
+      <p:sp>
+        <p:nvSpPr>
+          <p:cNvPr id="3" name="Notes Placeholder 2"/>
+          <p:cNvSpPr>
+            <a:spLocks noGrp="1"/>
+          </p:cNvSpPr>
+          <p:nvPr>
+            <p:ph type="body" idx="1"/>
+          </p:nvPr>
+        </p:nvSpPr>
+        <p:spPr/>
+        <p:txBody>
+          <a:bodyPr/>
+          <a:lstStyle/>
+          <a:p>
+            <a:r>
+              <a:rPr lang="en-US" dirty="0"/>
+              <a:t/>
+            </a:r>
+            <a:endParaRPr lang="en-US" dirty="0"/>
+          </a:p>
+        </p:txBody>
+      </p:sp>
+      <p:sp>
+        <p:nvSpPr>
+          <p:cNvPr id="4" name="Slide Number Placeholder 3"/>
+          <p:cNvSpPr>
+            <a:spLocks noGrp="1"/>
+          </p:cNvSpPr>
+          <p:nvPr>
+            <p:ph type="sldNum" sz="quarter" idx="10"/>
+          </p:nvPr>
+        </p:nvSpPr>
+        <p:spPr/>
+        <p:txBody>
+          <a:bodyPr/>
+          <a:lstStyle/>
+          <a:p>
+            <a:fld id="{F7021451-1387-4CA6-816F-3879F97B5CBC}" type="slidenum">
+              <a:rPr lang="en-US"/>
+              <a:t>13</a:t>
             </a:fld>
             <a:endParaRPr lang="en-US"/>
           </a:p>
@@ -4944,7 +5504,7 @@
                 <a:ea typeface="Arial" pitchFamily="34" charset="-122"/>
                 <a:cs typeface="Arial" pitchFamily="34" charset="-120"/>
               </a:rPr>
-              <a:t>845</a:t>
+              <a:t>750</a:t>
             </a:r>
             <a:endParaRPr lang="en-US" sz="4400" dirty="0"/>
           </a:p>
@@ -5100,7 +5660,7 @@
                 <a:ea typeface="Arial" pitchFamily="34" charset="-122"/>
                 <a:cs typeface="Arial" pitchFamily="34" charset="-120"/>
               </a:rPr>
-              <a:t>86%</a:t>
+              <a:t>96%</a:t>
             </a:r>
             <a:endParaRPr lang="en-US" sz="4400" dirty="0"/>
           </a:p>
@@ -5210,7 +5770,7 @@
                 <a:ea typeface="Malgun Gothic" pitchFamily="34" charset="-122"/>
                 <a:cs typeface="Malgun Gothic" pitchFamily="34" charset="-120"/>
               </a:rPr>
-              <a:t>READINESS</a:t>
+              <a:t>MATURITY</a:t>
             </a:r>
             <a:endParaRPr lang="en-US" sz="1300" dirty="0"/>
           </a:p>
@@ -5249,7 +5809,7 @@
                 <a:ea typeface="Malgun Gothic" pitchFamily="34" charset="-122"/>
                 <a:cs typeface="Malgun Gothic" pitchFamily="34" charset="-120"/>
               </a:rPr>
-              <a:t>상용화까지 얼마나 왔나 — 종합 67%</a:t>
+              <a:t>AI 활용 성숙도 — 4단계로 진화</a:t>
             </a:r>
             <a:endParaRPr lang="en-US" sz="3000" dirty="0"/>
           </a:p>
@@ -5263,12 +5823,12 @@
         </p:nvSpPr>
         <p:spPr>
           <a:xfrm>
-            <a:off x="548640" y="1554480"/>
-            <a:ext cx="6126480" cy="4663440"/>
+            <a:off x="548640" y="1645920"/>
+            <a:ext cx="2560320" cy="3931920"/>
           </a:xfrm>
           <a:prstGeom prst="roundRect">
             <a:avLst>
-              <a:gd name="adj" fmla="val 1569"/>
+              <a:gd name="adj" fmla="val 2857"/>
             </a:avLst>
           </a:prstGeom>
           <a:solidFill>
@@ -5282,36 +5842,282 @@
           </a:ln>
         </p:spPr>
       </p:sp>
-      <p:graphicFrame>
-        <p:nvGraphicFramePr>
-          <p:cNvPr id="5" name="Chart 0" descr=""/>
-          <p:cNvGraphicFramePr/>
-          <p:nvPr/>
-        </p:nvGraphicFramePr>
-        <p:xfrm>
-          <a:off x="685800" y="1645920"/>
-          <a:ext cx="5852160" cy="4480560"/>
-        </p:xfrm>
-        <a:graphic xmlns:a="http://schemas.openxmlformats.org/drawingml/2006/main">
-          <a:graphicData uri="http://schemas.openxmlformats.org/drawingml/2006/chart">
-            <c:chart xmlns:c="http://schemas.openxmlformats.org/drawingml/2006/chart" r:id="rId1"/>
-          </a:graphicData>
-        </a:graphic>
-      </p:graphicFrame>
-      <p:sp>
-        <p:nvSpPr>
-          <p:cNvPr id="6" name="Shape 3"/>
+      <p:sp>
+        <p:nvSpPr>
+          <p:cNvPr id="5" name="Shape 3"/>
           <p:cNvSpPr/>
           <p:nvPr/>
         </p:nvSpPr>
         <p:spPr>
           <a:xfrm>
-            <a:off x="6949440" y="1554480"/>
-            <a:ext cx="4663440" cy="4663440"/>
+            <a:off x="822960" y="1874520"/>
+            <a:ext cx="640080" cy="640080"/>
+          </a:xfrm>
+          <a:prstGeom prst="ellipse">
+            <a:avLst/>
+          </a:prstGeom>
+          <a:solidFill>
+            <a:srgbClr val="2A3C35"/>
+          </a:solidFill>
+          <a:ln w="12700">
+            <a:solidFill>
+              <a:srgbClr val="364A41"/>
+            </a:solidFill>
+            <a:prstDash val="solid"/>
+          </a:ln>
+        </p:spPr>
+      </p:sp>
+      <p:sp>
+        <p:nvSpPr>
+          <p:cNvPr id="6" name="Text 4"/>
+          <p:cNvSpPr txBox="1"/>
+          <p:nvPr/>
+        </p:nvSpPr>
+        <p:spPr>
+          <a:xfrm>
+            <a:off x="822960" y="1874520"/>
+            <a:ext cx="640080" cy="640080"/>
+          </a:xfrm>
+          <a:prstGeom prst="rect">
+            <a:avLst/>
+          </a:prstGeom>
+          <a:noFill/>
+          <a:ln/>
+        </p:spPr>
+        <p:txBody>
+          <a:bodyPr wrap="square" lIns="0" tIns="0" rIns="0" bIns="0" rtlCol="0" anchor="ctr"/>
+          <a:lstStyle/>
+          <a:p>
+            <a:pPr algn="ctr" indent="0" marL="0">
+              <a:buNone/>
+            </a:pPr>
+            <a:r>
+              <a:rPr lang="en-US" sz="2200" b="1" dirty="0">
+                <a:solidFill>
+                  <a:srgbClr val="EDEAE3"/>
+                </a:solidFill>
+                <a:latin typeface="Arial" pitchFamily="34" charset="0"/>
+                <a:ea typeface="Arial" pitchFamily="34" charset="-122"/>
+                <a:cs typeface="Arial" pitchFamily="34" charset="-120"/>
+              </a:rPr>
+              <a:t>1</a:t>
+            </a:r>
+            <a:endParaRPr lang="en-US" sz="2200" dirty="0"/>
+          </a:p>
+        </p:txBody>
+      </p:sp>
+      <p:sp>
+        <p:nvSpPr>
+          <p:cNvPr id="7" name="Text 5"/>
+          <p:cNvSpPr txBox="1"/>
+          <p:nvPr/>
+        </p:nvSpPr>
+        <p:spPr>
+          <a:xfrm>
+            <a:off x="822960" y="2743200"/>
+            <a:ext cx="2148840" cy="457200"/>
+          </a:xfrm>
+          <a:prstGeom prst="rect">
+            <a:avLst/>
+          </a:prstGeom>
+          <a:noFill/>
+          <a:ln/>
+        </p:spPr>
+        <p:txBody>
+          <a:bodyPr wrap="square" lIns="0" tIns="0" rIns="0" bIns="0" rtlCol="0" anchor="ctr"/>
+          <a:lstStyle/>
+          <a:p>
+            <a:pPr indent="0" marL="0">
+              <a:buNone/>
+            </a:pPr>
+            <a:r>
+              <a:rPr lang="en-US" sz="1800" b="1" dirty="0">
+                <a:solidFill>
+                  <a:srgbClr val="EDEAE3"/>
+                </a:solidFill>
+                <a:latin typeface="Malgun Gothic" pitchFamily="34" charset="0"/>
+                <a:ea typeface="Malgun Gothic" pitchFamily="34" charset="-122"/>
+                <a:cs typeface="Malgun Gothic" pitchFamily="34" charset="-120"/>
+              </a:rPr>
+              <a:t>프롬프트 코딩</a:t>
+            </a:r>
+            <a:endParaRPr lang="en-US" sz="1800" dirty="0"/>
+          </a:p>
+        </p:txBody>
+      </p:sp>
+      <p:sp>
+        <p:nvSpPr>
+          <p:cNvPr id="8" name="Text 6"/>
+          <p:cNvSpPr txBox="1"/>
+          <p:nvPr/>
+        </p:nvSpPr>
+        <p:spPr>
+          <a:xfrm>
+            <a:off x="822960" y="3200400"/>
+            <a:ext cx="2148840" cy="320040"/>
+          </a:xfrm>
+          <a:prstGeom prst="rect">
+            <a:avLst/>
+          </a:prstGeom>
+          <a:noFill/>
+          <a:ln/>
+        </p:spPr>
+        <p:txBody>
+          <a:bodyPr wrap="square" lIns="0" tIns="0" rIns="0" bIns="0" rtlCol="0" anchor="ctr"/>
+          <a:lstStyle/>
+          <a:p>
+            <a:pPr indent="0" marL="0">
+              <a:buNone/>
+            </a:pPr>
+            <a:r>
+              <a:rPr lang="en-US" sz="1300" dirty="0">
+                <a:solidFill>
+                  <a:srgbClr val="ABBAB2"/>
+                </a:solidFill>
+                <a:latin typeface="Malgun Gothic" pitchFamily="34" charset="0"/>
+                <a:ea typeface="Malgun Gothic" pitchFamily="34" charset="-122"/>
+                <a:cs typeface="Malgun Gothic" pitchFamily="34" charset="-120"/>
+              </a:rPr>
+              <a:t>2~3월</a:t>
+            </a:r>
+            <a:endParaRPr lang="en-US" sz="1300" dirty="0"/>
+          </a:p>
+        </p:txBody>
+      </p:sp>
+      <p:sp>
+        <p:nvSpPr>
+          <p:cNvPr id="9" name="Text 7"/>
+          <p:cNvSpPr txBox="1"/>
+          <p:nvPr/>
+        </p:nvSpPr>
+        <p:spPr>
+          <a:xfrm>
+            <a:off x="822960" y="3657600"/>
+            <a:ext cx="2194560" cy="1097280"/>
+          </a:xfrm>
+          <a:prstGeom prst="rect">
+            <a:avLst/>
+          </a:prstGeom>
+          <a:noFill/>
+          <a:ln/>
+        </p:spPr>
+        <p:txBody>
+          <a:bodyPr wrap="square" lIns="0" tIns="0" rIns="0" bIns="0" rtlCol="0" anchor="t"/>
+          <a:lstStyle/>
+          <a:p>
+            <a:pPr indent="0" marL="0">
+              <a:buNone/>
+            </a:pPr>
+            <a:r>
+              <a:rPr lang="en-US" sz="1300" dirty="0">
+                <a:solidFill>
+                  <a:srgbClr val="ABBAB2"/>
+                </a:solidFill>
+                <a:latin typeface="Malgun Gothic" pitchFamily="34" charset="0"/>
+                <a:ea typeface="Malgun Gothic" pitchFamily="34" charset="-122"/>
+                <a:cs typeface="Malgun Gothic" pitchFamily="34" charset="-120"/>
+              </a:rPr>
+              <a:t>대화로 기능 단위 구현</a:t>
+            </a:r>
+            <a:endParaRPr lang="en-US" sz="1300" dirty="0"/>
+          </a:p>
+          <a:p>
+            <a:pPr indent="0" marL="0">
+              <a:buNone/>
+            </a:pPr>
+            <a:r>
+              <a:rPr lang="en-US" sz="1300" dirty="0">
+                <a:solidFill>
+                  <a:srgbClr val="ABBAB2"/>
+                </a:solidFill>
+                <a:latin typeface="Malgun Gothic" pitchFamily="34" charset="0"/>
+                <a:ea typeface="Malgun Gothic" pitchFamily="34" charset="-122"/>
+                <a:cs typeface="Malgun Gothic" pitchFamily="34" charset="-120"/>
+              </a:rPr>
+              <a:t>CLAUDE.md 첫 도입</a:t>
+            </a:r>
+            <a:endParaRPr lang="en-US" sz="1300" dirty="0"/>
+          </a:p>
+        </p:txBody>
+      </p:sp>
+      <p:sp>
+        <p:nvSpPr>
+          <p:cNvPr id="10" name="Text 8"/>
+          <p:cNvSpPr txBox="1"/>
+          <p:nvPr/>
+        </p:nvSpPr>
+        <p:spPr>
+          <a:xfrm>
+            <a:off x="822960" y="4800600"/>
+            <a:ext cx="2148840" cy="548640"/>
+          </a:xfrm>
+          <a:prstGeom prst="rect">
+            <a:avLst/>
+          </a:prstGeom>
+          <a:noFill/>
+          <a:ln/>
+        </p:spPr>
+        <p:txBody>
+          <a:bodyPr wrap="square" lIns="0" tIns="0" rIns="0" bIns="0" rtlCol="0" anchor="ctr"/>
+          <a:lstStyle/>
+          <a:p>
+            <a:pPr indent="0" marL="0">
+              <a:buNone/>
+            </a:pPr>
+            <a:r>
+              <a:rPr lang="en-US" sz="1700" b="1" dirty="0">
+                <a:solidFill>
+                  <a:srgbClr val="EDEAE3"/>
+                </a:solidFill>
+                <a:latin typeface="Malgun Gothic" pitchFamily="34" charset="0"/>
+                <a:ea typeface="Malgun Gothic" pitchFamily="34" charset="-122"/>
+                <a:cs typeface="Malgun Gothic" pitchFamily="34" charset="-120"/>
+              </a:rPr>
+              <a:t>PR 54건/월</a:t>
+            </a:r>
+            <a:endParaRPr lang="en-US" sz="1700" dirty="0"/>
+          </a:p>
+        </p:txBody>
+      </p:sp>
+      <p:sp>
+        <p:nvSpPr>
+          <p:cNvPr id="11" name="Shape 9"/>
+          <p:cNvSpPr/>
+          <p:nvPr/>
+        </p:nvSpPr>
+        <p:spPr>
+          <a:xfrm>
+            <a:off x="3136392" y="3703320"/>
+            <a:ext cx="219456" cy="274320"/>
+          </a:xfrm>
+          <a:prstGeom prst="rightArrow">
+            <a:avLst/>
+          </a:prstGeom>
+          <a:solidFill>
+            <a:srgbClr val="94A2DB"/>
+          </a:solidFill>
+          <a:ln w="12700">
+            <a:solidFill>
+              <a:srgbClr val="94A2DB"/>
+            </a:solidFill>
+            <a:prstDash val="solid"/>
+          </a:ln>
+        </p:spPr>
+      </p:sp>
+      <p:sp>
+        <p:nvSpPr>
+          <p:cNvPr id="12" name="Shape 10"/>
+          <p:cNvSpPr/>
+          <p:nvPr/>
+        </p:nvSpPr>
+        <p:spPr>
+          <a:xfrm>
+            <a:off x="3383280" y="1645920"/>
+            <a:ext cx="2560320" cy="3931920"/>
           </a:xfrm>
           <a:prstGeom prst="roundRect">
             <a:avLst>
-              <a:gd name="adj" fmla="val 1569"/>
+              <a:gd name="adj" fmla="val 2857"/>
             </a:avLst>
           </a:prstGeom>
           <a:solidFill>
@@ -5327,53 +6133,156 @@
       </p:sp>
       <p:sp>
         <p:nvSpPr>
-          <p:cNvPr id="7" name="Text 4"/>
-          <p:cNvSpPr txBox="1"/>
-          <p:nvPr/>
-        </p:nvSpPr>
-        <p:spPr>
-          <a:xfrm>
-            <a:off x="7178040" y="1691640"/>
-            <a:ext cx="4206240" cy="365760"/>
-          </a:xfrm>
-          <a:prstGeom prst="rect">
-            <a:avLst/>
-          </a:prstGeom>
-          <a:noFill/>
-          <a:ln/>
-        </p:spPr>
-        <p:txBody>
-          <a:bodyPr wrap="square" lIns="0" tIns="0" rIns="0" bIns="0" rtlCol="0" anchor="ctr"/>
-          <a:lstStyle/>
-          <a:p>
-            <a:pPr indent="0" marL="0">
-              <a:buNone/>
-            </a:pPr>
-            <a:r>
-              <a:rPr lang="en-US" sz="1500" b="1" dirty="0">
+          <p:cNvPr id="13" name="Shape 11"/>
+          <p:cNvSpPr/>
+          <p:nvPr/>
+        </p:nvSpPr>
+        <p:spPr>
+          <a:xfrm>
+            <a:off x="3657600" y="1874520"/>
+            <a:ext cx="640080" cy="640080"/>
+          </a:xfrm>
+          <a:prstGeom prst="ellipse">
+            <a:avLst/>
+          </a:prstGeom>
+          <a:solidFill>
+            <a:srgbClr val="2A3C35"/>
+          </a:solidFill>
+          <a:ln w="12700">
+            <a:solidFill>
+              <a:srgbClr val="364A41"/>
+            </a:solidFill>
+            <a:prstDash val="solid"/>
+          </a:ln>
+        </p:spPr>
+      </p:sp>
+      <p:sp>
+        <p:nvSpPr>
+          <p:cNvPr id="14" name="Text 12"/>
+          <p:cNvSpPr txBox="1"/>
+          <p:nvPr/>
+        </p:nvSpPr>
+        <p:spPr>
+          <a:xfrm>
+            <a:off x="3657600" y="1874520"/>
+            <a:ext cx="640080" cy="640080"/>
+          </a:xfrm>
+          <a:prstGeom prst="rect">
+            <a:avLst/>
+          </a:prstGeom>
+          <a:noFill/>
+          <a:ln/>
+        </p:spPr>
+        <p:txBody>
+          <a:bodyPr wrap="square" lIns="0" tIns="0" rIns="0" bIns="0" rtlCol="0" anchor="ctr"/>
+          <a:lstStyle/>
+          <a:p>
+            <a:pPr algn="ctr" indent="0" marL="0">
+              <a:buNone/>
+            </a:pPr>
+            <a:r>
+              <a:rPr lang="en-US" sz="2200" b="1" dirty="0">
                 <a:solidFill>
                   <a:srgbClr val="EDEAE3"/>
                 </a:solidFill>
-                <a:latin typeface="Malgun Gothic" pitchFamily="34" charset="0"/>
-                <a:ea typeface="Malgun Gothic" pitchFamily="34" charset="-122"/>
-                <a:cs typeface="Malgun Gothic" pitchFamily="34" charset="-120"/>
-              </a:rPr>
-              <a:t>평가 근거</a:t>
-            </a:r>
-            <a:endParaRPr lang="en-US" sz="1500" dirty="0"/>
-          </a:p>
-        </p:txBody>
-      </p:sp>
-      <p:sp>
-        <p:nvSpPr>
-          <p:cNvPr id="8" name="Text 5"/>
-          <p:cNvSpPr txBox="1"/>
-          <p:nvPr/>
-        </p:nvSpPr>
-        <p:spPr>
-          <a:xfrm>
-            <a:off x="7178040" y="2103120"/>
-            <a:ext cx="4251960" cy="3977640"/>
+                <a:latin typeface="Arial" pitchFamily="34" charset="0"/>
+                <a:ea typeface="Arial" pitchFamily="34" charset="-122"/>
+                <a:cs typeface="Arial" pitchFamily="34" charset="-120"/>
+              </a:rPr>
+              <a:t>2</a:t>
+            </a:r>
+            <a:endParaRPr lang="en-US" sz="2200" dirty="0"/>
+          </a:p>
+        </p:txBody>
+      </p:sp>
+      <p:sp>
+        <p:nvSpPr>
+          <p:cNvPr id="15" name="Text 13"/>
+          <p:cNvSpPr txBox="1"/>
+          <p:nvPr/>
+        </p:nvSpPr>
+        <p:spPr>
+          <a:xfrm>
+            <a:off x="3657600" y="2743200"/>
+            <a:ext cx="2148840" cy="457200"/>
+          </a:xfrm>
+          <a:prstGeom prst="rect">
+            <a:avLst/>
+          </a:prstGeom>
+          <a:noFill/>
+          <a:ln/>
+        </p:spPr>
+        <p:txBody>
+          <a:bodyPr wrap="square" lIns="0" tIns="0" rIns="0" bIns="0" rtlCol="0" anchor="ctr"/>
+          <a:lstStyle/>
+          <a:p>
+            <a:pPr indent="0" marL="0">
+              <a:buNone/>
+            </a:pPr>
+            <a:r>
+              <a:rPr lang="en-US" sz="1800" b="1" dirty="0">
+                <a:solidFill>
+                  <a:srgbClr val="EDEAE3"/>
+                </a:solidFill>
+                <a:latin typeface="Malgun Gothic" pitchFamily="34" charset="0"/>
+                <a:ea typeface="Malgun Gothic" pitchFamily="34" charset="-122"/>
+                <a:cs typeface="Malgun Gothic" pitchFamily="34" charset="-120"/>
+              </a:rPr>
+              <a:t>컨텍스트 문서화</a:t>
+            </a:r>
+            <a:endParaRPr lang="en-US" sz="1800" dirty="0"/>
+          </a:p>
+        </p:txBody>
+      </p:sp>
+      <p:sp>
+        <p:nvSpPr>
+          <p:cNvPr id="16" name="Text 14"/>
+          <p:cNvSpPr txBox="1"/>
+          <p:nvPr/>
+        </p:nvSpPr>
+        <p:spPr>
+          <a:xfrm>
+            <a:off x="3657600" y="3200400"/>
+            <a:ext cx="2148840" cy="320040"/>
+          </a:xfrm>
+          <a:prstGeom prst="rect">
+            <a:avLst/>
+          </a:prstGeom>
+          <a:noFill/>
+          <a:ln/>
+        </p:spPr>
+        <p:txBody>
+          <a:bodyPr wrap="square" lIns="0" tIns="0" rIns="0" bIns="0" rtlCol="0" anchor="ctr"/>
+          <a:lstStyle/>
+          <a:p>
+            <a:pPr indent="0" marL="0">
+              <a:buNone/>
+            </a:pPr>
+            <a:r>
+              <a:rPr lang="en-US" sz="1300" dirty="0">
+                <a:solidFill>
+                  <a:srgbClr val="ABBAB2"/>
+                </a:solidFill>
+                <a:latin typeface="Malgun Gothic" pitchFamily="34" charset="0"/>
+                <a:ea typeface="Malgun Gothic" pitchFamily="34" charset="-122"/>
+                <a:cs typeface="Malgun Gothic" pitchFamily="34" charset="-120"/>
+              </a:rPr>
+              <a:t>4~5월</a:t>
+            </a:r>
+            <a:endParaRPr lang="en-US" sz="1300" dirty="0"/>
+          </a:p>
+        </p:txBody>
+      </p:sp>
+      <p:sp>
+        <p:nvSpPr>
+          <p:cNvPr id="17" name="Text 15"/>
+          <p:cNvSpPr txBox="1"/>
+          <p:nvPr/>
+        </p:nvSpPr>
+        <p:spPr>
+          <a:xfrm>
+            <a:off x="3657600" y="3657600"/>
+            <a:ext cx="2194560" cy="1097280"/>
           </a:xfrm>
           <a:prstGeom prst="rect">
             <a:avLst/>
@@ -5386,13 +6295,549 @@
           <a:lstStyle/>
           <a:p>
             <a:pPr indent="0" marL="0">
-              <a:spcAft>
-                <a:spcPts val="500"/>
-              </a:spcAft>
-              <a:buNone/>
-            </a:pPr>
-            <a:r>
-              <a:rPr lang="en-US" sz="1250" b="1" dirty="0">
+              <a:buNone/>
+            </a:pPr>
+            <a:r>
+              <a:rPr lang="en-US" sz="1300" dirty="0">
+                <a:solidFill>
+                  <a:srgbClr val="ABBAB2"/>
+                </a:solidFill>
+                <a:latin typeface="Malgun Gothic" pitchFamily="34" charset="0"/>
+                <a:ea typeface="Malgun Gothic" pitchFamily="34" charset="-122"/>
+                <a:cs typeface="Malgun Gothic" pitchFamily="34" charset="-120"/>
+              </a:rPr>
+              <a:t>CODE_MAP·디자인 시스템</a:t>
+            </a:r>
+            <a:endParaRPr lang="en-US" sz="1300" dirty="0"/>
+          </a:p>
+          <a:p>
+            <a:pPr indent="0" marL="0">
+              <a:buNone/>
+            </a:pPr>
+            <a:r>
+              <a:rPr lang="en-US" sz="1300" dirty="0">
+                <a:solidFill>
+                  <a:srgbClr val="ABBAB2"/>
+                </a:solidFill>
+                <a:latin typeface="Malgun Gothic" pitchFamily="34" charset="0"/>
+                <a:ea typeface="Malgun Gothic" pitchFamily="34" charset="-122"/>
+                <a:cs typeface="Malgun Gothic" pitchFamily="34" charset="-120"/>
+              </a:rPr>
+              <a:t>문서로 저장소 지도 제공</a:t>
+            </a:r>
+            <a:endParaRPr lang="en-US" sz="1300" dirty="0"/>
+          </a:p>
+        </p:txBody>
+      </p:sp>
+      <p:sp>
+        <p:nvSpPr>
+          <p:cNvPr id="18" name="Text 16"/>
+          <p:cNvSpPr txBox="1"/>
+          <p:nvPr/>
+        </p:nvSpPr>
+        <p:spPr>
+          <a:xfrm>
+            <a:off x="3657600" y="4800600"/>
+            <a:ext cx="2148840" cy="548640"/>
+          </a:xfrm>
+          <a:prstGeom prst="rect">
+            <a:avLst/>
+          </a:prstGeom>
+          <a:noFill/>
+          <a:ln/>
+        </p:spPr>
+        <p:txBody>
+          <a:bodyPr wrap="square" lIns="0" tIns="0" rIns="0" bIns="0" rtlCol="0" anchor="ctr"/>
+          <a:lstStyle/>
+          <a:p>
+            <a:pPr indent="0" marL="0">
+              <a:buNone/>
+            </a:pPr>
+            <a:r>
+              <a:rPr lang="en-US" sz="1700" b="1" dirty="0">
+                <a:solidFill>
+                  <a:srgbClr val="EDEAE3"/>
+                </a:solidFill>
+                <a:latin typeface="Malgun Gothic" pitchFamily="34" charset="0"/>
+                <a:ea typeface="Malgun Gothic" pitchFamily="34" charset="-122"/>
+                <a:cs typeface="Malgun Gothic" pitchFamily="34" charset="-120"/>
+              </a:rPr>
+              <a:t>PR 84건/월</a:t>
+            </a:r>
+            <a:endParaRPr lang="en-US" sz="1700" dirty="0"/>
+          </a:p>
+        </p:txBody>
+      </p:sp>
+      <p:sp>
+        <p:nvSpPr>
+          <p:cNvPr id="19" name="Shape 17"/>
+          <p:cNvSpPr/>
+          <p:nvPr/>
+        </p:nvSpPr>
+        <p:spPr>
+          <a:xfrm>
+            <a:off x="5971032" y="3703320"/>
+            <a:ext cx="219456" cy="274320"/>
+          </a:xfrm>
+          <a:prstGeom prst="rightArrow">
+            <a:avLst/>
+          </a:prstGeom>
+          <a:solidFill>
+            <a:srgbClr val="94A2DB"/>
+          </a:solidFill>
+          <a:ln w="12700">
+            <a:solidFill>
+              <a:srgbClr val="94A2DB"/>
+            </a:solidFill>
+            <a:prstDash val="solid"/>
+          </a:ln>
+        </p:spPr>
+      </p:sp>
+      <p:sp>
+        <p:nvSpPr>
+          <p:cNvPr id="20" name="Shape 18"/>
+          <p:cNvSpPr/>
+          <p:nvPr/>
+        </p:nvSpPr>
+        <p:spPr>
+          <a:xfrm>
+            <a:off x="6217920" y="1645920"/>
+            <a:ext cx="2560320" cy="3931920"/>
+          </a:xfrm>
+          <a:prstGeom prst="roundRect">
+            <a:avLst>
+              <a:gd name="adj" fmla="val 2857"/>
+            </a:avLst>
+          </a:prstGeom>
+          <a:solidFill>
+            <a:srgbClr val="1E2F28"/>
+          </a:solidFill>
+          <a:ln w="9525">
+            <a:solidFill>
+              <a:srgbClr val="364A41"/>
+            </a:solidFill>
+            <a:prstDash val="solid"/>
+          </a:ln>
+        </p:spPr>
+      </p:sp>
+      <p:sp>
+        <p:nvSpPr>
+          <p:cNvPr id="21" name="Shape 19"/>
+          <p:cNvSpPr/>
+          <p:nvPr/>
+        </p:nvSpPr>
+        <p:spPr>
+          <a:xfrm>
+            <a:off x="6492240" y="1874520"/>
+            <a:ext cx="640080" cy="640080"/>
+          </a:xfrm>
+          <a:prstGeom prst="ellipse">
+            <a:avLst/>
+          </a:prstGeom>
+          <a:solidFill>
+            <a:srgbClr val="2A3C35"/>
+          </a:solidFill>
+          <a:ln w="12700">
+            <a:solidFill>
+              <a:srgbClr val="364A41"/>
+            </a:solidFill>
+            <a:prstDash val="solid"/>
+          </a:ln>
+        </p:spPr>
+      </p:sp>
+      <p:sp>
+        <p:nvSpPr>
+          <p:cNvPr id="22" name="Text 20"/>
+          <p:cNvSpPr txBox="1"/>
+          <p:nvPr/>
+        </p:nvSpPr>
+        <p:spPr>
+          <a:xfrm>
+            <a:off x="6492240" y="1874520"/>
+            <a:ext cx="640080" cy="640080"/>
+          </a:xfrm>
+          <a:prstGeom prst="rect">
+            <a:avLst/>
+          </a:prstGeom>
+          <a:noFill/>
+          <a:ln/>
+        </p:spPr>
+        <p:txBody>
+          <a:bodyPr wrap="square" lIns="0" tIns="0" rIns="0" bIns="0" rtlCol="0" anchor="ctr"/>
+          <a:lstStyle/>
+          <a:p>
+            <a:pPr algn="ctr" indent="0" marL="0">
+              <a:buNone/>
+            </a:pPr>
+            <a:r>
+              <a:rPr lang="en-US" sz="2200" b="1" dirty="0">
+                <a:solidFill>
+                  <a:srgbClr val="EDEAE3"/>
+                </a:solidFill>
+                <a:latin typeface="Arial" pitchFamily="34" charset="0"/>
+                <a:ea typeface="Arial" pitchFamily="34" charset="-122"/>
+                <a:cs typeface="Arial" pitchFamily="34" charset="-120"/>
+              </a:rPr>
+              <a:t>3</a:t>
+            </a:r>
+            <a:endParaRPr lang="en-US" sz="2200" dirty="0"/>
+          </a:p>
+        </p:txBody>
+      </p:sp>
+      <p:sp>
+        <p:nvSpPr>
+          <p:cNvPr id="23" name="Text 21"/>
+          <p:cNvSpPr txBox="1"/>
+          <p:nvPr/>
+        </p:nvSpPr>
+        <p:spPr>
+          <a:xfrm>
+            <a:off x="6492240" y="2743200"/>
+            <a:ext cx="2148840" cy="457200"/>
+          </a:xfrm>
+          <a:prstGeom prst="rect">
+            <a:avLst/>
+          </a:prstGeom>
+          <a:noFill/>
+          <a:ln/>
+        </p:spPr>
+        <p:txBody>
+          <a:bodyPr wrap="square" lIns="0" tIns="0" rIns="0" bIns="0" rtlCol="0" anchor="ctr"/>
+          <a:lstStyle/>
+          <a:p>
+            <a:pPr indent="0" marL="0">
+              <a:buNone/>
+            </a:pPr>
+            <a:r>
+              <a:rPr lang="en-US" sz="1800" b="1" dirty="0">
+                <a:solidFill>
+                  <a:srgbClr val="EDEAE3"/>
+                </a:solidFill>
+                <a:latin typeface="Malgun Gothic" pitchFamily="34" charset="0"/>
+                <a:ea typeface="Malgun Gothic" pitchFamily="34" charset="-122"/>
+                <a:cs typeface="Malgun Gothic" pitchFamily="34" charset="-120"/>
+              </a:rPr>
+              <a:t>스킬·자동 게이트</a:t>
+            </a:r>
+            <a:endParaRPr lang="en-US" sz="1800" dirty="0"/>
+          </a:p>
+        </p:txBody>
+      </p:sp>
+      <p:sp>
+        <p:nvSpPr>
+          <p:cNvPr id="24" name="Text 22"/>
+          <p:cNvSpPr txBox="1"/>
+          <p:nvPr/>
+        </p:nvSpPr>
+        <p:spPr>
+          <a:xfrm>
+            <a:off x="6492240" y="3200400"/>
+            <a:ext cx="2148840" cy="320040"/>
+          </a:xfrm>
+          <a:prstGeom prst="rect">
+            <a:avLst/>
+          </a:prstGeom>
+          <a:noFill/>
+          <a:ln/>
+        </p:spPr>
+        <p:txBody>
+          <a:bodyPr wrap="square" lIns="0" tIns="0" rIns="0" bIns="0" rtlCol="0" anchor="ctr"/>
+          <a:lstStyle/>
+          <a:p>
+            <a:pPr indent="0" marL="0">
+              <a:buNone/>
+            </a:pPr>
+            <a:r>
+              <a:rPr lang="en-US" sz="1300" dirty="0">
+                <a:solidFill>
+                  <a:srgbClr val="ABBAB2"/>
+                </a:solidFill>
+                <a:latin typeface="Malgun Gothic" pitchFamily="34" charset="0"/>
+                <a:ea typeface="Malgun Gothic" pitchFamily="34" charset="-122"/>
+                <a:cs typeface="Malgun Gothic" pitchFamily="34" charset="-120"/>
+              </a:rPr>
+              <a:t>6~7월</a:t>
+            </a:r>
+            <a:endParaRPr lang="en-US" sz="1300" dirty="0"/>
+          </a:p>
+        </p:txBody>
+      </p:sp>
+      <p:sp>
+        <p:nvSpPr>
+          <p:cNvPr id="25" name="Text 23"/>
+          <p:cNvSpPr txBox="1"/>
+          <p:nvPr/>
+        </p:nvSpPr>
+        <p:spPr>
+          <a:xfrm>
+            <a:off x="6492240" y="3657600"/>
+            <a:ext cx="2194560" cy="1097280"/>
+          </a:xfrm>
+          <a:prstGeom prst="rect">
+            <a:avLst/>
+          </a:prstGeom>
+          <a:noFill/>
+          <a:ln/>
+        </p:spPr>
+        <p:txBody>
+          <a:bodyPr wrap="square" lIns="0" tIns="0" rIns="0" bIns="0" rtlCol="0" anchor="t"/>
+          <a:lstStyle/>
+          <a:p>
+            <a:pPr indent="0" marL="0">
+              <a:buNone/>
+            </a:pPr>
+            <a:r>
+              <a:rPr lang="en-US" sz="1300" dirty="0">
+                <a:solidFill>
+                  <a:srgbClr val="ABBAB2"/>
+                </a:solidFill>
+                <a:latin typeface="Malgun Gothic" pitchFamily="34" charset="0"/>
+                <a:ea typeface="Malgun Gothic" pitchFamily="34" charset="-122"/>
+                <a:cs typeface="Malgun Gothic" pitchFamily="34" charset="-120"/>
+              </a:rPr>
+              <a:t>스킬 8종, docs-sync CI,</a:t>
+            </a:r>
+            <a:endParaRPr lang="en-US" sz="1300" dirty="0"/>
+          </a:p>
+          <a:p>
+            <a:pPr indent="0" marL="0">
+              <a:buNone/>
+            </a:pPr>
+            <a:r>
+              <a:rPr lang="en-US" sz="1300" dirty="0">
+                <a:solidFill>
+                  <a:srgbClr val="ABBAB2"/>
+                </a:solidFill>
+                <a:latin typeface="Malgun Gothic" pitchFamily="34" charset="0"/>
+                <a:ea typeface="Malgun Gothic" pitchFamily="34" charset="-122"/>
+                <a:cs typeface="Malgun Gothic" pitchFamily="34" charset="-120"/>
+              </a:rPr>
+              <a:t>자동 릴리스·CHANGELOG</a:t>
+            </a:r>
+            <a:endParaRPr lang="en-US" sz="1300" dirty="0"/>
+          </a:p>
+        </p:txBody>
+      </p:sp>
+      <p:sp>
+        <p:nvSpPr>
+          <p:cNvPr id="26" name="Text 24"/>
+          <p:cNvSpPr txBox="1"/>
+          <p:nvPr/>
+        </p:nvSpPr>
+        <p:spPr>
+          <a:xfrm>
+            <a:off x="6492240" y="4800600"/>
+            <a:ext cx="2148840" cy="548640"/>
+          </a:xfrm>
+          <a:prstGeom prst="rect">
+            <a:avLst/>
+          </a:prstGeom>
+          <a:noFill/>
+          <a:ln/>
+        </p:spPr>
+        <p:txBody>
+          <a:bodyPr wrap="square" lIns="0" tIns="0" rIns="0" bIns="0" rtlCol="0" anchor="ctr"/>
+          <a:lstStyle/>
+          <a:p>
+            <a:pPr indent="0" marL="0">
+              <a:buNone/>
+            </a:pPr>
+            <a:r>
+              <a:rPr lang="en-US" sz="1700" b="1" dirty="0">
+                <a:solidFill>
+                  <a:srgbClr val="EDEAE3"/>
+                </a:solidFill>
+                <a:latin typeface="Malgun Gothic" pitchFamily="34" charset="0"/>
+                <a:ea typeface="Malgun Gothic" pitchFamily="34" charset="-122"/>
+                <a:cs typeface="Malgun Gothic" pitchFamily="34" charset="-120"/>
+              </a:rPr>
+              <a:t>PR 150건/월</a:t>
+            </a:r>
+            <a:endParaRPr lang="en-US" sz="1700" dirty="0"/>
+          </a:p>
+        </p:txBody>
+      </p:sp>
+      <p:sp>
+        <p:nvSpPr>
+          <p:cNvPr id="27" name="Shape 25"/>
+          <p:cNvSpPr/>
+          <p:nvPr/>
+        </p:nvSpPr>
+        <p:spPr>
+          <a:xfrm>
+            <a:off x="8805672" y="3703320"/>
+            <a:ext cx="219456" cy="274320"/>
+          </a:xfrm>
+          <a:prstGeom prst="rightArrow">
+            <a:avLst/>
+          </a:prstGeom>
+          <a:solidFill>
+            <a:srgbClr val="94A2DB"/>
+          </a:solidFill>
+          <a:ln w="12700">
+            <a:solidFill>
+              <a:srgbClr val="94A2DB"/>
+            </a:solidFill>
+            <a:prstDash val="solid"/>
+          </a:ln>
+        </p:spPr>
+      </p:sp>
+      <p:sp>
+        <p:nvSpPr>
+          <p:cNvPr id="28" name="Shape 26"/>
+          <p:cNvSpPr/>
+          <p:nvPr/>
+        </p:nvSpPr>
+        <p:spPr>
+          <a:xfrm>
+            <a:off x="9052560" y="1645920"/>
+            <a:ext cx="2560320" cy="3931920"/>
+          </a:xfrm>
+          <a:prstGeom prst="roundRect">
+            <a:avLst>
+              <a:gd name="adj" fmla="val 2857"/>
+            </a:avLst>
+          </a:prstGeom>
+          <a:solidFill>
+            <a:srgbClr val="323853"/>
+          </a:solidFill>
+          <a:ln w="9525">
+            <a:solidFill>
+              <a:srgbClr val="364A41"/>
+            </a:solidFill>
+            <a:prstDash val="solid"/>
+          </a:ln>
+        </p:spPr>
+      </p:sp>
+      <p:sp>
+        <p:nvSpPr>
+          <p:cNvPr id="29" name="Shape 27"/>
+          <p:cNvSpPr/>
+          <p:nvPr/>
+        </p:nvSpPr>
+        <p:spPr>
+          <a:xfrm>
+            <a:off x="9326880" y="1874520"/>
+            <a:ext cx="640080" cy="640080"/>
+          </a:xfrm>
+          <a:prstGeom prst="ellipse">
+            <a:avLst/>
+          </a:prstGeom>
+          <a:solidFill>
+            <a:srgbClr val="94A2DB"/>
+          </a:solidFill>
+          <a:ln w="12700">
+            <a:solidFill>
+              <a:srgbClr val="94A2DB"/>
+            </a:solidFill>
+            <a:prstDash val="solid"/>
+          </a:ln>
+        </p:spPr>
+      </p:sp>
+      <p:sp>
+        <p:nvSpPr>
+          <p:cNvPr id="30" name="Text 28"/>
+          <p:cNvSpPr txBox="1"/>
+          <p:nvPr/>
+        </p:nvSpPr>
+        <p:spPr>
+          <a:xfrm>
+            <a:off x="9326880" y="1874520"/>
+            <a:ext cx="640080" cy="640080"/>
+          </a:xfrm>
+          <a:prstGeom prst="rect">
+            <a:avLst/>
+          </a:prstGeom>
+          <a:noFill/>
+          <a:ln/>
+        </p:spPr>
+        <p:txBody>
+          <a:bodyPr wrap="square" lIns="0" tIns="0" rIns="0" bIns="0" rtlCol="0" anchor="ctr"/>
+          <a:lstStyle/>
+          <a:p>
+            <a:pPr algn="ctr" indent="0" marL="0">
+              <a:buNone/>
+            </a:pPr>
+            <a:r>
+              <a:rPr lang="en-US" sz="2200" b="1" dirty="0">
+                <a:solidFill>
+                  <a:srgbClr val="15231D"/>
+                </a:solidFill>
+                <a:latin typeface="Arial" pitchFamily="34" charset="0"/>
+                <a:ea typeface="Arial" pitchFamily="34" charset="-122"/>
+                <a:cs typeface="Arial" pitchFamily="34" charset="-120"/>
+              </a:rPr>
+              <a:t>4</a:t>
+            </a:r>
+            <a:endParaRPr lang="en-US" sz="2200" dirty="0"/>
+          </a:p>
+        </p:txBody>
+      </p:sp>
+      <p:sp>
+        <p:nvSpPr>
+          <p:cNvPr id="31" name="Text 29"/>
+          <p:cNvSpPr txBox="1"/>
+          <p:nvPr/>
+        </p:nvSpPr>
+        <p:spPr>
+          <a:xfrm>
+            <a:off x="9326880" y="2743200"/>
+            <a:ext cx="2148840" cy="457200"/>
+          </a:xfrm>
+          <a:prstGeom prst="rect">
+            <a:avLst/>
+          </a:prstGeom>
+          <a:noFill/>
+          <a:ln/>
+        </p:spPr>
+        <p:txBody>
+          <a:bodyPr wrap="square" lIns="0" tIns="0" rIns="0" bIns="0" rtlCol="0" anchor="ctr"/>
+          <a:lstStyle/>
+          <a:p>
+            <a:pPr indent="0" marL="0">
+              <a:buNone/>
+            </a:pPr>
+            <a:r>
+              <a:rPr lang="en-US" sz="1800" b="1" dirty="0">
+                <a:solidFill>
+                  <a:srgbClr val="EDEAE3"/>
+                </a:solidFill>
+                <a:latin typeface="Malgun Gothic" pitchFamily="34" charset="0"/>
+                <a:ea typeface="Malgun Gothic" pitchFamily="34" charset="-122"/>
+                <a:cs typeface="Malgun Gothic" pitchFamily="34" charset="-120"/>
+              </a:rPr>
+              <a:t>에이전트 운영</a:t>
+            </a:r>
+            <a:endParaRPr lang="en-US" sz="1800" dirty="0"/>
+          </a:p>
+        </p:txBody>
+      </p:sp>
+      <p:sp>
+        <p:nvSpPr>
+          <p:cNvPr id="32" name="Text 30"/>
+          <p:cNvSpPr txBox="1"/>
+          <p:nvPr/>
+        </p:nvSpPr>
+        <p:spPr>
+          <a:xfrm>
+            <a:off x="9326880" y="3200400"/>
+            <a:ext cx="2148840" cy="320040"/>
+          </a:xfrm>
+          <a:prstGeom prst="rect">
+            <a:avLst/>
+          </a:prstGeom>
+          <a:noFill/>
+          <a:ln/>
+        </p:spPr>
+        <p:txBody>
+          <a:bodyPr wrap="square" lIns="0" tIns="0" rIns="0" bIns="0" rtlCol="0" anchor="ctr"/>
+          <a:lstStyle/>
+          <a:p>
+            <a:pPr indent="0" marL="0">
+              <a:buNone/>
+            </a:pPr>
+            <a:r>
+              <a:rPr lang="en-US" sz="1300" dirty="0">
                 <a:solidFill>
                   <a:srgbClr val="ADBAEB"/>
                 </a:solidFill>
@@ -5400,19 +6845,38 @@
                 <a:ea typeface="Malgun Gothic" pitchFamily="34" charset="-122"/>
                 <a:cs typeface="Malgun Gothic" pitchFamily="34" charset="-120"/>
               </a:rPr>
-              <a:t>기능·CI·배포</a:t>
-            </a:r>
-            <a:endParaRPr lang="en-US" sz="1250" dirty="0"/>
-          </a:p>
-          <a:p>
-            <a:pPr indent="0" marL="0">
-              <a:spcAft>
-                <a:spcPts val="500"/>
-              </a:spcAft>
-              <a:buNone/>
-            </a:pPr>
-            <a:r>
-              <a:rPr lang="en-US" sz="1250" dirty="0">
+              <a:t>8~9월</a:t>
+            </a:r>
+            <a:endParaRPr lang="en-US" sz="1300" dirty="0"/>
+          </a:p>
+        </p:txBody>
+      </p:sp>
+      <p:sp>
+        <p:nvSpPr>
+          <p:cNvPr id="33" name="Text 31"/>
+          <p:cNvSpPr txBox="1"/>
+          <p:nvPr/>
+        </p:nvSpPr>
+        <p:spPr>
+          <a:xfrm>
+            <a:off x="9326880" y="3657600"/>
+            <a:ext cx="2194560" cy="1097280"/>
+          </a:xfrm>
+          <a:prstGeom prst="rect">
+            <a:avLst/>
+          </a:prstGeom>
+          <a:noFill/>
+          <a:ln/>
+        </p:spPr>
+        <p:txBody>
+          <a:bodyPr wrap="square" lIns="0" tIns="0" rIns="0" bIns="0" rtlCol="0" anchor="t"/>
+          <a:lstStyle/>
+          <a:p>
+            <a:pPr indent="0" marL="0">
+              <a:buNone/>
+            </a:pPr>
+            <a:r>
+              <a:rPr lang="en-US" sz="1300" dirty="0">
                 <a:solidFill>
                   <a:srgbClr val="ABBAB2"/>
                 </a:solidFill>
@@ -5420,19 +6884,55 @@
                 <a:ea typeface="Malgun Gothic" pitchFamily="34" charset="-122"/>
                 <a:cs typeface="Malgun Gothic" pitchFamily="34" charset="-120"/>
               </a:rPr>
-              <a:t>라우터 76 · 화면 72 · 모델 60, CI 게이트 3종, Helm/Kustomize 4 overlay + 폐쇄망</a:t>
-            </a:r>
-            <a:endParaRPr lang="en-US" sz="1250" dirty="0"/>
-          </a:p>
-          <a:p>
-            <a:pPr indent="0" marL="0">
-              <a:spcAft>
-                <a:spcPts val="500"/>
-              </a:spcAft>
-              <a:buNone/>
-            </a:pPr>
-            <a:r>
-              <a:rPr lang="en-US" sz="1250" b="1" dirty="0">
+              <a:t>UX 감사 에이전트, 테스트</a:t>
+            </a:r>
+            <a:endParaRPr lang="en-US" sz="1300" dirty="0"/>
+          </a:p>
+          <a:p>
+            <a:pPr indent="0" marL="0">
+              <a:buNone/>
+            </a:pPr>
+            <a:r>
+              <a:rPr lang="en-US" sz="1300" dirty="0">
+                <a:solidFill>
+                  <a:srgbClr val="ABBAB2"/>
+                </a:solidFill>
+                <a:latin typeface="Malgun Gothic" pitchFamily="34" charset="0"/>
+                <a:ea typeface="Malgun Gothic" pitchFamily="34" charset="-122"/>
+                <a:cs typeface="Malgun Gothic" pitchFamily="34" charset="-120"/>
+              </a:rPr>
+              <a:t>1,097개, 안정화 우선</a:t>
+            </a:r>
+            <a:endParaRPr lang="en-US" sz="1300" dirty="0"/>
+          </a:p>
+        </p:txBody>
+      </p:sp>
+      <p:sp>
+        <p:nvSpPr>
+          <p:cNvPr id="34" name="Text 32"/>
+          <p:cNvSpPr txBox="1"/>
+          <p:nvPr/>
+        </p:nvSpPr>
+        <p:spPr>
+          <a:xfrm>
+            <a:off x="9326880" y="4800600"/>
+            <a:ext cx="2148840" cy="548640"/>
+          </a:xfrm>
+          <a:prstGeom prst="rect">
+            <a:avLst/>
+          </a:prstGeom>
+          <a:noFill/>
+          <a:ln/>
+        </p:spPr>
+        <p:txBody>
+          <a:bodyPr wrap="square" lIns="0" tIns="0" rIns="0" bIns="0" rtlCol="0" anchor="ctr"/>
+          <a:lstStyle/>
+          <a:p>
+            <a:pPr indent="0" marL="0">
+              <a:buNone/>
+            </a:pPr>
+            <a:r>
+              <a:rPr lang="en-US" sz="1700" b="1" dirty="0">
                 <a:solidFill>
                   <a:srgbClr val="ADBAEB"/>
                 </a:solidFill>
@@ -5440,155 +6940,15 @@
                 <a:ea typeface="Malgun Gothic" pitchFamily="34" charset="-122"/>
                 <a:cs typeface="Malgun Gothic" pitchFamily="34" charset="-120"/>
               </a:rPr>
-              <a:t>테스트</a:t>
-            </a:r>
-            <a:endParaRPr lang="en-US" sz="1250" dirty="0"/>
-          </a:p>
-          <a:p>
-            <a:pPr indent="0" marL="0">
-              <a:spcAft>
-                <a:spcPts val="500"/>
-              </a:spcAft>
-              <a:buNone/>
-            </a:pPr>
-            <a:r>
-              <a:rPr lang="en-US" sz="1250" dirty="0">
-                <a:solidFill>
-                  <a:srgbClr val="ABBAB2"/>
-                </a:solidFill>
-                <a:latin typeface="Malgun Gothic" pitchFamily="34" charset="0"/>
-                <a:ea typeface="Malgun Gothic" pitchFamily="34" charset="-122"/>
-                <a:cs typeface="Malgun Gothic" pitchFamily="34" charset="-120"/>
-              </a:rPr>
-              <a:t>백엔드 1,097개 (커버리지 미측정), 프론트 단위·E2E 0건</a:t>
-            </a:r>
-            <a:endParaRPr lang="en-US" sz="1250" dirty="0"/>
-          </a:p>
-          <a:p>
-            <a:pPr indent="0" marL="0">
-              <a:spcAft>
-                <a:spcPts val="500"/>
-              </a:spcAft>
-              <a:buNone/>
-            </a:pPr>
-            <a:r>
-              <a:rPr lang="en-US" sz="1250" b="1" dirty="0">
-                <a:solidFill>
-                  <a:srgbClr val="ADBAEB"/>
-                </a:solidFill>
-                <a:latin typeface="Malgun Gothic" pitchFamily="34" charset="0"/>
-                <a:ea typeface="Malgun Gothic" pitchFamily="34" charset="-122"/>
-                <a:cs typeface="Malgun Gothic" pitchFamily="34" charset="-120"/>
-              </a:rPr>
-              <a:t>보안</a:t>
-            </a:r>
-            <a:endParaRPr lang="en-US" sz="1250" dirty="0"/>
-          </a:p>
-          <a:p>
-            <a:pPr indent="0" marL="0">
-              <a:spcAft>
-                <a:spcPts val="500"/>
-              </a:spcAft>
-              <a:buNone/>
-            </a:pPr>
-            <a:r>
-              <a:rPr lang="en-US" sz="1250" dirty="0">
-                <a:solidFill>
-                  <a:srgbClr val="ABBAB2"/>
-                </a:solidFill>
-                <a:latin typeface="Malgun Gothic" pitchFamily="34" charset="0"/>
-                <a:ea typeface="Malgun Gothic" pitchFamily="34" charset="-122"/>
-                <a:cs typeface="Malgun Gothic" pitchFamily="34" charset="-120"/>
-              </a:rPr>
-              <a:t>JWT + viewer/operator/admin + 테넌트 격리 + 감사 로그 / SSO·refresh 토큰 없음</a:t>
-            </a:r>
-            <a:endParaRPr lang="en-US" sz="1250" dirty="0"/>
-          </a:p>
-          <a:p>
-            <a:pPr indent="0" marL="0">
-              <a:spcAft>
-                <a:spcPts val="500"/>
-              </a:spcAft>
-              <a:buNone/>
-            </a:pPr>
-            <a:r>
-              <a:rPr lang="en-US" sz="1250" b="1" dirty="0">
-                <a:solidFill>
-                  <a:srgbClr val="ADBAEB"/>
-                </a:solidFill>
-                <a:latin typeface="Malgun Gothic" pitchFamily="34" charset="0"/>
-                <a:ea typeface="Malgun Gothic" pitchFamily="34" charset="-122"/>
-                <a:cs typeface="Malgun Gothic" pitchFamily="34" charset="-120"/>
-              </a:rPr>
-              <a:t>UX</a:t>
-            </a:r>
-            <a:endParaRPr lang="en-US" sz="1250" dirty="0"/>
-          </a:p>
-          <a:p>
-            <a:pPr indent="0" marL="0">
-              <a:spcAft>
-                <a:spcPts val="500"/>
-              </a:spcAft>
-              <a:buNone/>
-            </a:pPr>
-            <a:r>
-              <a:rPr lang="en-US" sz="1250" dirty="0">
-                <a:solidFill>
-                  <a:srgbClr val="ABBAB2"/>
-                </a:solidFill>
-                <a:latin typeface="Malgun Gothic" pitchFamily="34" charset="0"/>
-                <a:ea typeface="Malgun Gothic" pitchFamily="34" charset="-122"/>
-                <a:cs typeface="Malgun Gothic" pitchFamily="34" charset="-120"/>
-              </a:rPr>
-              <a:t>UX 백로그 101건 중 83건 완료(82%) / i18n·반응형 미대응</a:t>
-            </a:r>
-            <a:endParaRPr lang="en-US" sz="1250" dirty="0"/>
-          </a:p>
-          <a:p>
-            <a:pPr indent="0" marL="0">
-              <a:spcAft>
-                <a:spcPts val="500"/>
-              </a:spcAft>
-              <a:buNone/>
-            </a:pPr>
-            <a:r>
-              <a:rPr lang="en-US" sz="1250" b="1" dirty="0">
-                <a:solidFill>
-                  <a:srgbClr val="ADBAEB"/>
-                </a:solidFill>
-                <a:latin typeface="Malgun Gothic" pitchFamily="34" charset="0"/>
-                <a:ea typeface="Malgun Gothic" pitchFamily="34" charset="-122"/>
-                <a:cs typeface="Malgun Gothic" pitchFamily="34" charset="-120"/>
-              </a:rPr>
-              <a:t>관측</a:t>
-            </a:r>
-            <a:endParaRPr lang="en-US" sz="1250" dirty="0"/>
-          </a:p>
-          <a:p>
-            <a:pPr indent="0" marL="0">
-              <a:spcAft>
-                <a:spcPts val="500"/>
-              </a:spcAft>
-              <a:buNone/>
-            </a:pPr>
-            <a:r>
-              <a:rPr lang="en-US" sz="1250" dirty="0">
-                <a:solidFill>
-                  <a:srgbClr val="ABBAB2"/>
-                </a:solidFill>
-                <a:latin typeface="Malgun Gothic" pitchFamily="34" charset="0"/>
-                <a:ea typeface="Malgun Gothic" pitchFamily="34" charset="-122"/>
-                <a:cs typeface="Malgun Gothic" pitchFamily="34" charset="-120"/>
-              </a:rPr>
-              <a:t>앱 자체 메트릭 exporter 0, 부하 테스트 0</a:t>
-            </a:r>
-            <a:endParaRPr lang="en-US" sz="1250" dirty="0"/>
-          </a:p>
-        </p:txBody>
-      </p:sp>
-      <p:sp>
-        <p:nvSpPr>
-          <p:cNvPr id="9" name="Text 6"/>
+              <a:t>테스트 2배</a:t>
+            </a:r>
+            <a:endParaRPr lang="en-US" sz="1700" dirty="0"/>
+          </a:p>
+        </p:txBody>
+      </p:sp>
+      <p:sp>
+        <p:nvSpPr>
+          <p:cNvPr id="35" name="Text 33"/>
           <p:cNvSpPr txBox="1"/>
           <p:nvPr/>
         </p:nvSpPr>
@@ -5619,7 +6979,7 @@
                 <a:ea typeface="Malgun Gothic" pitchFamily="34" charset="-122"/>
                 <a:cs typeface="Malgun Gothic" pitchFamily="34" charset="-120"/>
               </a:rPr>
-              <a:t>자체 평가: 9개 영역 동일 가중 평균 · 70% 이상 = 상용 기준 충족(강조색)</a:t>
+              <a:t>PR/월 = 해당 구간 월평균 병합 PR · 현재 위치 = 4단계</a:t>
             </a:r>
             <a:endParaRPr lang="en-US" sz="1000" dirty="0"/>
           </a:p>
@@ -5627,7 +6987,7 @@
       </p:sp>
       <p:sp>
         <p:nvSpPr>
-          <p:cNvPr id="10" name="Text 7"/>
+          <p:cNvPr id="36" name="Text 34"/>
           <p:cNvSpPr txBox="1"/>
           <p:nvPr/>
         </p:nvSpPr>
@@ -5729,7 +7089,7 @@
                 <a:ea typeface="Malgun Gothic" pitchFamily="34" charset="-122"/>
                 <a:cs typeface="Malgun Gothic" pitchFamily="34" charset="-120"/>
               </a:rPr>
-              <a:t>NEXT</a:t>
+              <a:t>READINESS</a:t>
             </a:r>
             <a:endParaRPr lang="en-US" sz="1300" dirty="0"/>
           </a:p>
@@ -5768,7 +7128,7 @@
                 <a:ea typeface="Malgun Gothic" pitchFamily="34" charset="-122"/>
                 <a:cs typeface="Malgun Gothic" pitchFamily="34" charset="-120"/>
               </a:rPr>
-              <a:t>남은 과제 — 상용 전환을 막는 5가지</a:t>
+              <a:t>상용화까지 얼마나 왔나 — 종합 67%</a:t>
             </a:r>
             <a:endParaRPr lang="en-US" sz="3000" dirty="0"/>
           </a:p>
@@ -5776,540 +7136,18 @@
       </p:sp>
       <p:sp>
         <p:nvSpPr>
-          <p:cNvPr id="4" name="Text 2"/>
-          <p:cNvSpPr txBox="1"/>
-          <p:nvPr/>
-        </p:nvSpPr>
-        <p:spPr>
-          <a:xfrm>
-            <a:off x="731520" y="1600200"/>
-            <a:ext cx="822960" cy="365760"/>
-          </a:xfrm>
-          <a:prstGeom prst="rect">
-            <a:avLst/>
-          </a:prstGeom>
-          <a:noFill/>
-          <a:ln/>
-        </p:spPr>
-        <p:txBody>
-          <a:bodyPr wrap="square" lIns="0" tIns="0" rIns="0" bIns="0" rtlCol="0" anchor="ctr"/>
-          <a:lstStyle/>
-          <a:p>
-            <a:pPr indent="0" marL="0">
-              <a:buNone/>
-            </a:pPr>
-            <a:r>
-              <a:rPr lang="en-US" sz="1300" b="1" dirty="0">
-                <a:solidFill>
-                  <a:srgbClr val="ABBAB2"/>
-                </a:solidFill>
-                <a:latin typeface="Malgun Gothic" pitchFamily="34" charset="0"/>
-                <a:ea typeface="Malgun Gothic" pitchFamily="34" charset="-122"/>
-                <a:cs typeface="Malgun Gothic" pitchFamily="34" charset="-120"/>
-              </a:rPr>
-              <a:t>우선</a:t>
-            </a:r>
-            <a:endParaRPr lang="en-US" sz="1300" dirty="0"/>
-          </a:p>
-        </p:txBody>
-      </p:sp>
-      <p:sp>
-        <p:nvSpPr>
-          <p:cNvPr id="5" name="Text 3"/>
-          <p:cNvSpPr txBox="1"/>
-          <p:nvPr/>
-        </p:nvSpPr>
-        <p:spPr>
-          <a:xfrm>
-            <a:off x="1645920" y="1600200"/>
-            <a:ext cx="2103120" cy="365760"/>
-          </a:xfrm>
-          <a:prstGeom prst="rect">
-            <a:avLst/>
-          </a:prstGeom>
-          <a:noFill/>
-          <a:ln/>
-        </p:spPr>
-        <p:txBody>
-          <a:bodyPr wrap="square" lIns="0" tIns="0" rIns="0" bIns="0" rtlCol="0" anchor="ctr"/>
-          <a:lstStyle/>
-          <a:p>
-            <a:pPr indent="0" marL="0">
-              <a:buNone/>
-            </a:pPr>
-            <a:r>
-              <a:rPr lang="en-US" sz="1300" b="1" dirty="0">
-                <a:solidFill>
-                  <a:srgbClr val="ABBAB2"/>
-                </a:solidFill>
-                <a:latin typeface="Malgun Gothic" pitchFamily="34" charset="0"/>
-                <a:ea typeface="Malgun Gothic" pitchFamily="34" charset="-122"/>
-                <a:cs typeface="Malgun Gothic" pitchFamily="34" charset="-120"/>
-              </a:rPr>
-              <a:t>과제</a:t>
-            </a:r>
-            <a:endParaRPr lang="en-US" sz="1300" dirty="0"/>
-          </a:p>
-        </p:txBody>
-      </p:sp>
-      <p:sp>
-        <p:nvSpPr>
-          <p:cNvPr id="6" name="Text 4"/>
-          <p:cNvSpPr txBox="1"/>
-          <p:nvPr/>
-        </p:nvSpPr>
-        <p:spPr>
-          <a:xfrm>
-            <a:off x="3840480" y="1600200"/>
-            <a:ext cx="5486400" cy="365760"/>
-          </a:xfrm>
-          <a:prstGeom prst="rect">
-            <a:avLst/>
-          </a:prstGeom>
-          <a:noFill/>
-          <a:ln/>
-        </p:spPr>
-        <p:txBody>
-          <a:bodyPr wrap="square" lIns="0" tIns="0" rIns="0" bIns="0" rtlCol="0" anchor="ctr"/>
-          <a:lstStyle/>
-          <a:p>
-            <a:pPr indent="0" marL="0">
-              <a:buNone/>
-            </a:pPr>
-            <a:r>
-              <a:rPr lang="en-US" sz="1300" b="1" dirty="0">
-                <a:solidFill>
-                  <a:srgbClr val="ABBAB2"/>
-                </a:solidFill>
-                <a:latin typeface="Malgun Gothic" pitchFamily="34" charset="0"/>
-                <a:ea typeface="Malgun Gothic" pitchFamily="34" charset="-122"/>
-                <a:cs typeface="Malgun Gothic" pitchFamily="34" charset="-120"/>
-              </a:rPr>
-              <a:t>내용</a:t>
-            </a:r>
-            <a:endParaRPr lang="en-US" sz="1300" dirty="0"/>
-          </a:p>
-        </p:txBody>
-      </p:sp>
-      <p:sp>
-        <p:nvSpPr>
-          <p:cNvPr id="7" name="Text 5"/>
-          <p:cNvSpPr txBox="1"/>
-          <p:nvPr/>
-        </p:nvSpPr>
-        <p:spPr>
-          <a:xfrm>
-            <a:off x="9509760" y="1600200"/>
-            <a:ext cx="2286000" cy="365760"/>
-          </a:xfrm>
-          <a:prstGeom prst="rect">
-            <a:avLst/>
-          </a:prstGeom>
-          <a:noFill/>
-          <a:ln/>
-        </p:spPr>
-        <p:txBody>
-          <a:bodyPr wrap="square" lIns="0" tIns="0" rIns="0" bIns="0" rtlCol="0" anchor="ctr"/>
-          <a:lstStyle/>
-          <a:p>
-            <a:pPr indent="0" marL="0">
-              <a:buNone/>
-            </a:pPr>
-            <a:r>
-              <a:rPr lang="en-US" sz="1300" b="1" dirty="0">
-                <a:solidFill>
-                  <a:srgbClr val="ABBAB2"/>
-                </a:solidFill>
-                <a:latin typeface="Malgun Gothic" pitchFamily="34" charset="0"/>
-                <a:ea typeface="Malgun Gothic" pitchFamily="34" charset="-122"/>
-                <a:cs typeface="Malgun Gothic" pitchFamily="34" charset="-120"/>
-              </a:rPr>
-              <a:t>목표 지표</a:t>
-            </a:r>
-            <a:endParaRPr lang="en-US" sz="1300" dirty="0"/>
-          </a:p>
-        </p:txBody>
-      </p:sp>
-      <p:sp>
-        <p:nvSpPr>
-          <p:cNvPr id="8" name="Shape 6"/>
+          <p:cNvPr id="4" name="Shape 2"/>
           <p:cNvSpPr/>
           <p:nvPr/>
         </p:nvSpPr>
         <p:spPr>
           <a:xfrm>
-            <a:off x="548640" y="2011680"/>
-            <a:ext cx="11064240" cy="640080"/>
+            <a:off x="548640" y="1554480"/>
+            <a:ext cx="6126480" cy="4663440"/>
           </a:xfrm>
           <a:prstGeom prst="roundRect">
             <a:avLst>
-              <a:gd name="adj" fmla="val 11429"/>
-            </a:avLst>
-          </a:prstGeom>
-          <a:solidFill>
-            <a:srgbClr val="323853"/>
-          </a:solidFill>
-          <a:ln w="9525">
-            <a:solidFill>
-              <a:srgbClr val="364A41"/>
-            </a:solidFill>
-            <a:prstDash val="solid"/>
-          </a:ln>
-        </p:spPr>
-      </p:sp>
-      <p:sp>
-        <p:nvSpPr>
-          <p:cNvPr id="9" name="Text 7"/>
-          <p:cNvSpPr txBox="1"/>
-          <p:nvPr/>
-        </p:nvSpPr>
-        <p:spPr>
-          <a:xfrm>
-            <a:off x="731520" y="2011680"/>
-            <a:ext cx="731520" cy="640080"/>
-          </a:xfrm>
-          <a:prstGeom prst="rect">
-            <a:avLst/>
-          </a:prstGeom>
-          <a:noFill/>
-          <a:ln/>
-        </p:spPr>
-        <p:txBody>
-          <a:bodyPr wrap="square" lIns="0" tIns="0" rIns="0" bIns="0" rtlCol="0" anchor="ctr"/>
-          <a:lstStyle/>
-          <a:p>
-            <a:pPr indent="0" marL="0">
-              <a:buNone/>
-            </a:pPr>
-            <a:r>
-              <a:rPr lang="en-US" sz="1600" b="1" dirty="0">
-                <a:solidFill>
-                  <a:srgbClr val="ADBAEB"/>
-                </a:solidFill>
-                <a:latin typeface="Arial" pitchFamily="34" charset="0"/>
-                <a:ea typeface="Arial" pitchFamily="34" charset="-122"/>
-                <a:cs typeface="Arial" pitchFamily="34" charset="-120"/>
-              </a:rPr>
-              <a:t>P0</a:t>
-            </a:r>
-            <a:endParaRPr lang="en-US" sz="1600" dirty="0"/>
-          </a:p>
-        </p:txBody>
-      </p:sp>
-      <p:sp>
-        <p:nvSpPr>
-          <p:cNvPr id="10" name="Text 8"/>
-          <p:cNvSpPr txBox="1"/>
-          <p:nvPr/>
-        </p:nvSpPr>
-        <p:spPr>
-          <a:xfrm>
-            <a:off x="1645920" y="2011680"/>
-            <a:ext cx="2011680" cy="640080"/>
-          </a:xfrm>
-          <a:prstGeom prst="rect">
-            <a:avLst/>
-          </a:prstGeom>
-          <a:noFill/>
-          <a:ln/>
-        </p:spPr>
-        <p:txBody>
-          <a:bodyPr wrap="square" lIns="0" tIns="0" rIns="0" bIns="0" rtlCol="0" anchor="ctr"/>
-          <a:lstStyle/>
-          <a:p>
-            <a:pPr indent="0" marL="0">
-              <a:buNone/>
-            </a:pPr>
-            <a:r>
-              <a:rPr lang="en-US" sz="1600" b="1" dirty="0">
-                <a:solidFill>
-                  <a:srgbClr val="EDEAE3"/>
-                </a:solidFill>
-                <a:latin typeface="Malgun Gothic" pitchFamily="34" charset="0"/>
-                <a:ea typeface="Malgun Gothic" pitchFamily="34" charset="-122"/>
-                <a:cs typeface="Malgun Gothic" pitchFamily="34" charset="-120"/>
-              </a:rPr>
-              <a:t>SSO·세션</a:t>
-            </a:r>
-            <a:endParaRPr lang="en-US" sz="1600" dirty="0"/>
-          </a:p>
-        </p:txBody>
-      </p:sp>
-      <p:sp>
-        <p:nvSpPr>
-          <p:cNvPr id="11" name="Text 9"/>
-          <p:cNvSpPr txBox="1"/>
-          <p:nvPr/>
-        </p:nvSpPr>
-        <p:spPr>
-          <a:xfrm>
-            <a:off x="3840480" y="2011680"/>
-            <a:ext cx="5394960" cy="640080"/>
-          </a:xfrm>
-          <a:prstGeom prst="rect">
-            <a:avLst/>
-          </a:prstGeom>
-          <a:noFill/>
-          <a:ln/>
-        </p:spPr>
-        <p:txBody>
-          <a:bodyPr wrap="square" lIns="0" tIns="0" rIns="0" bIns="0" rtlCol="0" anchor="ctr"/>
-          <a:lstStyle/>
-          <a:p>
-            <a:pPr indent="0" marL="0">
-              <a:buNone/>
-            </a:pPr>
-            <a:r>
-              <a:rPr lang="en-US" sz="1350" dirty="0">
-                <a:solidFill>
-                  <a:srgbClr val="ABBAB2"/>
-                </a:solidFill>
-                <a:latin typeface="Malgun Gothic" pitchFamily="34" charset="0"/>
-                <a:ea typeface="Malgun Gothic" pitchFamily="34" charset="-122"/>
-                <a:cs typeface="Malgun Gothic" pitchFamily="34" charset="-120"/>
-              </a:rPr>
-              <a:t>OIDC/LDAP 로그인, refresh 토큰, 만료 안내·returnTo (R-7)</a:t>
-            </a:r>
-            <a:endParaRPr lang="en-US" sz="1350" dirty="0"/>
-          </a:p>
-        </p:txBody>
-      </p:sp>
-      <p:sp>
-        <p:nvSpPr>
-          <p:cNvPr id="12" name="Text 10"/>
-          <p:cNvSpPr txBox="1"/>
-          <p:nvPr/>
-        </p:nvSpPr>
-        <p:spPr>
-          <a:xfrm>
-            <a:off x="9509760" y="2011680"/>
-            <a:ext cx="2011680" cy="640080"/>
-          </a:xfrm>
-          <a:prstGeom prst="rect">
-            <a:avLst/>
-          </a:prstGeom>
-          <a:noFill/>
-          <a:ln/>
-        </p:spPr>
-        <p:txBody>
-          <a:bodyPr wrap="square" lIns="0" tIns="0" rIns="0" bIns="0" rtlCol="0" anchor="ctr"/>
-          <a:lstStyle/>
-          <a:p>
-            <a:pPr indent="0" marL="0">
-              <a:buNone/>
-            </a:pPr>
-            <a:r>
-              <a:rPr lang="en-US" sz="1500" b="1" dirty="0">
-                <a:solidFill>
-                  <a:srgbClr val="ADBAEB"/>
-                </a:solidFill>
-                <a:latin typeface="Malgun Gothic" pitchFamily="34" charset="0"/>
-                <a:ea typeface="Malgun Gothic" pitchFamily="34" charset="-122"/>
-                <a:cs typeface="Malgun Gothic" pitchFamily="34" charset="-120"/>
-              </a:rPr>
-              <a:t>보안 55 → 80</a:t>
-            </a:r>
-            <a:endParaRPr lang="en-US" sz="1500" dirty="0"/>
-          </a:p>
-        </p:txBody>
-      </p:sp>
-      <p:sp>
-        <p:nvSpPr>
-          <p:cNvPr id="13" name="Shape 11"/>
-          <p:cNvSpPr/>
-          <p:nvPr/>
-        </p:nvSpPr>
-        <p:spPr>
-          <a:xfrm>
-            <a:off x="548640" y="2779776"/>
-            <a:ext cx="11064240" cy="640080"/>
-          </a:xfrm>
-          <a:prstGeom prst="roundRect">
-            <a:avLst>
-              <a:gd name="adj" fmla="val 11429"/>
-            </a:avLst>
-          </a:prstGeom>
-          <a:solidFill>
-            <a:srgbClr val="323853"/>
-          </a:solidFill>
-          <a:ln w="9525">
-            <a:solidFill>
-              <a:srgbClr val="364A41"/>
-            </a:solidFill>
-            <a:prstDash val="solid"/>
-          </a:ln>
-        </p:spPr>
-      </p:sp>
-      <p:sp>
-        <p:nvSpPr>
-          <p:cNvPr id="14" name="Text 12"/>
-          <p:cNvSpPr txBox="1"/>
-          <p:nvPr/>
-        </p:nvSpPr>
-        <p:spPr>
-          <a:xfrm>
-            <a:off x="731520" y="2779776"/>
-            <a:ext cx="731520" cy="640080"/>
-          </a:xfrm>
-          <a:prstGeom prst="rect">
-            <a:avLst/>
-          </a:prstGeom>
-          <a:noFill/>
-          <a:ln/>
-        </p:spPr>
-        <p:txBody>
-          <a:bodyPr wrap="square" lIns="0" tIns="0" rIns="0" bIns="0" rtlCol="0" anchor="ctr"/>
-          <a:lstStyle/>
-          <a:p>
-            <a:pPr indent="0" marL="0">
-              <a:buNone/>
-            </a:pPr>
-            <a:r>
-              <a:rPr lang="en-US" sz="1600" b="1" dirty="0">
-                <a:solidFill>
-                  <a:srgbClr val="ADBAEB"/>
-                </a:solidFill>
-                <a:latin typeface="Arial" pitchFamily="34" charset="0"/>
-                <a:ea typeface="Arial" pitchFamily="34" charset="-122"/>
-                <a:cs typeface="Arial" pitchFamily="34" charset="-120"/>
-              </a:rPr>
-              <a:t>P0</a:t>
-            </a:r>
-            <a:endParaRPr lang="en-US" sz="1600" dirty="0"/>
-          </a:p>
-        </p:txBody>
-      </p:sp>
-      <p:sp>
-        <p:nvSpPr>
-          <p:cNvPr id="15" name="Text 13"/>
-          <p:cNvSpPr txBox="1"/>
-          <p:nvPr/>
-        </p:nvSpPr>
-        <p:spPr>
-          <a:xfrm>
-            <a:off x="1645920" y="2779776"/>
-            <a:ext cx="2011680" cy="640080"/>
-          </a:xfrm>
-          <a:prstGeom prst="rect">
-            <a:avLst/>
-          </a:prstGeom>
-          <a:noFill/>
-          <a:ln/>
-        </p:spPr>
-        <p:txBody>
-          <a:bodyPr wrap="square" lIns="0" tIns="0" rIns="0" bIns="0" rtlCol="0" anchor="ctr"/>
-          <a:lstStyle/>
-          <a:p>
-            <a:pPr indent="0" marL="0">
-              <a:buNone/>
-            </a:pPr>
-            <a:r>
-              <a:rPr lang="en-US" sz="1600" b="1" dirty="0">
-                <a:solidFill>
-                  <a:srgbClr val="EDEAE3"/>
-                </a:solidFill>
-                <a:latin typeface="Malgun Gothic" pitchFamily="34" charset="0"/>
-                <a:ea typeface="Malgun Gothic" pitchFamily="34" charset="-122"/>
-                <a:cs typeface="Malgun Gothic" pitchFamily="34" charset="-120"/>
-              </a:rPr>
-              <a:t>프론트 테스트</a:t>
-            </a:r>
-            <a:endParaRPr lang="en-US" sz="1600" dirty="0"/>
-          </a:p>
-        </p:txBody>
-      </p:sp>
-      <p:sp>
-        <p:nvSpPr>
-          <p:cNvPr id="16" name="Text 14"/>
-          <p:cNvSpPr txBox="1"/>
-          <p:nvPr/>
-        </p:nvSpPr>
-        <p:spPr>
-          <a:xfrm>
-            <a:off x="3840480" y="2779776"/>
-            <a:ext cx="5394960" cy="640080"/>
-          </a:xfrm>
-          <a:prstGeom prst="rect">
-            <a:avLst/>
-          </a:prstGeom>
-          <a:noFill/>
-          <a:ln/>
-        </p:spPr>
-        <p:txBody>
-          <a:bodyPr wrap="square" lIns="0" tIns="0" rIns="0" bIns="0" rtlCol="0" anchor="ctr"/>
-          <a:lstStyle/>
-          <a:p>
-            <a:pPr indent="0" marL="0">
-              <a:buNone/>
-            </a:pPr>
-            <a:r>
-              <a:rPr lang="en-US" sz="1350" dirty="0">
-                <a:solidFill>
-                  <a:srgbClr val="ABBAB2"/>
-                </a:solidFill>
-                <a:latin typeface="Malgun Gothic" pitchFamily="34" charset="0"/>
-                <a:ea typeface="Malgun Gothic" pitchFamily="34" charset="-122"/>
-                <a:cs typeface="Malgun Gothic" pitchFamily="34" charset="-120"/>
-              </a:rPr>
-              <a:t>Vitest 핵심 훅·컴포넌트 + Playwright 주요 동선 E2E</a:t>
-            </a:r>
-            <a:endParaRPr lang="en-US" sz="1350" dirty="0"/>
-          </a:p>
-        </p:txBody>
-      </p:sp>
-      <p:sp>
-        <p:nvSpPr>
-          <p:cNvPr id="17" name="Text 15"/>
-          <p:cNvSpPr txBox="1"/>
-          <p:nvPr/>
-        </p:nvSpPr>
-        <p:spPr>
-          <a:xfrm>
-            <a:off x="9509760" y="2779776"/>
-            <a:ext cx="2011680" cy="640080"/>
-          </a:xfrm>
-          <a:prstGeom prst="rect">
-            <a:avLst/>
-          </a:prstGeom>
-          <a:noFill/>
-          <a:ln/>
-        </p:spPr>
-        <p:txBody>
-          <a:bodyPr wrap="square" lIns="0" tIns="0" rIns="0" bIns="0" rtlCol="0" anchor="ctr"/>
-          <a:lstStyle/>
-          <a:p>
-            <a:pPr indent="0" marL="0">
-              <a:buNone/>
-            </a:pPr>
-            <a:r>
-              <a:rPr lang="en-US" sz="1500" b="1" dirty="0">
-                <a:solidFill>
-                  <a:srgbClr val="ADBAEB"/>
-                </a:solidFill>
-                <a:latin typeface="Malgun Gothic" pitchFamily="34" charset="0"/>
-                <a:ea typeface="Malgun Gothic" pitchFamily="34" charset="-122"/>
-                <a:cs typeface="Malgun Gothic" pitchFamily="34" charset="-120"/>
-              </a:rPr>
-              <a:t>20 → 60</a:t>
-            </a:r>
-            <a:endParaRPr lang="en-US" sz="1500" dirty="0"/>
-          </a:p>
-        </p:txBody>
-      </p:sp>
-      <p:sp>
-        <p:nvSpPr>
-          <p:cNvPr id="18" name="Shape 16"/>
-          <p:cNvSpPr/>
-          <p:nvPr/>
-        </p:nvSpPr>
-        <p:spPr>
-          <a:xfrm>
-            <a:off x="548640" y="3547872"/>
-            <a:ext cx="11064240" cy="640080"/>
-          </a:xfrm>
-          <a:prstGeom prst="roundRect">
-            <a:avLst>
-              <a:gd name="adj" fmla="val 11429"/>
+              <a:gd name="adj" fmla="val 1569"/>
             </a:avLst>
           </a:prstGeom>
           <a:solidFill>
@@ -6323,176 +7161,36 @@
           </a:ln>
         </p:spPr>
       </p:sp>
-      <p:sp>
-        <p:nvSpPr>
-          <p:cNvPr id="19" name="Text 17"/>
-          <p:cNvSpPr txBox="1"/>
-          <p:nvPr/>
-        </p:nvSpPr>
-        <p:spPr>
-          <a:xfrm>
-            <a:off x="731520" y="3547872"/>
-            <a:ext cx="731520" cy="640080"/>
-          </a:xfrm>
-          <a:prstGeom prst="rect">
-            <a:avLst/>
-          </a:prstGeom>
-          <a:noFill/>
-          <a:ln/>
-        </p:spPr>
-        <p:txBody>
-          <a:bodyPr wrap="square" lIns="0" tIns="0" rIns="0" bIns="0" rtlCol="0" anchor="ctr"/>
-          <a:lstStyle/>
-          <a:p>
-            <a:pPr indent="0" marL="0">
-              <a:buNone/>
-            </a:pPr>
-            <a:r>
-              <a:rPr lang="en-US" sz="1600" b="1" dirty="0">
-                <a:solidFill>
-                  <a:srgbClr val="ABBAB2"/>
-                </a:solidFill>
-                <a:latin typeface="Arial" pitchFamily="34" charset="0"/>
-                <a:ea typeface="Arial" pitchFamily="34" charset="-122"/>
-                <a:cs typeface="Arial" pitchFamily="34" charset="-120"/>
-              </a:rPr>
-              <a:t>P1</a:t>
-            </a:r>
-            <a:endParaRPr lang="en-US" sz="1600" dirty="0"/>
-          </a:p>
-        </p:txBody>
-      </p:sp>
-      <p:sp>
-        <p:nvSpPr>
-          <p:cNvPr id="20" name="Text 18"/>
-          <p:cNvSpPr txBox="1"/>
-          <p:nvPr/>
-        </p:nvSpPr>
-        <p:spPr>
-          <a:xfrm>
-            <a:off x="1645920" y="3547872"/>
-            <a:ext cx="2011680" cy="640080"/>
-          </a:xfrm>
-          <a:prstGeom prst="rect">
-            <a:avLst/>
-          </a:prstGeom>
-          <a:noFill/>
-          <a:ln/>
-        </p:spPr>
-        <p:txBody>
-          <a:bodyPr wrap="square" lIns="0" tIns="0" rIns="0" bIns="0" rtlCol="0" anchor="ctr"/>
-          <a:lstStyle/>
-          <a:p>
-            <a:pPr indent="0" marL="0">
-              <a:buNone/>
-            </a:pPr>
-            <a:r>
-              <a:rPr lang="en-US" sz="1600" b="1" dirty="0">
-                <a:solidFill>
-                  <a:srgbClr val="EDEAE3"/>
-                </a:solidFill>
-                <a:latin typeface="Malgun Gothic" pitchFamily="34" charset="0"/>
-                <a:ea typeface="Malgun Gothic" pitchFamily="34" charset="-122"/>
-                <a:cs typeface="Malgun Gothic" pitchFamily="34" charset="-120"/>
-              </a:rPr>
-              <a:t>관측·성능</a:t>
-            </a:r>
-            <a:endParaRPr lang="en-US" sz="1600" dirty="0"/>
-          </a:p>
-        </p:txBody>
-      </p:sp>
-      <p:sp>
-        <p:nvSpPr>
-          <p:cNvPr id="21" name="Text 19"/>
-          <p:cNvSpPr txBox="1"/>
-          <p:nvPr/>
-        </p:nvSpPr>
-        <p:spPr>
-          <a:xfrm>
-            <a:off x="3840480" y="3547872"/>
-            <a:ext cx="5394960" cy="640080"/>
-          </a:xfrm>
-          <a:prstGeom prst="rect">
-            <a:avLst/>
-          </a:prstGeom>
-          <a:noFill/>
-          <a:ln/>
-        </p:spPr>
-        <p:txBody>
-          <a:bodyPr wrap="square" lIns="0" tIns="0" rIns="0" bIns="0" rtlCol="0" anchor="ctr"/>
-          <a:lstStyle/>
-          <a:p>
-            <a:pPr indent="0" marL="0">
-              <a:buNone/>
-            </a:pPr>
-            <a:r>
-              <a:rPr lang="en-US" sz="1350" dirty="0">
-                <a:solidFill>
-                  <a:srgbClr val="ABBAB2"/>
-                </a:solidFill>
-                <a:latin typeface="Malgun Gothic" pitchFamily="34" charset="0"/>
-                <a:ea typeface="Malgun Gothic" pitchFamily="34" charset="-122"/>
-                <a:cs typeface="Malgun Gothic" pitchFamily="34" charset="-120"/>
-              </a:rPr>
-              <a:t>/metrics exporter, SLO 정의, 대형 클러스터 부하 테스트</a:t>
-            </a:r>
-            <a:endParaRPr lang="en-US" sz="1350" dirty="0"/>
-          </a:p>
-        </p:txBody>
-      </p:sp>
-      <p:sp>
-        <p:nvSpPr>
-          <p:cNvPr id="22" name="Text 20"/>
-          <p:cNvSpPr txBox="1"/>
-          <p:nvPr/>
-        </p:nvSpPr>
-        <p:spPr>
-          <a:xfrm>
-            <a:off x="9509760" y="3547872"/>
-            <a:ext cx="2011680" cy="640080"/>
-          </a:xfrm>
-          <a:prstGeom prst="rect">
-            <a:avLst/>
-          </a:prstGeom>
-          <a:noFill/>
-          <a:ln/>
-        </p:spPr>
-        <p:txBody>
-          <a:bodyPr wrap="square" lIns="0" tIns="0" rIns="0" bIns="0" rtlCol="0" anchor="ctr"/>
-          <a:lstStyle/>
-          <a:p>
-            <a:pPr indent="0" marL="0">
-              <a:buNone/>
-            </a:pPr>
-            <a:r>
-              <a:rPr lang="en-US" sz="1500" b="1" dirty="0">
-                <a:solidFill>
-                  <a:srgbClr val="EDEAE3"/>
-                </a:solidFill>
-                <a:latin typeface="Malgun Gothic" pitchFamily="34" charset="0"/>
-                <a:ea typeface="Malgun Gothic" pitchFamily="34" charset="-122"/>
-                <a:cs typeface="Malgun Gothic" pitchFamily="34" charset="-120"/>
-              </a:rPr>
-              <a:t>30 → 70</a:t>
-            </a:r>
-            <a:endParaRPr lang="en-US" sz="1500" dirty="0"/>
-          </a:p>
-        </p:txBody>
-      </p:sp>
-      <p:sp>
-        <p:nvSpPr>
-          <p:cNvPr id="23" name="Shape 21"/>
+      <p:graphicFrame>
+        <p:nvGraphicFramePr>
+          <p:cNvPr id="5" name="Chart 0" descr=""/>
+          <p:cNvGraphicFramePr/>
+          <p:nvPr/>
+        </p:nvGraphicFramePr>
+        <p:xfrm>
+          <a:off x="685800" y="1645920"/>
+          <a:ext cx="5852160" cy="4480560"/>
+        </p:xfrm>
+        <a:graphic xmlns:a="http://schemas.openxmlformats.org/drawingml/2006/main">
+          <a:graphicData uri="http://schemas.openxmlformats.org/drawingml/2006/chart">
+            <c:chart xmlns:c="http://schemas.openxmlformats.org/drawingml/2006/chart" r:id="rId1"/>
+          </a:graphicData>
+        </a:graphic>
+      </p:graphicFrame>
+      <p:sp>
+        <p:nvSpPr>
+          <p:cNvPr id="6" name="Shape 3"/>
           <p:cNvSpPr/>
           <p:nvPr/>
         </p:nvSpPr>
         <p:spPr>
           <a:xfrm>
-            <a:off x="548640" y="4315968"/>
-            <a:ext cx="11064240" cy="640080"/>
+            <a:off x="6949440" y="1554480"/>
+            <a:ext cx="4663440" cy="4663440"/>
           </a:xfrm>
           <a:prstGeom prst="roundRect">
             <a:avLst>
-              <a:gd name="adj" fmla="val 11429"/>
+              <a:gd name="adj" fmla="val 1569"/>
             </a:avLst>
           </a:prstGeom>
           <a:solidFill>
@@ -6508,108 +7206,132 @@
       </p:sp>
       <p:sp>
         <p:nvSpPr>
-          <p:cNvPr id="24" name="Text 22"/>
-          <p:cNvSpPr txBox="1"/>
-          <p:nvPr/>
-        </p:nvSpPr>
-        <p:spPr>
-          <a:xfrm>
-            <a:off x="731520" y="4315968"/>
-            <a:ext cx="731520" cy="640080"/>
-          </a:xfrm>
-          <a:prstGeom prst="rect">
-            <a:avLst/>
-          </a:prstGeom>
-          <a:noFill/>
-          <a:ln/>
-        </p:spPr>
-        <p:txBody>
-          <a:bodyPr wrap="square" lIns="0" tIns="0" rIns="0" bIns="0" rtlCol="0" anchor="ctr"/>
-          <a:lstStyle/>
-          <a:p>
-            <a:pPr indent="0" marL="0">
-              <a:buNone/>
-            </a:pPr>
-            <a:r>
-              <a:rPr lang="en-US" sz="1600" b="1" dirty="0">
+          <p:cNvPr id="7" name="Text 4"/>
+          <p:cNvSpPr txBox="1"/>
+          <p:nvPr/>
+        </p:nvSpPr>
+        <p:spPr>
+          <a:xfrm>
+            <a:off x="7178040" y="1691640"/>
+            <a:ext cx="4206240" cy="365760"/>
+          </a:xfrm>
+          <a:prstGeom prst="rect">
+            <a:avLst/>
+          </a:prstGeom>
+          <a:noFill/>
+          <a:ln/>
+        </p:spPr>
+        <p:txBody>
+          <a:bodyPr wrap="square" lIns="0" tIns="0" rIns="0" bIns="0" rtlCol="0" anchor="ctr"/>
+          <a:lstStyle/>
+          <a:p>
+            <a:pPr indent="0" marL="0">
+              <a:buNone/>
+            </a:pPr>
+            <a:r>
+              <a:rPr lang="en-US" sz="1500" b="1" dirty="0">
+                <a:solidFill>
+                  <a:srgbClr val="EDEAE3"/>
+                </a:solidFill>
+                <a:latin typeface="Malgun Gothic" pitchFamily="34" charset="0"/>
+                <a:ea typeface="Malgun Gothic" pitchFamily="34" charset="-122"/>
+                <a:cs typeface="Malgun Gothic" pitchFamily="34" charset="-120"/>
+              </a:rPr>
+              <a:t>평가 근거</a:t>
+            </a:r>
+            <a:endParaRPr lang="en-US" sz="1500" dirty="0"/>
+          </a:p>
+        </p:txBody>
+      </p:sp>
+      <p:sp>
+        <p:nvSpPr>
+          <p:cNvPr id="8" name="Text 5"/>
+          <p:cNvSpPr txBox="1"/>
+          <p:nvPr/>
+        </p:nvSpPr>
+        <p:spPr>
+          <a:xfrm>
+            <a:off x="7178040" y="2103120"/>
+            <a:ext cx="4251960" cy="3977640"/>
+          </a:xfrm>
+          <a:prstGeom prst="rect">
+            <a:avLst/>
+          </a:prstGeom>
+          <a:noFill/>
+          <a:ln/>
+        </p:spPr>
+        <p:txBody>
+          <a:bodyPr wrap="square" lIns="0" tIns="0" rIns="0" bIns="0" rtlCol="0" anchor="t"/>
+          <a:lstStyle/>
+          <a:p>
+            <a:pPr indent="0" marL="0">
+              <a:spcAft>
+                <a:spcPts val="500"/>
+              </a:spcAft>
+              <a:buNone/>
+            </a:pPr>
+            <a:r>
+              <a:rPr lang="en-US" sz="1250" b="1" dirty="0">
+                <a:solidFill>
+                  <a:srgbClr val="ADBAEB"/>
+                </a:solidFill>
+                <a:latin typeface="Malgun Gothic" pitchFamily="34" charset="0"/>
+                <a:ea typeface="Malgun Gothic" pitchFamily="34" charset="-122"/>
+                <a:cs typeface="Malgun Gothic" pitchFamily="34" charset="-120"/>
+              </a:rPr>
+              <a:t>기능·CI·배포</a:t>
+            </a:r>
+            <a:endParaRPr lang="en-US" sz="1250" dirty="0"/>
+          </a:p>
+          <a:p>
+            <a:pPr indent="0" marL="0">
+              <a:spcAft>
+                <a:spcPts val="500"/>
+              </a:spcAft>
+              <a:buNone/>
+            </a:pPr>
+            <a:r>
+              <a:rPr lang="en-US" sz="1250" dirty="0">
                 <a:solidFill>
                   <a:srgbClr val="ABBAB2"/>
                 </a:solidFill>
-                <a:latin typeface="Arial" pitchFamily="34" charset="0"/>
-                <a:ea typeface="Arial" pitchFamily="34" charset="-122"/>
-                <a:cs typeface="Arial" pitchFamily="34" charset="-120"/>
-              </a:rPr>
-              <a:t>P1</a:t>
-            </a:r>
-            <a:endParaRPr lang="en-US" sz="1600" dirty="0"/>
-          </a:p>
-        </p:txBody>
-      </p:sp>
-      <p:sp>
-        <p:nvSpPr>
-          <p:cNvPr id="25" name="Text 23"/>
-          <p:cNvSpPr txBox="1"/>
-          <p:nvPr/>
-        </p:nvSpPr>
-        <p:spPr>
-          <a:xfrm>
-            <a:off x="1645920" y="4315968"/>
-            <a:ext cx="2011680" cy="640080"/>
-          </a:xfrm>
-          <a:prstGeom prst="rect">
-            <a:avLst/>
-          </a:prstGeom>
-          <a:noFill/>
-          <a:ln/>
-        </p:spPr>
-        <p:txBody>
-          <a:bodyPr wrap="square" lIns="0" tIns="0" rIns="0" bIns="0" rtlCol="0" anchor="ctr"/>
-          <a:lstStyle/>
-          <a:p>
-            <a:pPr indent="0" marL="0">
-              <a:buNone/>
-            </a:pPr>
-            <a:r>
-              <a:rPr lang="en-US" sz="1600" b="1" dirty="0">
-                <a:solidFill>
-                  <a:srgbClr val="EDEAE3"/>
-                </a:solidFill>
-                <a:latin typeface="Malgun Gothic" pitchFamily="34" charset="0"/>
-                <a:ea typeface="Malgun Gothic" pitchFamily="34" charset="-122"/>
-                <a:cs typeface="Malgun Gothic" pitchFamily="34" charset="-120"/>
-              </a:rPr>
-              <a:t>국제화·반응형</a:t>
-            </a:r>
-            <a:endParaRPr lang="en-US" sz="1600" dirty="0"/>
-          </a:p>
-        </p:txBody>
-      </p:sp>
-      <p:sp>
-        <p:nvSpPr>
-          <p:cNvPr id="26" name="Text 24"/>
-          <p:cNvSpPr txBox="1"/>
-          <p:nvPr/>
-        </p:nvSpPr>
-        <p:spPr>
-          <a:xfrm>
-            <a:off x="3840480" y="4315968"/>
-            <a:ext cx="5394960" cy="640080"/>
-          </a:xfrm>
-          <a:prstGeom prst="rect">
-            <a:avLst/>
-          </a:prstGeom>
-          <a:noFill/>
-          <a:ln/>
-        </p:spPr>
-        <p:txBody>
-          <a:bodyPr wrap="square" lIns="0" tIns="0" rIns="0" bIns="0" rtlCol="0" anchor="ctr"/>
-          <a:lstStyle/>
-          <a:p>
-            <a:pPr indent="0" marL="0">
-              <a:buNone/>
-            </a:pPr>
-            <a:r>
-              <a:rPr lang="en-US" sz="1350" dirty="0">
+                <a:latin typeface="Malgun Gothic" pitchFamily="34" charset="0"/>
+                <a:ea typeface="Malgun Gothic" pitchFamily="34" charset="-122"/>
+                <a:cs typeface="Malgun Gothic" pitchFamily="34" charset="-120"/>
+              </a:rPr>
+              <a:t>라우터 76 · 화면 72 · 모델 60, CI 게이트 3종, Helm/Kustomize 4 overlay + 폐쇄망</a:t>
+            </a:r>
+            <a:endParaRPr lang="en-US" sz="1250" dirty="0"/>
+          </a:p>
+          <a:p>
+            <a:pPr indent="0" marL="0">
+              <a:spcAft>
+                <a:spcPts val="500"/>
+              </a:spcAft>
+              <a:buNone/>
+            </a:pPr>
+            <a:r>
+              <a:rPr lang="en-US" sz="1250" b="1" dirty="0">
+                <a:solidFill>
+                  <a:srgbClr val="ADBAEB"/>
+                </a:solidFill>
+                <a:latin typeface="Malgun Gothic" pitchFamily="34" charset="0"/>
+                <a:ea typeface="Malgun Gothic" pitchFamily="34" charset="-122"/>
+                <a:cs typeface="Malgun Gothic" pitchFamily="34" charset="-120"/>
+              </a:rPr>
+              <a:t>테스트</a:t>
+            </a:r>
+            <a:endParaRPr lang="en-US" sz="1250" dirty="0"/>
+          </a:p>
+          <a:p>
+            <a:pPr indent="0" marL="0">
+              <a:spcAft>
+                <a:spcPts val="500"/>
+              </a:spcAft>
+              <a:buNone/>
+            </a:pPr>
+            <a:r>
+              <a:rPr lang="en-US" sz="1250" dirty="0">
                 <a:solidFill>
                   <a:srgbClr val="ABBAB2"/>
                 </a:solidFill>
@@ -6617,182 +7339,79 @@
                 <a:ea typeface="Malgun Gothic" pitchFamily="34" charset="-122"/>
                 <a:cs typeface="Malgun Gothic" pitchFamily="34" charset="-120"/>
               </a:rPr>
-              <a:t>react-i18next ko/en (R-6), 태블릿 최소 폭 대응</a:t>
-            </a:r>
-            <a:endParaRPr lang="en-US" sz="1350" dirty="0"/>
-          </a:p>
-        </p:txBody>
-      </p:sp>
-      <p:sp>
-        <p:nvSpPr>
-          <p:cNvPr id="27" name="Text 25"/>
-          <p:cNvSpPr txBox="1"/>
-          <p:nvPr/>
-        </p:nvSpPr>
-        <p:spPr>
-          <a:xfrm>
-            <a:off x="9509760" y="4315968"/>
-            <a:ext cx="2011680" cy="640080"/>
-          </a:xfrm>
-          <a:prstGeom prst="rect">
-            <a:avLst/>
-          </a:prstGeom>
-          <a:noFill/>
-          <a:ln/>
-        </p:spPr>
-        <p:txBody>
-          <a:bodyPr wrap="square" lIns="0" tIns="0" rIns="0" bIns="0" rtlCol="0" anchor="ctr"/>
-          <a:lstStyle/>
-          <a:p>
-            <a:pPr indent="0" marL="0">
-              <a:buNone/>
-            </a:pPr>
-            <a:r>
-              <a:rPr lang="en-US" sz="1500" b="1" dirty="0">
-                <a:solidFill>
-                  <a:srgbClr val="EDEAE3"/>
-                </a:solidFill>
-                <a:latin typeface="Malgun Gothic" pitchFamily="34" charset="0"/>
-                <a:ea typeface="Malgun Gothic" pitchFamily="34" charset="-122"/>
-                <a:cs typeface="Malgun Gothic" pitchFamily="34" charset="-120"/>
-              </a:rPr>
-              <a:t>UX 70 → 85</a:t>
-            </a:r>
-            <a:endParaRPr lang="en-US" sz="1500" dirty="0"/>
-          </a:p>
-        </p:txBody>
-      </p:sp>
-      <p:sp>
-        <p:nvSpPr>
-          <p:cNvPr id="28" name="Shape 26"/>
-          <p:cNvSpPr/>
-          <p:nvPr/>
-        </p:nvSpPr>
-        <p:spPr>
-          <a:xfrm>
-            <a:off x="548640" y="5084064"/>
-            <a:ext cx="11064240" cy="640080"/>
-          </a:xfrm>
-          <a:prstGeom prst="roundRect">
-            <a:avLst>
-              <a:gd name="adj" fmla="val 11429"/>
-            </a:avLst>
-          </a:prstGeom>
-          <a:solidFill>
-            <a:srgbClr val="1E2F28"/>
-          </a:solidFill>
-          <a:ln w="9525">
-            <a:solidFill>
-              <a:srgbClr val="364A41"/>
-            </a:solidFill>
-            <a:prstDash val="solid"/>
-          </a:ln>
-        </p:spPr>
-      </p:sp>
-      <p:sp>
-        <p:nvSpPr>
-          <p:cNvPr id="29" name="Text 27"/>
-          <p:cNvSpPr txBox="1"/>
-          <p:nvPr/>
-        </p:nvSpPr>
-        <p:spPr>
-          <a:xfrm>
-            <a:off x="731520" y="5084064"/>
-            <a:ext cx="731520" cy="640080"/>
-          </a:xfrm>
-          <a:prstGeom prst="rect">
-            <a:avLst/>
-          </a:prstGeom>
-          <a:noFill/>
-          <a:ln/>
-        </p:spPr>
-        <p:txBody>
-          <a:bodyPr wrap="square" lIns="0" tIns="0" rIns="0" bIns="0" rtlCol="0" anchor="ctr"/>
-          <a:lstStyle/>
-          <a:p>
-            <a:pPr indent="0" marL="0">
-              <a:buNone/>
-            </a:pPr>
-            <a:r>
-              <a:rPr lang="en-US" sz="1600" b="1" dirty="0">
+              <a:t>백엔드 1,097개 (커버리지 미측정), 프론트 단위·E2E 0건</a:t>
+            </a:r>
+            <a:endParaRPr lang="en-US" sz="1250" dirty="0"/>
+          </a:p>
+          <a:p>
+            <a:pPr indent="0" marL="0">
+              <a:spcAft>
+                <a:spcPts val="500"/>
+              </a:spcAft>
+              <a:buNone/>
+            </a:pPr>
+            <a:r>
+              <a:rPr lang="en-US" sz="1250" b="1" dirty="0">
+                <a:solidFill>
+                  <a:srgbClr val="ADBAEB"/>
+                </a:solidFill>
+                <a:latin typeface="Malgun Gothic" pitchFamily="34" charset="0"/>
+                <a:ea typeface="Malgun Gothic" pitchFamily="34" charset="-122"/>
+                <a:cs typeface="Malgun Gothic" pitchFamily="34" charset="-120"/>
+              </a:rPr>
+              <a:t>보안</a:t>
+            </a:r>
+            <a:endParaRPr lang="en-US" sz="1250" dirty="0"/>
+          </a:p>
+          <a:p>
+            <a:pPr indent="0" marL="0">
+              <a:spcAft>
+                <a:spcPts val="500"/>
+              </a:spcAft>
+              <a:buNone/>
+            </a:pPr>
+            <a:r>
+              <a:rPr lang="en-US" sz="1250" dirty="0">
                 <a:solidFill>
                   <a:srgbClr val="ABBAB2"/>
                 </a:solidFill>
-                <a:latin typeface="Arial" pitchFamily="34" charset="0"/>
-                <a:ea typeface="Arial" pitchFamily="34" charset="-122"/>
-                <a:cs typeface="Arial" pitchFamily="34" charset="-120"/>
-              </a:rPr>
-              <a:t>P2</a:t>
-            </a:r>
-            <a:endParaRPr lang="en-US" sz="1600" dirty="0"/>
-          </a:p>
-        </p:txBody>
-      </p:sp>
-      <p:sp>
-        <p:nvSpPr>
-          <p:cNvPr id="30" name="Text 28"/>
-          <p:cNvSpPr txBox="1"/>
-          <p:nvPr/>
-        </p:nvSpPr>
-        <p:spPr>
-          <a:xfrm>
-            <a:off x="1645920" y="5084064"/>
-            <a:ext cx="2011680" cy="640080"/>
-          </a:xfrm>
-          <a:prstGeom prst="rect">
-            <a:avLst/>
-          </a:prstGeom>
-          <a:noFill/>
-          <a:ln/>
-        </p:spPr>
-        <p:txBody>
-          <a:bodyPr wrap="square" lIns="0" tIns="0" rIns="0" bIns="0" rtlCol="0" anchor="ctr"/>
-          <a:lstStyle/>
-          <a:p>
-            <a:pPr indent="0" marL="0">
-              <a:buNone/>
-            </a:pPr>
-            <a:r>
-              <a:rPr lang="en-US" sz="1600" b="1" dirty="0">
-                <a:solidFill>
-                  <a:srgbClr val="EDEAE3"/>
-                </a:solidFill>
-                <a:latin typeface="Malgun Gothic" pitchFamily="34" charset="0"/>
-                <a:ea typeface="Malgun Gothic" pitchFamily="34" charset="-122"/>
-                <a:cs typeface="Malgun Gothic" pitchFamily="34" charset="-120"/>
-              </a:rPr>
-              <a:t>UX 백로그</a:t>
-            </a:r>
-            <a:endParaRPr lang="en-US" sz="1600" dirty="0"/>
-          </a:p>
-        </p:txBody>
-      </p:sp>
-      <p:sp>
-        <p:nvSpPr>
-          <p:cNvPr id="31" name="Text 29"/>
-          <p:cNvSpPr txBox="1"/>
-          <p:nvPr/>
-        </p:nvSpPr>
-        <p:spPr>
-          <a:xfrm>
-            <a:off x="3840480" y="5084064"/>
-            <a:ext cx="5394960" cy="640080"/>
-          </a:xfrm>
-          <a:prstGeom prst="rect">
-            <a:avLst/>
-          </a:prstGeom>
-          <a:noFill/>
-          <a:ln/>
-        </p:spPr>
-        <p:txBody>
-          <a:bodyPr wrap="square" lIns="0" tIns="0" rIns="0" bIns="0" rtlCol="0" anchor="ctr"/>
-          <a:lstStyle/>
-          <a:p>
-            <a:pPr indent="0" marL="0">
-              <a:buNone/>
-            </a:pPr>
-            <a:r>
-              <a:rPr lang="en-US" sz="1350" dirty="0">
+                <a:latin typeface="Malgun Gothic" pitchFamily="34" charset="0"/>
+                <a:ea typeface="Malgun Gothic" pitchFamily="34" charset="-122"/>
+                <a:cs typeface="Malgun Gothic" pitchFamily="34" charset="-120"/>
+              </a:rPr>
+              <a:t>JWT + viewer/operator/admin + 테넌트 격리 + 감사 로그 / SSO·refresh 토큰 없음</a:t>
+            </a:r>
+            <a:endParaRPr lang="en-US" sz="1250" dirty="0"/>
+          </a:p>
+          <a:p>
+            <a:pPr indent="0" marL="0">
+              <a:spcAft>
+                <a:spcPts val="500"/>
+              </a:spcAft>
+              <a:buNone/>
+            </a:pPr>
+            <a:r>
+              <a:rPr lang="en-US" sz="1250" b="1" dirty="0">
+                <a:solidFill>
+                  <a:srgbClr val="ADBAEB"/>
+                </a:solidFill>
+                <a:latin typeface="Malgun Gothic" pitchFamily="34" charset="0"/>
+                <a:ea typeface="Malgun Gothic" pitchFamily="34" charset="-122"/>
+                <a:cs typeface="Malgun Gothic" pitchFamily="34" charset="-120"/>
+              </a:rPr>
+              <a:t>UX</a:t>
+            </a:r>
+            <a:endParaRPr lang="en-US" sz="1250" dirty="0"/>
+          </a:p>
+          <a:p>
+            <a:pPr indent="0" marL="0">
+              <a:spcAft>
+                <a:spcPts val="500"/>
+              </a:spcAft>
+              <a:buNone/>
+            </a:pPr>
+            <a:r>
+              <a:rPr lang="en-US" sz="1250" dirty="0">
                 <a:solidFill>
                   <a:srgbClr val="ABBAB2"/>
                 </a:solidFill>
@@ -6800,77 +7419,19 @@
                 <a:ea typeface="Malgun Gothic" pitchFamily="34" charset="-122"/>
                 <a:cs typeface="Malgun Gothic" pitchFamily="34" charset="-120"/>
               </a:rPr>
-              <a:t>미처리 13건 + 부분완료 3건 소진, 토큰 정합(raw hex 104건)</a:t>
-            </a:r>
-            <a:endParaRPr lang="en-US" sz="1350" dirty="0"/>
-          </a:p>
-        </p:txBody>
-      </p:sp>
-      <p:sp>
-        <p:nvSpPr>
-          <p:cNvPr id="32" name="Text 30"/>
-          <p:cNvSpPr txBox="1"/>
-          <p:nvPr/>
-        </p:nvSpPr>
-        <p:spPr>
-          <a:xfrm>
-            <a:off x="9509760" y="5084064"/>
-            <a:ext cx="2011680" cy="640080"/>
-          </a:xfrm>
-          <a:prstGeom prst="rect">
-            <a:avLst/>
-          </a:prstGeom>
-          <a:noFill/>
-          <a:ln/>
-        </p:spPr>
-        <p:txBody>
-          <a:bodyPr wrap="square" lIns="0" tIns="0" rIns="0" bIns="0" rtlCol="0" anchor="ctr"/>
-          <a:lstStyle/>
-          <a:p>
-            <a:pPr indent="0" marL="0">
-              <a:buNone/>
-            </a:pPr>
-            <a:r>
-              <a:rPr lang="en-US" sz="1500" b="1" dirty="0">
-                <a:solidFill>
-                  <a:srgbClr val="EDEAE3"/>
-                </a:solidFill>
-                <a:latin typeface="Malgun Gothic" pitchFamily="34" charset="0"/>
-                <a:ea typeface="Malgun Gothic" pitchFamily="34" charset="-122"/>
-                <a:cs typeface="Malgun Gothic" pitchFamily="34" charset="-120"/>
-              </a:rPr>
-              <a:t>82% → 100%</a:t>
-            </a:r>
-            <a:endParaRPr lang="en-US" sz="1500" dirty="0"/>
-          </a:p>
-        </p:txBody>
-      </p:sp>
-      <p:sp>
-        <p:nvSpPr>
-          <p:cNvPr id="33" name="Text 31"/>
-          <p:cNvSpPr txBox="1"/>
-          <p:nvPr/>
-        </p:nvSpPr>
-        <p:spPr>
-          <a:xfrm>
-            <a:off x="548640" y="5897880"/>
-            <a:ext cx="11064240" cy="320040"/>
-          </a:xfrm>
-          <a:prstGeom prst="rect">
-            <a:avLst/>
-          </a:prstGeom>
-          <a:noFill/>
-          <a:ln/>
-        </p:spPr>
-        <p:txBody>
-          <a:bodyPr wrap="square" lIns="0" tIns="0" rIns="0" bIns="0" rtlCol="0" anchor="ctr"/>
-          <a:lstStyle/>
-          <a:p>
-            <a:pPr indent="0" marL="0">
-              <a:buNone/>
-            </a:pPr>
-            <a:r>
-              <a:rPr lang="en-US" sz="1300" dirty="0">
+              <a:t>UX 백로그 101건 중 83건 완료(82%) / i18n·반응형 미대응</a:t>
+            </a:r>
+            <a:endParaRPr lang="en-US" sz="1250" dirty="0"/>
+          </a:p>
+          <a:p>
+            <a:pPr indent="0" marL="0">
+              <a:spcAft>
+                <a:spcPts val="500"/>
+              </a:spcAft>
+              <a:buNone/>
+            </a:pPr>
+            <a:r>
+              <a:rPr lang="en-US" sz="1250" b="1" dirty="0">
                 <a:solidFill>
                   <a:srgbClr val="ADBAEB"/>
                 </a:solidFill>
@@ -6878,15 +7439,35 @@
                 <a:ea typeface="Malgun Gothic" pitchFamily="34" charset="-122"/>
                 <a:cs typeface="Malgun Gothic" pitchFamily="34" charset="-120"/>
               </a:rPr>
-              <a:t>목표 지표를 모두 달성하면 종합 진척도 67% → 약 80% (상용 베타 수준)</a:t>
-            </a:r>
-            <a:endParaRPr lang="en-US" sz="1300" dirty="0"/>
-          </a:p>
-        </p:txBody>
-      </p:sp>
-      <p:sp>
-        <p:nvSpPr>
-          <p:cNvPr id="34" name="Text 32"/>
+              <a:t>관측</a:t>
+            </a:r>
+            <a:endParaRPr lang="en-US" sz="1250" dirty="0"/>
+          </a:p>
+          <a:p>
+            <a:pPr indent="0" marL="0">
+              <a:spcAft>
+                <a:spcPts val="500"/>
+              </a:spcAft>
+              <a:buNone/>
+            </a:pPr>
+            <a:r>
+              <a:rPr lang="en-US" sz="1250" dirty="0">
+                <a:solidFill>
+                  <a:srgbClr val="ABBAB2"/>
+                </a:solidFill>
+                <a:latin typeface="Malgun Gothic" pitchFamily="34" charset="0"/>
+                <a:ea typeface="Malgun Gothic" pitchFamily="34" charset="-122"/>
+                <a:cs typeface="Malgun Gothic" pitchFamily="34" charset="-120"/>
+              </a:rPr>
+              <a:t>앱 자체 메트릭 exporter 0, 부하 테스트 0</a:t>
+            </a:r>
+            <a:endParaRPr lang="en-US" sz="1250" dirty="0"/>
+          </a:p>
+        </p:txBody>
+      </p:sp>
+      <p:sp>
+        <p:nvSpPr>
+          <p:cNvPr id="9" name="Text 6"/>
           <p:cNvSpPr txBox="1"/>
           <p:nvPr/>
         </p:nvSpPr>
@@ -6917,7 +7498,7 @@
                 <a:ea typeface="Malgun Gothic" pitchFamily="34" charset="-122"/>
                 <a:cs typeface="Malgun Gothic" pitchFamily="34" charset="-120"/>
               </a:rPr>
-              <a:t>출처: DESIGN.md 로드맵 R-6·R-7, 백로그 D-069~D-085, 저장소 grep 결과</a:t>
+              <a:t>자체 평가: 9개 영역 동일 가중 평균 · 70% 이상 = 상용 기준 충족(강조색)</a:t>
             </a:r>
             <a:endParaRPr lang="en-US" sz="1000" dirty="0"/>
           </a:p>
@@ -6925,7 +7506,7 @@
       </p:sp>
       <p:sp>
         <p:nvSpPr>
-          <p:cNvPr id="35" name="Text 33"/>
+          <p:cNvPr id="10" name="Text 7"/>
           <p:cNvSpPr txBox="1"/>
           <p:nvPr/>
         </p:nvSpPr>
@@ -6996,6 +7577,1304 @@
       </p:grpSpPr>
       <p:sp>
         <p:nvSpPr>
+          <p:cNvPr id="2" name="Text 0"/>
+          <p:cNvSpPr txBox="1"/>
+          <p:nvPr/>
+        </p:nvSpPr>
+        <p:spPr>
+          <a:xfrm>
+            <a:off x="548640" y="320040"/>
+            <a:ext cx="8229600" cy="320040"/>
+          </a:xfrm>
+          <a:prstGeom prst="rect">
+            <a:avLst/>
+          </a:prstGeom>
+          <a:noFill/>
+          <a:ln/>
+        </p:spPr>
+        <p:txBody>
+          <a:bodyPr wrap="square" lIns="0" tIns="0" rIns="0" bIns="0" rtlCol="0" anchor="ctr"/>
+          <a:lstStyle/>
+          <a:p>
+            <a:pPr indent="0" marL="0">
+              <a:buNone/>
+            </a:pPr>
+            <a:r>
+              <a:rPr lang="en-US" sz="1300" b="1" dirty="0">
+                <a:solidFill>
+                  <a:srgbClr val="94A2DB"/>
+                </a:solidFill>
+                <a:latin typeface="Malgun Gothic" pitchFamily="34" charset="0"/>
+                <a:ea typeface="Malgun Gothic" pitchFamily="34" charset="-122"/>
+                <a:cs typeface="Malgun Gothic" pitchFamily="34" charset="-120"/>
+              </a:rPr>
+              <a:t>NEXT</a:t>
+            </a:r>
+            <a:endParaRPr lang="en-US" sz="1300" dirty="0"/>
+          </a:p>
+        </p:txBody>
+      </p:sp>
+      <p:sp>
+        <p:nvSpPr>
+          <p:cNvPr id="3" name="Text 1"/>
+          <p:cNvSpPr txBox="1"/>
+          <p:nvPr/>
+        </p:nvSpPr>
+        <p:spPr>
+          <a:xfrm>
+            <a:off x="548640" y="640080"/>
+            <a:ext cx="11064240" cy="685800"/>
+          </a:xfrm>
+          <a:prstGeom prst="rect">
+            <a:avLst/>
+          </a:prstGeom>
+          <a:noFill/>
+          <a:ln/>
+        </p:spPr>
+        <p:txBody>
+          <a:bodyPr wrap="square" lIns="0" tIns="0" rIns="0" bIns="0" rtlCol="0" anchor="ctr"/>
+          <a:lstStyle/>
+          <a:p>
+            <a:pPr indent="0" marL="0">
+              <a:buNone/>
+            </a:pPr>
+            <a:r>
+              <a:rPr lang="en-US" sz="3000" b="1" dirty="0">
+                <a:solidFill>
+                  <a:srgbClr val="EDEAE3"/>
+                </a:solidFill>
+                <a:latin typeface="Malgun Gothic" pitchFamily="34" charset="0"/>
+                <a:ea typeface="Malgun Gothic" pitchFamily="34" charset="-122"/>
+                <a:cs typeface="Malgun Gothic" pitchFamily="34" charset="-120"/>
+              </a:rPr>
+              <a:t>남은 과제 — 상용 전환을 막는 5가지</a:t>
+            </a:r>
+            <a:endParaRPr lang="en-US" sz="3000" dirty="0"/>
+          </a:p>
+        </p:txBody>
+      </p:sp>
+      <p:sp>
+        <p:nvSpPr>
+          <p:cNvPr id="4" name="Text 2"/>
+          <p:cNvSpPr txBox="1"/>
+          <p:nvPr/>
+        </p:nvSpPr>
+        <p:spPr>
+          <a:xfrm>
+            <a:off x="731520" y="1600200"/>
+            <a:ext cx="822960" cy="365760"/>
+          </a:xfrm>
+          <a:prstGeom prst="rect">
+            <a:avLst/>
+          </a:prstGeom>
+          <a:noFill/>
+          <a:ln/>
+        </p:spPr>
+        <p:txBody>
+          <a:bodyPr wrap="square" lIns="0" tIns="0" rIns="0" bIns="0" rtlCol="0" anchor="ctr"/>
+          <a:lstStyle/>
+          <a:p>
+            <a:pPr indent="0" marL="0">
+              <a:buNone/>
+            </a:pPr>
+            <a:r>
+              <a:rPr lang="en-US" sz="1300" b="1" dirty="0">
+                <a:solidFill>
+                  <a:srgbClr val="ABBAB2"/>
+                </a:solidFill>
+                <a:latin typeface="Malgun Gothic" pitchFamily="34" charset="0"/>
+                <a:ea typeface="Malgun Gothic" pitchFamily="34" charset="-122"/>
+                <a:cs typeface="Malgun Gothic" pitchFamily="34" charset="-120"/>
+              </a:rPr>
+              <a:t>우선</a:t>
+            </a:r>
+            <a:endParaRPr lang="en-US" sz="1300" dirty="0"/>
+          </a:p>
+        </p:txBody>
+      </p:sp>
+      <p:sp>
+        <p:nvSpPr>
+          <p:cNvPr id="5" name="Text 3"/>
+          <p:cNvSpPr txBox="1"/>
+          <p:nvPr/>
+        </p:nvSpPr>
+        <p:spPr>
+          <a:xfrm>
+            <a:off x="1645920" y="1600200"/>
+            <a:ext cx="2103120" cy="365760"/>
+          </a:xfrm>
+          <a:prstGeom prst="rect">
+            <a:avLst/>
+          </a:prstGeom>
+          <a:noFill/>
+          <a:ln/>
+        </p:spPr>
+        <p:txBody>
+          <a:bodyPr wrap="square" lIns="0" tIns="0" rIns="0" bIns="0" rtlCol="0" anchor="ctr"/>
+          <a:lstStyle/>
+          <a:p>
+            <a:pPr indent="0" marL="0">
+              <a:buNone/>
+            </a:pPr>
+            <a:r>
+              <a:rPr lang="en-US" sz="1300" b="1" dirty="0">
+                <a:solidFill>
+                  <a:srgbClr val="ABBAB2"/>
+                </a:solidFill>
+                <a:latin typeface="Malgun Gothic" pitchFamily="34" charset="0"/>
+                <a:ea typeface="Malgun Gothic" pitchFamily="34" charset="-122"/>
+                <a:cs typeface="Malgun Gothic" pitchFamily="34" charset="-120"/>
+              </a:rPr>
+              <a:t>과제</a:t>
+            </a:r>
+            <a:endParaRPr lang="en-US" sz="1300" dirty="0"/>
+          </a:p>
+        </p:txBody>
+      </p:sp>
+      <p:sp>
+        <p:nvSpPr>
+          <p:cNvPr id="6" name="Text 4"/>
+          <p:cNvSpPr txBox="1"/>
+          <p:nvPr/>
+        </p:nvSpPr>
+        <p:spPr>
+          <a:xfrm>
+            <a:off x="3840480" y="1600200"/>
+            <a:ext cx="5486400" cy="365760"/>
+          </a:xfrm>
+          <a:prstGeom prst="rect">
+            <a:avLst/>
+          </a:prstGeom>
+          <a:noFill/>
+          <a:ln/>
+        </p:spPr>
+        <p:txBody>
+          <a:bodyPr wrap="square" lIns="0" tIns="0" rIns="0" bIns="0" rtlCol="0" anchor="ctr"/>
+          <a:lstStyle/>
+          <a:p>
+            <a:pPr indent="0" marL="0">
+              <a:buNone/>
+            </a:pPr>
+            <a:r>
+              <a:rPr lang="en-US" sz="1300" b="1" dirty="0">
+                <a:solidFill>
+                  <a:srgbClr val="ABBAB2"/>
+                </a:solidFill>
+                <a:latin typeface="Malgun Gothic" pitchFamily="34" charset="0"/>
+                <a:ea typeface="Malgun Gothic" pitchFamily="34" charset="-122"/>
+                <a:cs typeface="Malgun Gothic" pitchFamily="34" charset="-120"/>
+              </a:rPr>
+              <a:t>내용</a:t>
+            </a:r>
+            <a:endParaRPr lang="en-US" sz="1300" dirty="0"/>
+          </a:p>
+        </p:txBody>
+      </p:sp>
+      <p:sp>
+        <p:nvSpPr>
+          <p:cNvPr id="7" name="Text 5"/>
+          <p:cNvSpPr txBox="1"/>
+          <p:nvPr/>
+        </p:nvSpPr>
+        <p:spPr>
+          <a:xfrm>
+            <a:off x="9509760" y="1600200"/>
+            <a:ext cx="2286000" cy="365760"/>
+          </a:xfrm>
+          <a:prstGeom prst="rect">
+            <a:avLst/>
+          </a:prstGeom>
+          <a:noFill/>
+          <a:ln/>
+        </p:spPr>
+        <p:txBody>
+          <a:bodyPr wrap="square" lIns="0" tIns="0" rIns="0" bIns="0" rtlCol="0" anchor="ctr"/>
+          <a:lstStyle/>
+          <a:p>
+            <a:pPr indent="0" marL="0">
+              <a:buNone/>
+            </a:pPr>
+            <a:r>
+              <a:rPr lang="en-US" sz="1300" b="1" dirty="0">
+                <a:solidFill>
+                  <a:srgbClr val="ABBAB2"/>
+                </a:solidFill>
+                <a:latin typeface="Malgun Gothic" pitchFamily="34" charset="0"/>
+                <a:ea typeface="Malgun Gothic" pitchFamily="34" charset="-122"/>
+                <a:cs typeface="Malgun Gothic" pitchFamily="34" charset="-120"/>
+              </a:rPr>
+              <a:t>목표 지표</a:t>
+            </a:r>
+            <a:endParaRPr lang="en-US" sz="1300" dirty="0"/>
+          </a:p>
+        </p:txBody>
+      </p:sp>
+      <p:sp>
+        <p:nvSpPr>
+          <p:cNvPr id="8" name="Shape 6"/>
+          <p:cNvSpPr/>
+          <p:nvPr/>
+        </p:nvSpPr>
+        <p:spPr>
+          <a:xfrm>
+            <a:off x="548640" y="2011680"/>
+            <a:ext cx="11064240" cy="640080"/>
+          </a:xfrm>
+          <a:prstGeom prst="roundRect">
+            <a:avLst>
+              <a:gd name="adj" fmla="val 11429"/>
+            </a:avLst>
+          </a:prstGeom>
+          <a:solidFill>
+            <a:srgbClr val="323853"/>
+          </a:solidFill>
+          <a:ln w="9525">
+            <a:solidFill>
+              <a:srgbClr val="364A41"/>
+            </a:solidFill>
+            <a:prstDash val="solid"/>
+          </a:ln>
+        </p:spPr>
+      </p:sp>
+      <p:sp>
+        <p:nvSpPr>
+          <p:cNvPr id="9" name="Text 7"/>
+          <p:cNvSpPr txBox="1"/>
+          <p:nvPr/>
+        </p:nvSpPr>
+        <p:spPr>
+          <a:xfrm>
+            <a:off x="731520" y="2011680"/>
+            <a:ext cx="731520" cy="640080"/>
+          </a:xfrm>
+          <a:prstGeom prst="rect">
+            <a:avLst/>
+          </a:prstGeom>
+          <a:noFill/>
+          <a:ln/>
+        </p:spPr>
+        <p:txBody>
+          <a:bodyPr wrap="square" lIns="0" tIns="0" rIns="0" bIns="0" rtlCol="0" anchor="ctr"/>
+          <a:lstStyle/>
+          <a:p>
+            <a:pPr indent="0" marL="0">
+              <a:buNone/>
+            </a:pPr>
+            <a:r>
+              <a:rPr lang="en-US" sz="1600" b="1" dirty="0">
+                <a:solidFill>
+                  <a:srgbClr val="ADBAEB"/>
+                </a:solidFill>
+                <a:latin typeface="Arial" pitchFamily="34" charset="0"/>
+                <a:ea typeface="Arial" pitchFamily="34" charset="-122"/>
+                <a:cs typeface="Arial" pitchFamily="34" charset="-120"/>
+              </a:rPr>
+              <a:t>P0</a:t>
+            </a:r>
+            <a:endParaRPr lang="en-US" sz="1600" dirty="0"/>
+          </a:p>
+        </p:txBody>
+      </p:sp>
+      <p:sp>
+        <p:nvSpPr>
+          <p:cNvPr id="10" name="Text 8"/>
+          <p:cNvSpPr txBox="1"/>
+          <p:nvPr/>
+        </p:nvSpPr>
+        <p:spPr>
+          <a:xfrm>
+            <a:off x="1645920" y="2011680"/>
+            <a:ext cx="2011680" cy="640080"/>
+          </a:xfrm>
+          <a:prstGeom prst="rect">
+            <a:avLst/>
+          </a:prstGeom>
+          <a:noFill/>
+          <a:ln/>
+        </p:spPr>
+        <p:txBody>
+          <a:bodyPr wrap="square" lIns="0" tIns="0" rIns="0" bIns="0" rtlCol="0" anchor="ctr"/>
+          <a:lstStyle/>
+          <a:p>
+            <a:pPr indent="0" marL="0">
+              <a:buNone/>
+            </a:pPr>
+            <a:r>
+              <a:rPr lang="en-US" sz="1600" b="1" dirty="0">
+                <a:solidFill>
+                  <a:srgbClr val="EDEAE3"/>
+                </a:solidFill>
+                <a:latin typeface="Malgun Gothic" pitchFamily="34" charset="0"/>
+                <a:ea typeface="Malgun Gothic" pitchFamily="34" charset="-122"/>
+                <a:cs typeface="Malgun Gothic" pitchFamily="34" charset="-120"/>
+              </a:rPr>
+              <a:t>SSO·세션</a:t>
+            </a:r>
+            <a:endParaRPr lang="en-US" sz="1600" dirty="0"/>
+          </a:p>
+        </p:txBody>
+      </p:sp>
+      <p:sp>
+        <p:nvSpPr>
+          <p:cNvPr id="11" name="Text 9"/>
+          <p:cNvSpPr txBox="1"/>
+          <p:nvPr/>
+        </p:nvSpPr>
+        <p:spPr>
+          <a:xfrm>
+            <a:off x="3840480" y="2011680"/>
+            <a:ext cx="5394960" cy="640080"/>
+          </a:xfrm>
+          <a:prstGeom prst="rect">
+            <a:avLst/>
+          </a:prstGeom>
+          <a:noFill/>
+          <a:ln/>
+        </p:spPr>
+        <p:txBody>
+          <a:bodyPr wrap="square" lIns="0" tIns="0" rIns="0" bIns="0" rtlCol="0" anchor="ctr"/>
+          <a:lstStyle/>
+          <a:p>
+            <a:pPr indent="0" marL="0">
+              <a:buNone/>
+            </a:pPr>
+            <a:r>
+              <a:rPr lang="en-US" sz="1350" dirty="0">
+                <a:solidFill>
+                  <a:srgbClr val="ABBAB2"/>
+                </a:solidFill>
+                <a:latin typeface="Malgun Gothic" pitchFamily="34" charset="0"/>
+                <a:ea typeface="Malgun Gothic" pitchFamily="34" charset="-122"/>
+                <a:cs typeface="Malgun Gothic" pitchFamily="34" charset="-120"/>
+              </a:rPr>
+              <a:t>OIDC/LDAP 로그인, refresh 토큰, 만료 안내·returnTo (R-7)</a:t>
+            </a:r>
+            <a:endParaRPr lang="en-US" sz="1350" dirty="0"/>
+          </a:p>
+        </p:txBody>
+      </p:sp>
+      <p:sp>
+        <p:nvSpPr>
+          <p:cNvPr id="12" name="Text 10"/>
+          <p:cNvSpPr txBox="1"/>
+          <p:nvPr/>
+        </p:nvSpPr>
+        <p:spPr>
+          <a:xfrm>
+            <a:off x="9509760" y="2011680"/>
+            <a:ext cx="2011680" cy="640080"/>
+          </a:xfrm>
+          <a:prstGeom prst="rect">
+            <a:avLst/>
+          </a:prstGeom>
+          <a:noFill/>
+          <a:ln/>
+        </p:spPr>
+        <p:txBody>
+          <a:bodyPr wrap="square" lIns="0" tIns="0" rIns="0" bIns="0" rtlCol="0" anchor="ctr"/>
+          <a:lstStyle/>
+          <a:p>
+            <a:pPr indent="0" marL="0">
+              <a:buNone/>
+            </a:pPr>
+            <a:r>
+              <a:rPr lang="en-US" sz="1500" b="1" dirty="0">
+                <a:solidFill>
+                  <a:srgbClr val="ADBAEB"/>
+                </a:solidFill>
+                <a:latin typeface="Malgun Gothic" pitchFamily="34" charset="0"/>
+                <a:ea typeface="Malgun Gothic" pitchFamily="34" charset="-122"/>
+                <a:cs typeface="Malgun Gothic" pitchFamily="34" charset="-120"/>
+              </a:rPr>
+              <a:t>보안 55 → 80</a:t>
+            </a:r>
+            <a:endParaRPr lang="en-US" sz="1500" dirty="0"/>
+          </a:p>
+        </p:txBody>
+      </p:sp>
+      <p:sp>
+        <p:nvSpPr>
+          <p:cNvPr id="13" name="Shape 11"/>
+          <p:cNvSpPr/>
+          <p:nvPr/>
+        </p:nvSpPr>
+        <p:spPr>
+          <a:xfrm>
+            <a:off x="548640" y="2779776"/>
+            <a:ext cx="11064240" cy="640080"/>
+          </a:xfrm>
+          <a:prstGeom prst="roundRect">
+            <a:avLst>
+              <a:gd name="adj" fmla="val 11429"/>
+            </a:avLst>
+          </a:prstGeom>
+          <a:solidFill>
+            <a:srgbClr val="323853"/>
+          </a:solidFill>
+          <a:ln w="9525">
+            <a:solidFill>
+              <a:srgbClr val="364A41"/>
+            </a:solidFill>
+            <a:prstDash val="solid"/>
+          </a:ln>
+        </p:spPr>
+      </p:sp>
+      <p:sp>
+        <p:nvSpPr>
+          <p:cNvPr id="14" name="Text 12"/>
+          <p:cNvSpPr txBox="1"/>
+          <p:nvPr/>
+        </p:nvSpPr>
+        <p:spPr>
+          <a:xfrm>
+            <a:off x="731520" y="2779776"/>
+            <a:ext cx="731520" cy="640080"/>
+          </a:xfrm>
+          <a:prstGeom prst="rect">
+            <a:avLst/>
+          </a:prstGeom>
+          <a:noFill/>
+          <a:ln/>
+        </p:spPr>
+        <p:txBody>
+          <a:bodyPr wrap="square" lIns="0" tIns="0" rIns="0" bIns="0" rtlCol="0" anchor="ctr"/>
+          <a:lstStyle/>
+          <a:p>
+            <a:pPr indent="0" marL="0">
+              <a:buNone/>
+            </a:pPr>
+            <a:r>
+              <a:rPr lang="en-US" sz="1600" b="1" dirty="0">
+                <a:solidFill>
+                  <a:srgbClr val="ADBAEB"/>
+                </a:solidFill>
+                <a:latin typeface="Arial" pitchFamily="34" charset="0"/>
+                <a:ea typeface="Arial" pitchFamily="34" charset="-122"/>
+                <a:cs typeface="Arial" pitchFamily="34" charset="-120"/>
+              </a:rPr>
+              <a:t>P0</a:t>
+            </a:r>
+            <a:endParaRPr lang="en-US" sz="1600" dirty="0"/>
+          </a:p>
+        </p:txBody>
+      </p:sp>
+      <p:sp>
+        <p:nvSpPr>
+          <p:cNvPr id="15" name="Text 13"/>
+          <p:cNvSpPr txBox="1"/>
+          <p:nvPr/>
+        </p:nvSpPr>
+        <p:spPr>
+          <a:xfrm>
+            <a:off x="1645920" y="2779776"/>
+            <a:ext cx="2011680" cy="640080"/>
+          </a:xfrm>
+          <a:prstGeom prst="rect">
+            <a:avLst/>
+          </a:prstGeom>
+          <a:noFill/>
+          <a:ln/>
+        </p:spPr>
+        <p:txBody>
+          <a:bodyPr wrap="square" lIns="0" tIns="0" rIns="0" bIns="0" rtlCol="0" anchor="ctr"/>
+          <a:lstStyle/>
+          <a:p>
+            <a:pPr indent="0" marL="0">
+              <a:buNone/>
+            </a:pPr>
+            <a:r>
+              <a:rPr lang="en-US" sz="1600" b="1" dirty="0">
+                <a:solidFill>
+                  <a:srgbClr val="EDEAE3"/>
+                </a:solidFill>
+                <a:latin typeface="Malgun Gothic" pitchFamily="34" charset="0"/>
+                <a:ea typeface="Malgun Gothic" pitchFamily="34" charset="-122"/>
+                <a:cs typeface="Malgun Gothic" pitchFamily="34" charset="-120"/>
+              </a:rPr>
+              <a:t>프론트 테스트</a:t>
+            </a:r>
+            <a:endParaRPr lang="en-US" sz="1600" dirty="0"/>
+          </a:p>
+        </p:txBody>
+      </p:sp>
+      <p:sp>
+        <p:nvSpPr>
+          <p:cNvPr id="16" name="Text 14"/>
+          <p:cNvSpPr txBox="1"/>
+          <p:nvPr/>
+        </p:nvSpPr>
+        <p:spPr>
+          <a:xfrm>
+            <a:off x="3840480" y="2779776"/>
+            <a:ext cx="5394960" cy="640080"/>
+          </a:xfrm>
+          <a:prstGeom prst="rect">
+            <a:avLst/>
+          </a:prstGeom>
+          <a:noFill/>
+          <a:ln/>
+        </p:spPr>
+        <p:txBody>
+          <a:bodyPr wrap="square" lIns="0" tIns="0" rIns="0" bIns="0" rtlCol="0" anchor="ctr"/>
+          <a:lstStyle/>
+          <a:p>
+            <a:pPr indent="0" marL="0">
+              <a:buNone/>
+            </a:pPr>
+            <a:r>
+              <a:rPr lang="en-US" sz="1350" dirty="0">
+                <a:solidFill>
+                  <a:srgbClr val="ABBAB2"/>
+                </a:solidFill>
+                <a:latin typeface="Malgun Gothic" pitchFamily="34" charset="0"/>
+                <a:ea typeface="Malgun Gothic" pitchFamily="34" charset="-122"/>
+                <a:cs typeface="Malgun Gothic" pitchFamily="34" charset="-120"/>
+              </a:rPr>
+              <a:t>Vitest 핵심 훅·컴포넌트 + Playwright 주요 동선 E2E</a:t>
+            </a:r>
+            <a:endParaRPr lang="en-US" sz="1350" dirty="0"/>
+          </a:p>
+        </p:txBody>
+      </p:sp>
+      <p:sp>
+        <p:nvSpPr>
+          <p:cNvPr id="17" name="Text 15"/>
+          <p:cNvSpPr txBox="1"/>
+          <p:nvPr/>
+        </p:nvSpPr>
+        <p:spPr>
+          <a:xfrm>
+            <a:off x="9509760" y="2779776"/>
+            <a:ext cx="2011680" cy="640080"/>
+          </a:xfrm>
+          <a:prstGeom prst="rect">
+            <a:avLst/>
+          </a:prstGeom>
+          <a:noFill/>
+          <a:ln/>
+        </p:spPr>
+        <p:txBody>
+          <a:bodyPr wrap="square" lIns="0" tIns="0" rIns="0" bIns="0" rtlCol="0" anchor="ctr"/>
+          <a:lstStyle/>
+          <a:p>
+            <a:pPr indent="0" marL="0">
+              <a:buNone/>
+            </a:pPr>
+            <a:r>
+              <a:rPr lang="en-US" sz="1500" b="1" dirty="0">
+                <a:solidFill>
+                  <a:srgbClr val="ADBAEB"/>
+                </a:solidFill>
+                <a:latin typeface="Malgun Gothic" pitchFamily="34" charset="0"/>
+                <a:ea typeface="Malgun Gothic" pitchFamily="34" charset="-122"/>
+                <a:cs typeface="Malgun Gothic" pitchFamily="34" charset="-120"/>
+              </a:rPr>
+              <a:t>20 → 60</a:t>
+            </a:r>
+            <a:endParaRPr lang="en-US" sz="1500" dirty="0"/>
+          </a:p>
+        </p:txBody>
+      </p:sp>
+      <p:sp>
+        <p:nvSpPr>
+          <p:cNvPr id="18" name="Shape 16"/>
+          <p:cNvSpPr/>
+          <p:nvPr/>
+        </p:nvSpPr>
+        <p:spPr>
+          <a:xfrm>
+            <a:off x="548640" y="3547872"/>
+            <a:ext cx="11064240" cy="640080"/>
+          </a:xfrm>
+          <a:prstGeom prst="roundRect">
+            <a:avLst>
+              <a:gd name="adj" fmla="val 11429"/>
+            </a:avLst>
+          </a:prstGeom>
+          <a:solidFill>
+            <a:srgbClr val="1E2F28"/>
+          </a:solidFill>
+          <a:ln w="9525">
+            <a:solidFill>
+              <a:srgbClr val="364A41"/>
+            </a:solidFill>
+            <a:prstDash val="solid"/>
+          </a:ln>
+        </p:spPr>
+      </p:sp>
+      <p:sp>
+        <p:nvSpPr>
+          <p:cNvPr id="19" name="Text 17"/>
+          <p:cNvSpPr txBox="1"/>
+          <p:nvPr/>
+        </p:nvSpPr>
+        <p:spPr>
+          <a:xfrm>
+            <a:off x="731520" y="3547872"/>
+            <a:ext cx="731520" cy="640080"/>
+          </a:xfrm>
+          <a:prstGeom prst="rect">
+            <a:avLst/>
+          </a:prstGeom>
+          <a:noFill/>
+          <a:ln/>
+        </p:spPr>
+        <p:txBody>
+          <a:bodyPr wrap="square" lIns="0" tIns="0" rIns="0" bIns="0" rtlCol="0" anchor="ctr"/>
+          <a:lstStyle/>
+          <a:p>
+            <a:pPr indent="0" marL="0">
+              <a:buNone/>
+            </a:pPr>
+            <a:r>
+              <a:rPr lang="en-US" sz="1600" b="1" dirty="0">
+                <a:solidFill>
+                  <a:srgbClr val="ABBAB2"/>
+                </a:solidFill>
+                <a:latin typeface="Arial" pitchFamily="34" charset="0"/>
+                <a:ea typeface="Arial" pitchFamily="34" charset="-122"/>
+                <a:cs typeface="Arial" pitchFamily="34" charset="-120"/>
+              </a:rPr>
+              <a:t>P1</a:t>
+            </a:r>
+            <a:endParaRPr lang="en-US" sz="1600" dirty="0"/>
+          </a:p>
+        </p:txBody>
+      </p:sp>
+      <p:sp>
+        <p:nvSpPr>
+          <p:cNvPr id="20" name="Text 18"/>
+          <p:cNvSpPr txBox="1"/>
+          <p:nvPr/>
+        </p:nvSpPr>
+        <p:spPr>
+          <a:xfrm>
+            <a:off x="1645920" y="3547872"/>
+            <a:ext cx="2011680" cy="640080"/>
+          </a:xfrm>
+          <a:prstGeom prst="rect">
+            <a:avLst/>
+          </a:prstGeom>
+          <a:noFill/>
+          <a:ln/>
+        </p:spPr>
+        <p:txBody>
+          <a:bodyPr wrap="square" lIns="0" tIns="0" rIns="0" bIns="0" rtlCol="0" anchor="ctr"/>
+          <a:lstStyle/>
+          <a:p>
+            <a:pPr indent="0" marL="0">
+              <a:buNone/>
+            </a:pPr>
+            <a:r>
+              <a:rPr lang="en-US" sz="1600" b="1" dirty="0">
+                <a:solidFill>
+                  <a:srgbClr val="EDEAE3"/>
+                </a:solidFill>
+                <a:latin typeface="Malgun Gothic" pitchFamily="34" charset="0"/>
+                <a:ea typeface="Malgun Gothic" pitchFamily="34" charset="-122"/>
+                <a:cs typeface="Malgun Gothic" pitchFamily="34" charset="-120"/>
+              </a:rPr>
+              <a:t>관측·성능</a:t>
+            </a:r>
+            <a:endParaRPr lang="en-US" sz="1600" dirty="0"/>
+          </a:p>
+        </p:txBody>
+      </p:sp>
+      <p:sp>
+        <p:nvSpPr>
+          <p:cNvPr id="21" name="Text 19"/>
+          <p:cNvSpPr txBox="1"/>
+          <p:nvPr/>
+        </p:nvSpPr>
+        <p:spPr>
+          <a:xfrm>
+            <a:off x="3840480" y="3547872"/>
+            <a:ext cx="5394960" cy="640080"/>
+          </a:xfrm>
+          <a:prstGeom prst="rect">
+            <a:avLst/>
+          </a:prstGeom>
+          <a:noFill/>
+          <a:ln/>
+        </p:spPr>
+        <p:txBody>
+          <a:bodyPr wrap="square" lIns="0" tIns="0" rIns="0" bIns="0" rtlCol="0" anchor="ctr"/>
+          <a:lstStyle/>
+          <a:p>
+            <a:pPr indent="0" marL="0">
+              <a:buNone/>
+            </a:pPr>
+            <a:r>
+              <a:rPr lang="en-US" sz="1350" dirty="0">
+                <a:solidFill>
+                  <a:srgbClr val="ABBAB2"/>
+                </a:solidFill>
+                <a:latin typeface="Malgun Gothic" pitchFamily="34" charset="0"/>
+                <a:ea typeface="Malgun Gothic" pitchFamily="34" charset="-122"/>
+                <a:cs typeface="Malgun Gothic" pitchFamily="34" charset="-120"/>
+              </a:rPr>
+              <a:t>/metrics exporter, SLO 정의, 대형 클러스터 부하 테스트</a:t>
+            </a:r>
+            <a:endParaRPr lang="en-US" sz="1350" dirty="0"/>
+          </a:p>
+        </p:txBody>
+      </p:sp>
+      <p:sp>
+        <p:nvSpPr>
+          <p:cNvPr id="22" name="Text 20"/>
+          <p:cNvSpPr txBox="1"/>
+          <p:nvPr/>
+        </p:nvSpPr>
+        <p:spPr>
+          <a:xfrm>
+            <a:off x="9509760" y="3547872"/>
+            <a:ext cx="2011680" cy="640080"/>
+          </a:xfrm>
+          <a:prstGeom prst="rect">
+            <a:avLst/>
+          </a:prstGeom>
+          <a:noFill/>
+          <a:ln/>
+        </p:spPr>
+        <p:txBody>
+          <a:bodyPr wrap="square" lIns="0" tIns="0" rIns="0" bIns="0" rtlCol="0" anchor="ctr"/>
+          <a:lstStyle/>
+          <a:p>
+            <a:pPr indent="0" marL="0">
+              <a:buNone/>
+            </a:pPr>
+            <a:r>
+              <a:rPr lang="en-US" sz="1500" b="1" dirty="0">
+                <a:solidFill>
+                  <a:srgbClr val="EDEAE3"/>
+                </a:solidFill>
+                <a:latin typeface="Malgun Gothic" pitchFamily="34" charset="0"/>
+                <a:ea typeface="Malgun Gothic" pitchFamily="34" charset="-122"/>
+                <a:cs typeface="Malgun Gothic" pitchFamily="34" charset="-120"/>
+              </a:rPr>
+              <a:t>30 → 70</a:t>
+            </a:r>
+            <a:endParaRPr lang="en-US" sz="1500" dirty="0"/>
+          </a:p>
+        </p:txBody>
+      </p:sp>
+      <p:sp>
+        <p:nvSpPr>
+          <p:cNvPr id="23" name="Shape 21"/>
+          <p:cNvSpPr/>
+          <p:nvPr/>
+        </p:nvSpPr>
+        <p:spPr>
+          <a:xfrm>
+            <a:off x="548640" y="4315968"/>
+            <a:ext cx="11064240" cy="640080"/>
+          </a:xfrm>
+          <a:prstGeom prst="roundRect">
+            <a:avLst>
+              <a:gd name="adj" fmla="val 11429"/>
+            </a:avLst>
+          </a:prstGeom>
+          <a:solidFill>
+            <a:srgbClr val="1E2F28"/>
+          </a:solidFill>
+          <a:ln w="9525">
+            <a:solidFill>
+              <a:srgbClr val="364A41"/>
+            </a:solidFill>
+            <a:prstDash val="solid"/>
+          </a:ln>
+        </p:spPr>
+      </p:sp>
+      <p:sp>
+        <p:nvSpPr>
+          <p:cNvPr id="24" name="Text 22"/>
+          <p:cNvSpPr txBox="1"/>
+          <p:nvPr/>
+        </p:nvSpPr>
+        <p:spPr>
+          <a:xfrm>
+            <a:off x="731520" y="4315968"/>
+            <a:ext cx="731520" cy="640080"/>
+          </a:xfrm>
+          <a:prstGeom prst="rect">
+            <a:avLst/>
+          </a:prstGeom>
+          <a:noFill/>
+          <a:ln/>
+        </p:spPr>
+        <p:txBody>
+          <a:bodyPr wrap="square" lIns="0" tIns="0" rIns="0" bIns="0" rtlCol="0" anchor="ctr"/>
+          <a:lstStyle/>
+          <a:p>
+            <a:pPr indent="0" marL="0">
+              <a:buNone/>
+            </a:pPr>
+            <a:r>
+              <a:rPr lang="en-US" sz="1600" b="1" dirty="0">
+                <a:solidFill>
+                  <a:srgbClr val="ABBAB2"/>
+                </a:solidFill>
+                <a:latin typeface="Arial" pitchFamily="34" charset="0"/>
+                <a:ea typeface="Arial" pitchFamily="34" charset="-122"/>
+                <a:cs typeface="Arial" pitchFamily="34" charset="-120"/>
+              </a:rPr>
+              <a:t>P1</a:t>
+            </a:r>
+            <a:endParaRPr lang="en-US" sz="1600" dirty="0"/>
+          </a:p>
+        </p:txBody>
+      </p:sp>
+      <p:sp>
+        <p:nvSpPr>
+          <p:cNvPr id="25" name="Text 23"/>
+          <p:cNvSpPr txBox="1"/>
+          <p:nvPr/>
+        </p:nvSpPr>
+        <p:spPr>
+          <a:xfrm>
+            <a:off x="1645920" y="4315968"/>
+            <a:ext cx="2011680" cy="640080"/>
+          </a:xfrm>
+          <a:prstGeom prst="rect">
+            <a:avLst/>
+          </a:prstGeom>
+          <a:noFill/>
+          <a:ln/>
+        </p:spPr>
+        <p:txBody>
+          <a:bodyPr wrap="square" lIns="0" tIns="0" rIns="0" bIns="0" rtlCol="0" anchor="ctr"/>
+          <a:lstStyle/>
+          <a:p>
+            <a:pPr indent="0" marL="0">
+              <a:buNone/>
+            </a:pPr>
+            <a:r>
+              <a:rPr lang="en-US" sz="1600" b="1" dirty="0">
+                <a:solidFill>
+                  <a:srgbClr val="EDEAE3"/>
+                </a:solidFill>
+                <a:latin typeface="Malgun Gothic" pitchFamily="34" charset="0"/>
+                <a:ea typeface="Malgun Gothic" pitchFamily="34" charset="-122"/>
+                <a:cs typeface="Malgun Gothic" pitchFamily="34" charset="-120"/>
+              </a:rPr>
+              <a:t>국제화·반응형</a:t>
+            </a:r>
+            <a:endParaRPr lang="en-US" sz="1600" dirty="0"/>
+          </a:p>
+        </p:txBody>
+      </p:sp>
+      <p:sp>
+        <p:nvSpPr>
+          <p:cNvPr id="26" name="Text 24"/>
+          <p:cNvSpPr txBox="1"/>
+          <p:nvPr/>
+        </p:nvSpPr>
+        <p:spPr>
+          <a:xfrm>
+            <a:off x="3840480" y="4315968"/>
+            <a:ext cx="5394960" cy="640080"/>
+          </a:xfrm>
+          <a:prstGeom prst="rect">
+            <a:avLst/>
+          </a:prstGeom>
+          <a:noFill/>
+          <a:ln/>
+        </p:spPr>
+        <p:txBody>
+          <a:bodyPr wrap="square" lIns="0" tIns="0" rIns="0" bIns="0" rtlCol="0" anchor="ctr"/>
+          <a:lstStyle/>
+          <a:p>
+            <a:pPr indent="0" marL="0">
+              <a:buNone/>
+            </a:pPr>
+            <a:r>
+              <a:rPr lang="en-US" sz="1350" dirty="0">
+                <a:solidFill>
+                  <a:srgbClr val="ABBAB2"/>
+                </a:solidFill>
+                <a:latin typeface="Malgun Gothic" pitchFamily="34" charset="0"/>
+                <a:ea typeface="Malgun Gothic" pitchFamily="34" charset="-122"/>
+                <a:cs typeface="Malgun Gothic" pitchFamily="34" charset="-120"/>
+              </a:rPr>
+              <a:t>react-i18next ko/en (R-6), 태블릿 최소 폭 대응</a:t>
+            </a:r>
+            <a:endParaRPr lang="en-US" sz="1350" dirty="0"/>
+          </a:p>
+        </p:txBody>
+      </p:sp>
+      <p:sp>
+        <p:nvSpPr>
+          <p:cNvPr id="27" name="Text 25"/>
+          <p:cNvSpPr txBox="1"/>
+          <p:nvPr/>
+        </p:nvSpPr>
+        <p:spPr>
+          <a:xfrm>
+            <a:off x="9509760" y="4315968"/>
+            <a:ext cx="2011680" cy="640080"/>
+          </a:xfrm>
+          <a:prstGeom prst="rect">
+            <a:avLst/>
+          </a:prstGeom>
+          <a:noFill/>
+          <a:ln/>
+        </p:spPr>
+        <p:txBody>
+          <a:bodyPr wrap="square" lIns="0" tIns="0" rIns="0" bIns="0" rtlCol="0" anchor="ctr"/>
+          <a:lstStyle/>
+          <a:p>
+            <a:pPr indent="0" marL="0">
+              <a:buNone/>
+            </a:pPr>
+            <a:r>
+              <a:rPr lang="en-US" sz="1500" b="1" dirty="0">
+                <a:solidFill>
+                  <a:srgbClr val="EDEAE3"/>
+                </a:solidFill>
+                <a:latin typeface="Malgun Gothic" pitchFamily="34" charset="0"/>
+                <a:ea typeface="Malgun Gothic" pitchFamily="34" charset="-122"/>
+                <a:cs typeface="Malgun Gothic" pitchFamily="34" charset="-120"/>
+              </a:rPr>
+              <a:t>UX 70 → 85</a:t>
+            </a:r>
+            <a:endParaRPr lang="en-US" sz="1500" dirty="0"/>
+          </a:p>
+        </p:txBody>
+      </p:sp>
+      <p:sp>
+        <p:nvSpPr>
+          <p:cNvPr id="28" name="Shape 26"/>
+          <p:cNvSpPr/>
+          <p:nvPr/>
+        </p:nvSpPr>
+        <p:spPr>
+          <a:xfrm>
+            <a:off x="548640" y="5084064"/>
+            <a:ext cx="11064240" cy="640080"/>
+          </a:xfrm>
+          <a:prstGeom prst="roundRect">
+            <a:avLst>
+              <a:gd name="adj" fmla="val 11429"/>
+            </a:avLst>
+          </a:prstGeom>
+          <a:solidFill>
+            <a:srgbClr val="1E2F28"/>
+          </a:solidFill>
+          <a:ln w="9525">
+            <a:solidFill>
+              <a:srgbClr val="364A41"/>
+            </a:solidFill>
+            <a:prstDash val="solid"/>
+          </a:ln>
+        </p:spPr>
+      </p:sp>
+      <p:sp>
+        <p:nvSpPr>
+          <p:cNvPr id="29" name="Text 27"/>
+          <p:cNvSpPr txBox="1"/>
+          <p:nvPr/>
+        </p:nvSpPr>
+        <p:spPr>
+          <a:xfrm>
+            <a:off x="731520" y="5084064"/>
+            <a:ext cx="731520" cy="640080"/>
+          </a:xfrm>
+          <a:prstGeom prst="rect">
+            <a:avLst/>
+          </a:prstGeom>
+          <a:noFill/>
+          <a:ln/>
+        </p:spPr>
+        <p:txBody>
+          <a:bodyPr wrap="square" lIns="0" tIns="0" rIns="0" bIns="0" rtlCol="0" anchor="ctr"/>
+          <a:lstStyle/>
+          <a:p>
+            <a:pPr indent="0" marL="0">
+              <a:buNone/>
+            </a:pPr>
+            <a:r>
+              <a:rPr lang="en-US" sz="1600" b="1" dirty="0">
+                <a:solidFill>
+                  <a:srgbClr val="ABBAB2"/>
+                </a:solidFill>
+                <a:latin typeface="Arial" pitchFamily="34" charset="0"/>
+                <a:ea typeface="Arial" pitchFamily="34" charset="-122"/>
+                <a:cs typeface="Arial" pitchFamily="34" charset="-120"/>
+              </a:rPr>
+              <a:t>P2</a:t>
+            </a:r>
+            <a:endParaRPr lang="en-US" sz="1600" dirty="0"/>
+          </a:p>
+        </p:txBody>
+      </p:sp>
+      <p:sp>
+        <p:nvSpPr>
+          <p:cNvPr id="30" name="Text 28"/>
+          <p:cNvSpPr txBox="1"/>
+          <p:nvPr/>
+        </p:nvSpPr>
+        <p:spPr>
+          <a:xfrm>
+            <a:off x="1645920" y="5084064"/>
+            <a:ext cx="2011680" cy="640080"/>
+          </a:xfrm>
+          <a:prstGeom prst="rect">
+            <a:avLst/>
+          </a:prstGeom>
+          <a:noFill/>
+          <a:ln/>
+        </p:spPr>
+        <p:txBody>
+          <a:bodyPr wrap="square" lIns="0" tIns="0" rIns="0" bIns="0" rtlCol="0" anchor="ctr"/>
+          <a:lstStyle/>
+          <a:p>
+            <a:pPr indent="0" marL="0">
+              <a:buNone/>
+            </a:pPr>
+            <a:r>
+              <a:rPr lang="en-US" sz="1600" b="1" dirty="0">
+                <a:solidFill>
+                  <a:srgbClr val="EDEAE3"/>
+                </a:solidFill>
+                <a:latin typeface="Malgun Gothic" pitchFamily="34" charset="0"/>
+                <a:ea typeface="Malgun Gothic" pitchFamily="34" charset="-122"/>
+                <a:cs typeface="Malgun Gothic" pitchFamily="34" charset="-120"/>
+              </a:rPr>
+              <a:t>UX 백로그</a:t>
+            </a:r>
+            <a:endParaRPr lang="en-US" sz="1600" dirty="0"/>
+          </a:p>
+        </p:txBody>
+      </p:sp>
+      <p:sp>
+        <p:nvSpPr>
+          <p:cNvPr id="31" name="Text 29"/>
+          <p:cNvSpPr txBox="1"/>
+          <p:nvPr/>
+        </p:nvSpPr>
+        <p:spPr>
+          <a:xfrm>
+            <a:off x="3840480" y="5084064"/>
+            <a:ext cx="5394960" cy="640080"/>
+          </a:xfrm>
+          <a:prstGeom prst="rect">
+            <a:avLst/>
+          </a:prstGeom>
+          <a:noFill/>
+          <a:ln/>
+        </p:spPr>
+        <p:txBody>
+          <a:bodyPr wrap="square" lIns="0" tIns="0" rIns="0" bIns="0" rtlCol="0" anchor="ctr"/>
+          <a:lstStyle/>
+          <a:p>
+            <a:pPr indent="0" marL="0">
+              <a:buNone/>
+            </a:pPr>
+            <a:r>
+              <a:rPr lang="en-US" sz="1350" dirty="0">
+                <a:solidFill>
+                  <a:srgbClr val="ABBAB2"/>
+                </a:solidFill>
+                <a:latin typeface="Malgun Gothic" pitchFamily="34" charset="0"/>
+                <a:ea typeface="Malgun Gothic" pitchFamily="34" charset="-122"/>
+                <a:cs typeface="Malgun Gothic" pitchFamily="34" charset="-120"/>
+              </a:rPr>
+              <a:t>미처리 13건 + 부분완료 3건 소진, 토큰 정합(raw hex 104건)</a:t>
+            </a:r>
+            <a:endParaRPr lang="en-US" sz="1350" dirty="0"/>
+          </a:p>
+        </p:txBody>
+      </p:sp>
+      <p:sp>
+        <p:nvSpPr>
+          <p:cNvPr id="32" name="Text 30"/>
+          <p:cNvSpPr txBox="1"/>
+          <p:nvPr/>
+        </p:nvSpPr>
+        <p:spPr>
+          <a:xfrm>
+            <a:off x="9509760" y="5084064"/>
+            <a:ext cx="2011680" cy="640080"/>
+          </a:xfrm>
+          <a:prstGeom prst="rect">
+            <a:avLst/>
+          </a:prstGeom>
+          <a:noFill/>
+          <a:ln/>
+        </p:spPr>
+        <p:txBody>
+          <a:bodyPr wrap="square" lIns="0" tIns="0" rIns="0" bIns="0" rtlCol="0" anchor="ctr"/>
+          <a:lstStyle/>
+          <a:p>
+            <a:pPr indent="0" marL="0">
+              <a:buNone/>
+            </a:pPr>
+            <a:r>
+              <a:rPr lang="en-US" sz="1500" b="1" dirty="0">
+                <a:solidFill>
+                  <a:srgbClr val="EDEAE3"/>
+                </a:solidFill>
+                <a:latin typeface="Malgun Gothic" pitchFamily="34" charset="0"/>
+                <a:ea typeface="Malgun Gothic" pitchFamily="34" charset="-122"/>
+                <a:cs typeface="Malgun Gothic" pitchFamily="34" charset="-120"/>
+              </a:rPr>
+              <a:t>82% → 100%</a:t>
+            </a:r>
+            <a:endParaRPr lang="en-US" sz="1500" dirty="0"/>
+          </a:p>
+        </p:txBody>
+      </p:sp>
+      <p:sp>
+        <p:nvSpPr>
+          <p:cNvPr id="33" name="Text 31"/>
+          <p:cNvSpPr txBox="1"/>
+          <p:nvPr/>
+        </p:nvSpPr>
+        <p:spPr>
+          <a:xfrm>
+            <a:off x="548640" y="5897880"/>
+            <a:ext cx="11064240" cy="320040"/>
+          </a:xfrm>
+          <a:prstGeom prst="rect">
+            <a:avLst/>
+          </a:prstGeom>
+          <a:noFill/>
+          <a:ln/>
+        </p:spPr>
+        <p:txBody>
+          <a:bodyPr wrap="square" lIns="0" tIns="0" rIns="0" bIns="0" rtlCol="0" anchor="ctr"/>
+          <a:lstStyle/>
+          <a:p>
+            <a:pPr indent="0" marL="0">
+              <a:buNone/>
+            </a:pPr>
+            <a:r>
+              <a:rPr lang="en-US" sz="1300" dirty="0">
+                <a:solidFill>
+                  <a:srgbClr val="ADBAEB"/>
+                </a:solidFill>
+                <a:latin typeface="Malgun Gothic" pitchFamily="34" charset="0"/>
+                <a:ea typeface="Malgun Gothic" pitchFamily="34" charset="-122"/>
+                <a:cs typeface="Malgun Gothic" pitchFamily="34" charset="-120"/>
+              </a:rPr>
+              <a:t>목표 지표를 모두 달성하면 종합 진척도 67% → 약 80% (상용 베타 수준)</a:t>
+            </a:r>
+            <a:endParaRPr lang="en-US" sz="1300" dirty="0"/>
+          </a:p>
+        </p:txBody>
+      </p:sp>
+      <p:sp>
+        <p:nvSpPr>
+          <p:cNvPr id="34" name="Text 32"/>
+          <p:cNvSpPr txBox="1"/>
+          <p:nvPr/>
+        </p:nvSpPr>
+        <p:spPr>
+          <a:xfrm>
+            <a:off x="548640" y="6400800"/>
+            <a:ext cx="9601200" cy="274320"/>
+          </a:xfrm>
+          <a:prstGeom prst="rect">
+            <a:avLst/>
+          </a:prstGeom>
+          <a:noFill/>
+          <a:ln/>
+        </p:spPr>
+        <p:txBody>
+          <a:bodyPr wrap="square" lIns="0" tIns="0" rIns="0" bIns="0" rtlCol="0" anchor="ctr"/>
+          <a:lstStyle/>
+          <a:p>
+            <a:pPr indent="0" marL="0">
+              <a:buNone/>
+            </a:pPr>
+            <a:r>
+              <a:rPr lang="en-US" sz="1000" dirty="0">
+                <a:solidFill>
+                  <a:srgbClr val="6E7F77"/>
+                </a:solidFill>
+                <a:latin typeface="Malgun Gothic" pitchFamily="34" charset="0"/>
+                <a:ea typeface="Malgun Gothic" pitchFamily="34" charset="-122"/>
+                <a:cs typeface="Malgun Gothic" pitchFamily="34" charset="-120"/>
+              </a:rPr>
+              <a:t>출처: DESIGN.md 로드맵 R-6·R-7, 백로그 D-069~D-085, 저장소 grep 결과</a:t>
+            </a:r>
+            <a:endParaRPr lang="en-US" sz="1000" dirty="0"/>
+          </a:p>
+        </p:txBody>
+      </p:sp>
+      <p:sp>
+        <p:nvSpPr>
+          <p:cNvPr id="35" name="Text 33"/>
+          <p:cNvSpPr txBox="1"/>
+          <p:nvPr/>
+        </p:nvSpPr>
+        <p:spPr>
+          <a:xfrm>
+            <a:off x="11155680" y="6400800"/>
+            <a:ext cx="502920" cy="274320"/>
+          </a:xfrm>
+          <a:prstGeom prst="rect">
+            <a:avLst/>
+          </a:prstGeom>
+          <a:noFill/>
+          <a:ln/>
+        </p:spPr>
+        <p:txBody>
+          <a:bodyPr wrap="square" lIns="0" tIns="0" rIns="0" bIns="0" rtlCol="0" anchor="ctr"/>
+          <a:lstStyle/>
+          <a:p>
+            <a:pPr algn="r" indent="0" marL="0">
+              <a:buNone/>
+            </a:pPr>
+            <a:r>
+              <a:rPr lang="en-US" sz="1000" dirty="0">
+                <a:solidFill>
+                  <a:srgbClr val="6E7F77"/>
+                </a:solidFill>
+                <a:latin typeface="Arial" pitchFamily="34" charset="0"/>
+                <a:ea typeface="Arial" pitchFamily="34" charset="-122"/>
+                <a:cs typeface="Arial" pitchFamily="34" charset="-120"/>
+              </a:rPr>
+              <a:t>12</a:t>
+            </a:r>
+            <a:endParaRPr lang="en-US" sz="1000" dirty="0"/>
+          </a:p>
+        </p:txBody>
+      </p:sp>
+    </p:spTree>
+  </p:cSld>
+  <p:clrMapOvr>
+    <a:masterClrMapping/>
+  </p:clrMapOvr>
+</p:sld>
+</file>
+
+<file path=ppt/slides/slide13.xml><?xml version="1.0" encoding="utf-8"?>
+<p:sld xmlns:a="http://schemas.openxmlformats.org/drawingml/2006/main" xmlns:r="http://schemas.openxmlformats.org/officeDocument/2006/relationships" xmlns:p="http://schemas.openxmlformats.org/presentationml/2006/main">
+  <p:cSld name="Slide 13">
+    <p:bg>
+      <p:bgPr>
+        <a:solidFill>
+          <a:srgbClr val="15231D"/>
+        </a:solidFill>
+      </p:bgPr>
+    </p:bg>
+    <p:spTree>
+      <p:nvGrpSpPr>
+        <p:cNvPr id="1" name=""/>
+        <p:cNvGrpSpPr/>
+        <p:nvPr/>
+      </p:nvGrpSpPr>
+      <p:grpSpPr>
+        <a:xfrm>
+          <a:off x="0" y="0"/>
+          <a:ext cx="0" cy="0"/>
+          <a:chOff x="0" y="0"/>
+          <a:chExt cx="0" cy="0"/>
+        </a:xfrm>
+      </p:grpSpPr>
+      <p:sp>
+        <p:nvSpPr>
           <p:cNvPr id="2" name="Shape 0"/>
           <p:cNvSpPr/>
           <p:nvPr/>
@@ -7306,7 +9185,7 @@
                 <a:ea typeface="Malgun Gothic" pitchFamily="34" charset="-122"/>
                 <a:cs typeface="Malgun Gothic" pitchFamily="34" charset="-120"/>
               </a:rPr>
-              <a:t>CLAUDE.md·CODE_MAP·스킬로 규칙을 저장소에 남기자 같은 설명의 반복이 사라졌다. 월 PR 2배의 실제 원인이다.</a:t>
+              <a:t>CLAUDE.md·CODE_MAP·스킬로 규칙을 저장소에 남기자 같은 설명의 반복이 사라졌다. 월 PR 1.8배의 실제 원인이다.</a:t>
             </a:r>
             <a:endParaRPr lang="en-US" sz="1400" dirty="0"/>
           </a:p>
@@ -8088,7 +9967,7 @@
                 <a:ea typeface="Arial" pitchFamily="34" charset="-122"/>
                 <a:cs typeface="Arial" pitchFamily="34" charset="-120"/>
               </a:rPr>
-              <a:t>6.1</a:t>
+              <a:t>5.4</a:t>
             </a:r>
             <a:endParaRPr lang="en-US" sz="4000" dirty="0"/>
           </a:p>
@@ -8166,7 +10045,7 @@
                 <a:ea typeface="Malgun Gothic" pitchFamily="34" charset="-122"/>
                 <a:cs typeface="Malgun Gothic" pitchFamily="34" charset="-120"/>
               </a:rPr>
-              <a:t>845 PR ÷ 139 작업일</a:t>
+              <a:t>750 PR ÷ 139 작업일</a:t>
             </a:r>
             <a:endParaRPr lang="en-US" sz="1300" dirty="0"/>
           </a:p>
@@ -8183,7 +10062,7 @@
                 <a:ea typeface="Malgun Gothic" pitchFamily="34" charset="-122"/>
                 <a:cs typeface="Malgun Gothic" pitchFamily="34" charset="-120"/>
               </a:rPr>
-              <a:t>하루 6건 병합</a:t>
+              <a:t>하루 5건 병합</a:t>
             </a:r>
             <a:endParaRPr lang="en-US" sz="1300" dirty="0"/>
           </a:p>
@@ -8344,7 +10223,7 @@
                 <a:ea typeface="Malgun Gothic" pitchFamily="34" charset="-122"/>
                 <a:cs typeface="Malgun Gothic" pitchFamily="34" charset="-120"/>
               </a:rPr>
-              <a:t>근거는 10장</a:t>
+              <a:t>근거는 11장</a:t>
             </a:r>
             <a:endParaRPr lang="en-US" sz="1300" dirty="0"/>
           </a:p>
@@ -8430,7 +10309,7 @@
                 <a:ea typeface="Malgun Gothic" pitchFamily="34" charset="-122"/>
                 <a:cs typeface="Malgun Gothic" pitchFamily="34" charset="-120"/>
               </a:rPr>
-              <a:t>커밋의 86%, PR 의 77% 를 AI 가 작성. 사람의 일은 코딩 → 요구사항·리뷰·규칙(하네스) 설계로 이동했다.</a:t>
+              <a:t>커밋의 96%, PR 의 78% 를 AI 가 작성. 사람의 일은 코딩 → 요구사항·리뷰·규칙(하네스) 설계로 이동했다.</a:t>
             </a:r>
             <a:endParaRPr lang="en-US" sz="1500" dirty="0"/>
           </a:p>
@@ -10938,7 +12817,7 @@
                 <a:ea typeface="Malgun Gothic" pitchFamily="34" charset="-122"/>
                 <a:cs typeface="Malgun Gothic" pitchFamily="34" charset="-120"/>
               </a:rPr>
-              <a:t>모델이 아니라 '저장소에 남긴 규칙'이 생산성을 바꿨다. CLAUDE.md 이후 같은 지시를 반복할 필요가 사라졌고, 스킬·게이트 도입(6~7월)과 함께 월 PR 이 110 → 220 건으로 2배가 됐다.</a:t>
+              <a:t>모델이 아니라 '저장소에 남긴 규칙'이 생산성을 바꿨다. CLAUDE.md 이후 같은 지시를 반복할 필요가 사라졌고, 스킬·게이트 도입(6~7월)과 함께 월 PR 이 99 → 183 건으로 1.8배가 됐다.</a:t>
             </a:r>
             <a:endParaRPr lang="en-US" sz="1500" dirty="0"/>
           </a:p>
@@ -11126,7 +13005,7 @@
                 <a:ea typeface="Malgun Gothic" pitchFamily="34" charset="-122"/>
                 <a:cs typeface="Malgun Gothic" pitchFamily="34" charset="-120"/>
               </a:rPr>
-              <a:t>작성 주체 — 커밋의 86% 를 AI 가 작성</a:t>
+              <a:t>작성 주체 — 커밋의 96% 를 AI 가 작성</a:t>
             </a:r>
             <a:endParaRPr lang="en-US" sz="3000" dirty="0"/>
           </a:p>
@@ -11235,7 +13114,7 @@
                 <a:ea typeface="Arial" pitchFamily="34" charset="-122"/>
                 <a:cs typeface="Arial" pitchFamily="34" charset="-120"/>
               </a:rPr>
-              <a:t>906 / 1,056</a:t>
+              <a:t>1,012 / 1,056</a:t>
             </a:r>
             <a:endParaRPr lang="en-US" sz="2600" dirty="0"/>
           </a:p>
@@ -11274,7 +13153,7 @@
                 <a:ea typeface="Malgun Gothic" pitchFamily="34" charset="-122"/>
                 <a:cs typeface="Malgun Gothic" pitchFamily="34" charset="-120"/>
               </a:rPr>
-              <a:t>AI 작성 커밋 (86%)</a:t>
+              <a:t>AI 작성 커밋 (96%)</a:t>
             </a:r>
             <a:endParaRPr lang="en-US" sz="1300" dirty="0"/>
           </a:p>
@@ -11340,7 +13219,7 @@
                 <a:ea typeface="Arial" pitchFamily="34" charset="-122"/>
                 <a:cs typeface="Arial" pitchFamily="34" charset="-120"/>
               </a:rPr>
-              <a:t>653 / 845</a:t>
+              <a:t>586 / 750</a:t>
             </a:r>
             <a:endParaRPr lang="en-US" sz="2600" dirty="0"/>
           </a:p>
@@ -11379,7 +13258,7 @@
                 <a:ea typeface="Malgun Gothic" pitchFamily="34" charset="-122"/>
                 <a:cs typeface="Malgun Gothic" pitchFamily="34" charset="-120"/>
               </a:rPr>
-              <a:t>AI 브랜치 PR (77%)</a:t>
+              <a:t>AI 브랜치 PR (78%)</a:t>
             </a:r>
             <a:endParaRPr lang="en-US" sz="1300" dirty="0"/>
           </a:p>
@@ -11484,7 +13363,7 @@
                 <a:ea typeface="Malgun Gothic" pitchFamily="34" charset="-122"/>
                 <a:cs typeface="Malgun Gothic" pitchFamily="34" charset="-120"/>
               </a:rPr>
-              <a:t>유일하게 사람 커밋 114건 —</a:t>
+              <a:t>로컬 Claude Code CLI 전환</a:t>
             </a:r>
             <a:endParaRPr lang="en-US" sz="1300" dirty="0"/>
           </a:p>
@@ -11501,7 +13380,7 @@
                 <a:ea typeface="Malgun Gothic" pitchFamily="34" charset="-122"/>
                 <a:cs typeface="Malgun Gothic" pitchFamily="34" charset="-120"/>
               </a:rPr>
-              <a:t>구조 개편을 직접 수행</a:t>
+              <a:t>개인 계정 커밋도 91% AI 작성</a:t>
             </a:r>
             <a:endParaRPr lang="en-US" sz="1300" dirty="0"/>
           </a:p>
@@ -11540,7 +13419,7 @@
                 <a:ea typeface="Malgun Gothic" pitchFamily="34" charset="-122"/>
                 <a:cs typeface="Malgun Gothic" pitchFamily="34" charset="-120"/>
               </a:rPr>
-              <a:t>출처: git log --no-merges 작성자 기준 (github-actions 봇 171건 제외)</a:t>
+              <a:t>AI = 작성자 Claude 또는 Co-Authored-By: Claude 트레일러 · github-actions 봇 171건 제외</a:t>
             </a:r>
             <a:endParaRPr lang="en-US" sz="1000" dirty="0"/>
           </a:p>
@@ -11689,7 +13568,7 @@
                 <a:ea typeface="Malgun Gothic" pitchFamily="34" charset="-122"/>
                 <a:cs typeface="Malgun Gothic" pitchFamily="34" charset="-120"/>
               </a:rPr>
-              <a:t>처리량 — 7월 정점 220 PR, 이후 안정화 구간</a:t>
+              <a:t>처리량 — 7월 정점 183 PR, 이후 안정화 구간</a:t>
             </a:r>
             <a:endParaRPr lang="en-US" sz="3000" dirty="0"/>
           </a:p>
@@ -11814,7 +13693,7 @@
                 <a:ea typeface="Malgun Gothic" pitchFamily="34" charset="-122"/>
                 <a:cs typeface="Malgun Gothic" pitchFamily="34" charset="-120"/>
               </a:rPr>
-              <a:t>4.3 → 9.2</a:t>
+              <a:t>4.1 → 7.6</a:t>
             </a:r>
             <a:endParaRPr lang="en-US" sz="2200" dirty="0"/>
           </a:p>
@@ -11831,7 +13710,7 @@
                 <a:ea typeface="Malgun Gothic" pitchFamily="34" charset="-122"/>
                 <a:cs typeface="Malgun Gothic" pitchFamily="34" charset="-120"/>
               </a:rPr>
-              <a:t>2월 대비 7월 작업일당 PR 2.1배. 8월은 신규 기능 대신 버그·품질 정비에 집중한 구간이다.</a:t>
+              <a:t>2월 대비 7월 작업일당 PR 1.9배. 8월은 신규 기능 대신 버그·품질 정비에 집중한 구간이다.</a:t>
             </a:r>
             <a:endParaRPr lang="en-US" sz="2200" dirty="0"/>
           </a:p>
@@ -11870,7 +13749,7 @@
                 <a:ea typeface="Malgun Gothic" pitchFamily="34" charset="-122"/>
                 <a:cs typeface="Malgun Gothic" pitchFamily="34" charset="-120"/>
               </a:rPr>
-              <a:t>출처: git log --merges (월별), 작업일 = 커밋이 1건 이상인 날</a:t>
+              <a:t>출처: 'Merge pull request' 병합만 집계(브랜치 동기화 병합 95건 제외), 작업일 = 커밋 1건 이상인 날</a:t>
             </a:r>
             <a:endParaRPr lang="en-US" sz="1000" dirty="0"/>
           </a:p>
@@ -12701,7 +14580,7 @@
                 <a:ea typeface="Malgun Gothic" pitchFamily="34" charset="-122"/>
                 <a:cs typeface="Malgun Gothic" pitchFamily="34" charset="-120"/>
               </a:rPr>
-              <a:t>QUALITY</a:t>
+              <a:t>MODEL EVOLUTION</a:t>
             </a:r>
             <a:endParaRPr lang="en-US" sz="1300" dirty="0"/>
           </a:p>
@@ -12740,7 +14619,7 @@
                 <a:ea typeface="Malgun Gothic" pitchFamily="34" charset="-122"/>
                 <a:cs typeface="Malgun Gothic" pitchFamily="34" charset="-120"/>
               </a:rPr>
-              <a:t>품질 — 7월 버그 급증을 테스트·게이트로 되잡았다</a:t>
+              <a:t>모델 세대가 바뀔 때마다 기능 구현 규모가 커졌다</a:t>
             </a:r>
             <a:endParaRPr lang="en-US" sz="3000" dirty="0"/>
           </a:p>
@@ -12755,7 +14634,7 @@
         <p:spPr>
           <a:xfrm>
             <a:off x="548640" y="1554480"/>
-            <a:ext cx="5486400" cy="4663440"/>
+            <a:ext cx="6949440" cy="4663440"/>
           </a:xfrm>
           <a:prstGeom prst="roundRect">
             <a:avLst>
@@ -12781,7 +14660,7 @@
         </p:nvGraphicFramePr>
         <p:xfrm>
           <a:off x="731520" y="1691640"/>
-          <a:ext cx="5120640" cy="4434840"/>
+          <a:ext cx="6583680" cy="4434840"/>
         </p:xfrm>
         <a:graphic xmlns:a="http://schemas.openxmlformats.org/drawingml/2006/main">
           <a:graphicData uri="http://schemas.openxmlformats.org/drawingml/2006/chart">
@@ -12797,12 +14676,12 @@
         </p:nvSpPr>
         <p:spPr>
           <a:xfrm>
-            <a:off x="6309360" y="1554480"/>
-            <a:ext cx="5303520" cy="4663440"/>
+            <a:off x="7772400" y="1554480"/>
+            <a:ext cx="3840480" cy="4663440"/>
           </a:xfrm>
           <a:prstGeom prst="roundRect">
             <a:avLst>
-              <a:gd name="adj" fmla="val 1569"/>
+              <a:gd name="adj" fmla="val 1905"/>
             </a:avLst>
           </a:prstGeom>
           <a:solidFill>
@@ -12816,32 +14695,406 @@
           </a:ln>
         </p:spPr>
       </p:sp>
-      <p:graphicFrame>
-        <p:nvGraphicFramePr>
-          <p:cNvPr id="7" name="Chart 1" descr=""/>
-          <p:cNvGraphicFramePr/>
-          <p:nvPr/>
-        </p:nvGraphicFramePr>
-        <p:xfrm>
-          <a:off x="6446520" y="1691640"/>
-          <a:ext cx="5029200" cy="3200400"/>
-        </p:xfrm>
-        <a:graphic xmlns:a="http://schemas.openxmlformats.org/drawingml/2006/main">
-          <a:graphicData uri="http://schemas.openxmlformats.org/drawingml/2006/chart">
-            <c:chart xmlns:c="http://schemas.openxmlformats.org/drawingml/2006/chart" r:id="rId2"/>
-          </a:graphicData>
-        </a:graphic>
-      </p:graphicFrame>
-      <p:sp>
-        <p:nvSpPr>
-          <p:cNvPr id="8" name="Text 4"/>
-          <p:cNvSpPr txBox="1"/>
-          <p:nvPr/>
-        </p:nvSpPr>
-        <p:spPr>
-          <a:xfrm>
-            <a:off x="6583680" y="4937760"/>
-            <a:ext cx="4846320" cy="1188720"/>
+      <p:sp>
+        <p:nvSpPr>
+          <p:cNvPr id="7" name="Text 4"/>
+          <p:cNvSpPr txBox="1"/>
+          <p:nvPr/>
+        </p:nvSpPr>
+        <p:spPr>
+          <a:xfrm>
+            <a:off x="8001000" y="1691640"/>
+            <a:ext cx="3474720" cy="365760"/>
+          </a:xfrm>
+          <a:prstGeom prst="rect">
+            <a:avLst/>
+          </a:prstGeom>
+          <a:noFill/>
+          <a:ln/>
+        </p:spPr>
+        <p:txBody>
+          <a:bodyPr wrap="square" lIns="0" tIns="0" rIns="0" bIns="0" rtlCol="0" anchor="ctr"/>
+          <a:lstStyle/>
+          <a:p>
+            <a:pPr indent="0" marL="0">
+              <a:buNone/>
+            </a:pPr>
+            <a:r>
+              <a:rPr lang="en-US" sz="1500" b="1" dirty="0">
+                <a:solidFill>
+                  <a:srgbClr val="EDEAE3"/>
+                </a:solidFill>
+                <a:latin typeface="Malgun Gothic" pitchFamily="34" charset="0"/>
+                <a:ea typeface="Malgun Gothic" pitchFamily="34" charset="-122"/>
+                <a:cs typeface="Malgun Gothic" pitchFamily="34" charset="-120"/>
+              </a:rPr>
+              <a:t>세대별 주력 모델과 대표 성장</a:t>
+            </a:r>
+            <a:endParaRPr lang="en-US" sz="1500" dirty="0"/>
+          </a:p>
+        </p:txBody>
+      </p:sp>
+      <p:sp>
+        <p:nvSpPr>
+          <p:cNvPr id="8" name="Text 5"/>
+          <p:cNvSpPr txBox="1"/>
+          <p:nvPr/>
+        </p:nvSpPr>
+        <p:spPr>
+          <a:xfrm>
+            <a:off x="8001000" y="2194560"/>
+            <a:ext cx="685800" cy="365760"/>
+          </a:xfrm>
+          <a:prstGeom prst="rect">
+            <a:avLst/>
+          </a:prstGeom>
+          <a:noFill/>
+          <a:ln/>
+        </p:spPr>
+        <p:txBody>
+          <a:bodyPr wrap="square" lIns="0" tIns="0" rIns="0" bIns="0" rtlCol="0" anchor="ctr"/>
+          <a:lstStyle/>
+          <a:p>
+            <a:pPr indent="0" marL="0">
+              <a:buNone/>
+            </a:pPr>
+            <a:r>
+              <a:rPr lang="en-US" sz="1800" b="1" dirty="0">
+                <a:solidFill>
+                  <a:srgbClr val="ADBAEB"/>
+                </a:solidFill>
+                <a:latin typeface="Arial" pitchFamily="34" charset="0"/>
+                <a:ea typeface="Arial" pitchFamily="34" charset="-122"/>
+                <a:cs typeface="Arial" pitchFamily="34" charset="-120"/>
+              </a:rPr>
+              <a:t>4.x</a:t>
+            </a:r>
+            <a:endParaRPr lang="en-US" sz="1800" dirty="0"/>
+          </a:p>
+        </p:txBody>
+      </p:sp>
+      <p:sp>
+        <p:nvSpPr>
+          <p:cNvPr id="9" name="Text 6"/>
+          <p:cNvSpPr txBox="1"/>
+          <p:nvPr/>
+        </p:nvSpPr>
+        <p:spPr>
+          <a:xfrm>
+            <a:off x="8686800" y="2221992"/>
+            <a:ext cx="2834640" cy="365760"/>
+          </a:xfrm>
+          <a:prstGeom prst="rect">
+            <a:avLst/>
+          </a:prstGeom>
+          <a:noFill/>
+          <a:ln/>
+        </p:spPr>
+        <p:txBody>
+          <a:bodyPr wrap="square" lIns="0" tIns="0" rIns="0" bIns="0" rtlCol="0" anchor="ctr"/>
+          <a:lstStyle/>
+          <a:p>
+            <a:pPr indent="0" marL="0">
+              <a:buNone/>
+            </a:pPr>
+            <a:r>
+              <a:rPr lang="en-US" sz="1150" dirty="0">
+                <a:solidFill>
+                  <a:srgbClr val="ABBAB2"/>
+                </a:solidFill>
+                <a:latin typeface="Arial" pitchFamily="34" charset="0"/>
+                <a:ea typeface="Arial" pitchFamily="34" charset="-122"/>
+                <a:cs typeface="Arial" pitchFamily="34" charset="-120"/>
+              </a:rPr>
+              <a:t>Opus 4.7 (1M) · Opus 4.8</a:t>
+            </a:r>
+            <a:endParaRPr lang="en-US" sz="1150" dirty="0"/>
+          </a:p>
+        </p:txBody>
+      </p:sp>
+      <p:sp>
+        <p:nvSpPr>
+          <p:cNvPr id="10" name="Text 7"/>
+          <p:cNvSpPr txBox="1"/>
+          <p:nvPr/>
+        </p:nvSpPr>
+        <p:spPr>
+          <a:xfrm>
+            <a:off x="8001000" y="2606040"/>
+            <a:ext cx="3520440" cy="411480"/>
+          </a:xfrm>
+          <a:prstGeom prst="rect">
+            <a:avLst/>
+          </a:prstGeom>
+          <a:noFill/>
+          <a:ln/>
+        </p:spPr>
+        <p:txBody>
+          <a:bodyPr wrap="square" lIns="0" tIns="0" rIns="0" bIns="0" rtlCol="0" anchor="ctr"/>
+          <a:lstStyle/>
+          <a:p>
+            <a:pPr indent="0" marL="0">
+              <a:buNone/>
+            </a:pPr>
+            <a:r>
+              <a:rPr lang="en-US" sz="1400" b="1" dirty="0">
+                <a:solidFill>
+                  <a:srgbClr val="EDEAE3"/>
+                </a:solidFill>
+                <a:latin typeface="Malgun Gothic" pitchFamily="34" charset="0"/>
+                <a:ea typeface="Malgun Gothic" pitchFamily="34" charset="-122"/>
+                <a:cs typeface="Malgun Gothic" pitchFamily="34" charset="-120"/>
+              </a:rPr>
+              <a:t>월 기능 PR 35 → 72건 (2.0배)</a:t>
+            </a:r>
+            <a:endParaRPr lang="en-US" sz="1400" dirty="0"/>
+          </a:p>
+        </p:txBody>
+      </p:sp>
+      <p:sp>
+        <p:nvSpPr>
+          <p:cNvPr id="11" name="Text 8"/>
+          <p:cNvSpPr txBox="1"/>
+          <p:nvPr/>
+        </p:nvSpPr>
+        <p:spPr>
+          <a:xfrm>
+            <a:off x="8001000" y="3218688"/>
+            <a:ext cx="685800" cy="365760"/>
+          </a:xfrm>
+          <a:prstGeom prst="rect">
+            <a:avLst/>
+          </a:prstGeom>
+          <a:noFill/>
+          <a:ln/>
+        </p:spPr>
+        <p:txBody>
+          <a:bodyPr wrap="square" lIns="0" tIns="0" rIns="0" bIns="0" rtlCol="0" anchor="ctr"/>
+          <a:lstStyle/>
+          <a:p>
+            <a:pPr indent="0" marL="0">
+              <a:buNone/>
+            </a:pPr>
+            <a:r>
+              <a:rPr lang="en-US" sz="1800" b="1" dirty="0">
+                <a:solidFill>
+                  <a:srgbClr val="ADBAEB"/>
+                </a:solidFill>
+                <a:latin typeface="Arial" pitchFamily="34" charset="0"/>
+                <a:ea typeface="Arial" pitchFamily="34" charset="-122"/>
+                <a:cs typeface="Arial" pitchFamily="34" charset="-120"/>
+              </a:rPr>
+              <a:t>5</a:t>
+            </a:r>
+            <a:endParaRPr lang="en-US" sz="1800" dirty="0"/>
+          </a:p>
+        </p:txBody>
+      </p:sp>
+      <p:sp>
+        <p:nvSpPr>
+          <p:cNvPr id="12" name="Text 9"/>
+          <p:cNvSpPr txBox="1"/>
+          <p:nvPr/>
+        </p:nvSpPr>
+        <p:spPr>
+          <a:xfrm>
+            <a:off x="8686800" y="3246120"/>
+            <a:ext cx="2834640" cy="365760"/>
+          </a:xfrm>
+          <a:prstGeom prst="rect">
+            <a:avLst/>
+          </a:prstGeom>
+          <a:noFill/>
+          <a:ln/>
+        </p:spPr>
+        <p:txBody>
+          <a:bodyPr wrap="square" lIns="0" tIns="0" rIns="0" bIns="0" rtlCol="0" anchor="ctr"/>
+          <a:lstStyle/>
+          <a:p>
+            <a:pPr indent="0" marL="0">
+              <a:buNone/>
+            </a:pPr>
+            <a:r>
+              <a:rPr lang="en-US" sz="1150" dirty="0">
+                <a:solidFill>
+                  <a:srgbClr val="ABBAB2"/>
+                </a:solidFill>
+                <a:latin typeface="Arial" pitchFamily="34" charset="0"/>
+                <a:ea typeface="Arial" pitchFamily="34" charset="-122"/>
+                <a:cs typeface="Arial" pitchFamily="34" charset="-120"/>
+              </a:rPr>
+              <a:t>Sonnet 5 · Opus 5 · Fable 5</a:t>
+            </a:r>
+            <a:endParaRPr lang="en-US" sz="1150" dirty="0"/>
+          </a:p>
+        </p:txBody>
+      </p:sp>
+      <p:sp>
+        <p:nvSpPr>
+          <p:cNvPr id="13" name="Text 10"/>
+          <p:cNvSpPr txBox="1"/>
+          <p:nvPr/>
+        </p:nvSpPr>
+        <p:spPr>
+          <a:xfrm>
+            <a:off x="8001000" y="3630168"/>
+            <a:ext cx="3520440" cy="411480"/>
+          </a:xfrm>
+          <a:prstGeom prst="rect">
+            <a:avLst/>
+          </a:prstGeom>
+          <a:noFill/>
+          <a:ln/>
+        </p:spPr>
+        <p:txBody>
+          <a:bodyPr wrap="square" lIns="0" tIns="0" rIns="0" bIns="0" rtlCol="0" anchor="ctr"/>
+          <a:lstStyle/>
+          <a:p>
+            <a:pPr indent="0" marL="0">
+              <a:buNone/>
+            </a:pPr>
+            <a:r>
+              <a:rPr lang="en-US" sz="1400" b="1" dirty="0">
+                <a:solidFill>
+                  <a:srgbClr val="EDEAE3"/>
+                </a:solidFill>
+                <a:latin typeface="Malgun Gothic" pitchFamily="34" charset="0"/>
+                <a:ea typeface="Malgun Gothic" pitchFamily="34" charset="-122"/>
+                <a:cs typeface="Malgun Gothic" pitchFamily="34" charset="-120"/>
+              </a:rPr>
+              <a:t>월 코드 +20K → +36K줄 (1.8배)</a:t>
+            </a:r>
+            <a:endParaRPr lang="en-US" sz="1400" dirty="0"/>
+          </a:p>
+        </p:txBody>
+      </p:sp>
+      <p:sp>
+        <p:nvSpPr>
+          <p:cNvPr id="14" name="Text 11"/>
+          <p:cNvSpPr txBox="1"/>
+          <p:nvPr/>
+        </p:nvSpPr>
+        <p:spPr>
+          <a:xfrm>
+            <a:off x="8001000" y="4242816"/>
+            <a:ext cx="685800" cy="365760"/>
+          </a:xfrm>
+          <a:prstGeom prst="rect">
+            <a:avLst/>
+          </a:prstGeom>
+          <a:noFill/>
+          <a:ln/>
+        </p:spPr>
+        <p:txBody>
+          <a:bodyPr wrap="square" lIns="0" tIns="0" rIns="0" bIns="0" rtlCol="0" anchor="ctr"/>
+          <a:lstStyle/>
+          <a:p>
+            <a:pPr indent="0" marL="0">
+              <a:buNone/>
+            </a:pPr>
+            <a:r>
+              <a:rPr lang="en-US" sz="1800" b="1" dirty="0">
+                <a:solidFill>
+                  <a:srgbClr val="ADBAEB"/>
+                </a:solidFill>
+                <a:latin typeface="Arial" pitchFamily="34" charset="0"/>
+                <a:ea typeface="Arial" pitchFamily="34" charset="-122"/>
+                <a:cs typeface="Arial" pitchFamily="34" charset="-120"/>
+              </a:rPr>
+              <a:t>5.x</a:t>
+            </a:r>
+            <a:endParaRPr lang="en-US" sz="1800" dirty="0"/>
+          </a:p>
+        </p:txBody>
+      </p:sp>
+      <p:sp>
+        <p:nvSpPr>
+          <p:cNvPr id="15" name="Text 12"/>
+          <p:cNvSpPr txBox="1"/>
+          <p:nvPr/>
+        </p:nvSpPr>
+        <p:spPr>
+          <a:xfrm>
+            <a:off x="8686800" y="4270248"/>
+            <a:ext cx="2834640" cy="365760"/>
+          </a:xfrm>
+          <a:prstGeom prst="rect">
+            <a:avLst/>
+          </a:prstGeom>
+          <a:noFill/>
+          <a:ln/>
+        </p:spPr>
+        <p:txBody>
+          <a:bodyPr wrap="square" lIns="0" tIns="0" rIns="0" bIns="0" rtlCol="0" anchor="ctr"/>
+          <a:lstStyle/>
+          <a:p>
+            <a:pPr indent="0" marL="0">
+              <a:buNone/>
+            </a:pPr>
+            <a:r>
+              <a:rPr lang="en-US" sz="1150" dirty="0">
+                <a:solidFill>
+                  <a:srgbClr val="ABBAB2"/>
+                </a:solidFill>
+                <a:latin typeface="Arial" pitchFamily="34" charset="0"/>
+                <a:ea typeface="Arial" pitchFamily="34" charset="-122"/>
+                <a:cs typeface="Arial" pitchFamily="34" charset="-120"/>
+              </a:rPr>
+              <a:t>Opus 5.5 · Fable 5.1 · Sonnet 5.5</a:t>
+            </a:r>
+            <a:endParaRPr lang="en-US" sz="1150" dirty="0"/>
+          </a:p>
+        </p:txBody>
+      </p:sp>
+      <p:sp>
+        <p:nvSpPr>
+          <p:cNvPr id="16" name="Text 13"/>
+          <p:cNvSpPr txBox="1"/>
+          <p:nvPr/>
+        </p:nvSpPr>
+        <p:spPr>
+          <a:xfrm>
+            <a:off x="8001000" y="4654296"/>
+            <a:ext cx="3520440" cy="411480"/>
+          </a:xfrm>
+          <a:prstGeom prst="rect">
+            <a:avLst/>
+          </a:prstGeom>
+          <a:noFill/>
+          <a:ln/>
+        </p:spPr>
+        <p:txBody>
+          <a:bodyPr wrap="square" lIns="0" tIns="0" rIns="0" bIns="0" rtlCol="0" anchor="ctr"/>
+          <a:lstStyle/>
+          <a:p>
+            <a:pPr indent="0" marL="0">
+              <a:buNone/>
+            </a:pPr>
+            <a:r>
+              <a:rPr lang="en-US" sz="1400" b="1" dirty="0">
+                <a:solidFill>
+                  <a:srgbClr val="EDEAE3"/>
+                </a:solidFill>
+                <a:latin typeface="Malgun Gothic" pitchFamily="34" charset="0"/>
+                <a:ea typeface="Malgun Gothic" pitchFamily="34" charset="-122"/>
+                <a:cs typeface="Malgun Gothic" pitchFamily="34" charset="-120"/>
+              </a:rPr>
+              <a:t>PR당 변경 파일 5 → 10개 (2.0배)</a:t>
+            </a:r>
+            <a:endParaRPr lang="en-US" sz="1400" dirty="0"/>
+          </a:p>
+        </p:txBody>
+      </p:sp>
+      <p:sp>
+        <p:nvSpPr>
+          <p:cNvPr id="17" name="Text 14"/>
+          <p:cNvSpPr txBox="1"/>
+          <p:nvPr/>
+        </p:nvSpPr>
+        <p:spPr>
+          <a:xfrm>
+            <a:off x="8001000" y="5257800"/>
+            <a:ext cx="3520440" cy="822960"/>
           </a:xfrm>
           <a:prstGeom prst="rect">
             <a:avLst/>
@@ -12857,24 +15110,7 @@
               <a:buNone/>
             </a:pPr>
             <a:r>
-              <a:rPr lang="en-US" sz="1600" b="1" dirty="0">
-                <a:solidFill>
-                  <a:srgbClr val="ADBAEB"/>
-                </a:solidFill>
-                <a:latin typeface="Malgun Gothic" pitchFamily="34" charset="0"/>
-                <a:ea typeface="Malgun Gothic" pitchFamily="34" charset="-122"/>
-                <a:cs typeface="Malgun Gothic" pitchFamily="34" charset="-120"/>
-              </a:rPr>
-              <a:t>7월 fix 비율 50%</a:t>
-            </a:r>
-            <a:endParaRPr lang="en-US" sz="1600" dirty="0"/>
-          </a:p>
-          <a:p>
-            <a:pPr indent="0" marL="0">
-              <a:buNone/>
-            </a:pPr>
-            <a:r>
-              <a:rPr lang="en-US" sz="1300" dirty="0">
+              <a:rPr lang="en-US" sz="1200" dirty="0">
                 <a:solidFill>
                   <a:srgbClr val="ABBAB2"/>
                 </a:solidFill>
@@ -12882,15 +15118,15 @@
                 <a:ea typeface="Malgun Gothic" pitchFamily="34" charset="-122"/>
                 <a:cs typeface="Malgun Gothic" pitchFamily="34" charset="-120"/>
               </a:rPr>
-              <a:t>→ 테스트 10배·docs-sync CI·자동 릴리스 도입 → 9월 40% 로 회복, 릴리스 82회 중 revert·hotfix 4건</a:t>
-            </a:r>
-            <a:endParaRPr lang="en-US" sz="1600" dirty="0"/>
-          </a:p>
-        </p:txBody>
-      </p:sp>
-      <p:sp>
-        <p:nvSpPr>
-          <p:cNvPr id="9" name="Text 5"/>
+              <a:t>8~9월 기능 PR 감소는 성능 저하가 아니라 안정화 집중(테스트 540 → 1,097)의 결과다.</a:t>
+            </a:r>
+            <a:endParaRPr lang="en-US" sz="1200" dirty="0"/>
+          </a:p>
+        </p:txBody>
+      </p:sp>
+      <p:sp>
+        <p:nvSpPr>
+          <p:cNvPr id="18" name="Text 15"/>
           <p:cNvSpPr txBox="1"/>
           <p:nvPr/>
         </p:nvSpPr>
@@ -12921,7 +15157,7 @@
                 <a:ea typeface="Malgun Gothic" pitchFamily="34" charset="-122"/>
                 <a:cs typeface="Malgun Gothic" pitchFamily="34" charset="-120"/>
               </a:rPr>
-              <a:t>출처: backend/tests 의 def test_ 집계, Conventional Commits prefix 집계</a:t>
+              <a:t>기준: main 병합 PR 745건 중 모델 표기(Co-Authored-By) PR 295건 + 초기 173건 · 세대 구간은 일부 겹침 · 파일 = 중앙값</a:t>
             </a:r>
             <a:endParaRPr lang="en-US" sz="1000" dirty="0"/>
           </a:p>
@@ -12929,7 +15165,7 @@
       </p:sp>
       <p:sp>
         <p:nvSpPr>
-          <p:cNvPr id="10" name="Text 6"/>
+          <p:cNvPr id="19" name="Text 16"/>
           <p:cNvSpPr txBox="1"/>
           <p:nvPr/>
         </p:nvSpPr>
@@ -13031,7 +15267,7 @@
                 <a:ea typeface="Malgun Gothic" pitchFamily="34" charset="-122"/>
                 <a:cs typeface="Malgun Gothic" pitchFamily="34" charset="-120"/>
               </a:rPr>
-              <a:t>MATURITY</a:t>
+              <a:t>QUALITY</a:t>
             </a:r>
             <a:endParaRPr lang="en-US" sz="1300" dirty="0"/>
           </a:p>
@@ -13070,7 +15306,7 @@
                 <a:ea typeface="Malgun Gothic" pitchFamily="34" charset="-122"/>
                 <a:cs typeface="Malgun Gothic" pitchFamily="34" charset="-120"/>
               </a:rPr>
-              <a:t>AI 활용 성숙도 — 4단계로 진화</a:t>
+              <a:t>품질 — 7월 버그 급증을 테스트·게이트로 되잡았다</a:t>
             </a:r>
             <a:endParaRPr lang="en-US" sz="3000" dirty="0"/>
           </a:p>
@@ -13084,12 +15320,12 @@
         </p:nvSpPr>
         <p:spPr>
           <a:xfrm>
-            <a:off x="548640" y="1645920"/>
-            <a:ext cx="2560320" cy="3931920"/>
+            <a:off x="548640" y="1554480"/>
+            <a:ext cx="5486400" cy="4663440"/>
           </a:xfrm>
           <a:prstGeom prst="roundRect">
             <a:avLst>
-              <a:gd name="adj" fmla="val 2857"/>
+              <a:gd name="adj" fmla="val 1569"/>
             </a:avLst>
           </a:prstGeom>
           <a:solidFill>
@@ -13103,282 +15339,36 @@
           </a:ln>
         </p:spPr>
       </p:sp>
-      <p:sp>
-        <p:nvSpPr>
-          <p:cNvPr id="5" name="Shape 3"/>
+      <p:graphicFrame>
+        <p:nvGraphicFramePr>
+          <p:cNvPr id="5" name="Chart 0" descr=""/>
+          <p:cNvGraphicFramePr/>
+          <p:nvPr/>
+        </p:nvGraphicFramePr>
+        <p:xfrm>
+          <a:off x="731520" y="1691640"/>
+          <a:ext cx="5120640" cy="4434840"/>
+        </p:xfrm>
+        <a:graphic xmlns:a="http://schemas.openxmlformats.org/drawingml/2006/main">
+          <a:graphicData uri="http://schemas.openxmlformats.org/drawingml/2006/chart">
+            <c:chart xmlns:c="http://schemas.openxmlformats.org/drawingml/2006/chart" r:id="rId1"/>
+          </a:graphicData>
+        </a:graphic>
+      </p:graphicFrame>
+      <p:sp>
+        <p:nvSpPr>
+          <p:cNvPr id="6" name="Shape 3"/>
           <p:cNvSpPr/>
           <p:nvPr/>
         </p:nvSpPr>
         <p:spPr>
           <a:xfrm>
-            <a:off x="822960" y="1874520"/>
-            <a:ext cx="640080" cy="640080"/>
-          </a:xfrm>
-          <a:prstGeom prst="ellipse">
-            <a:avLst/>
-          </a:prstGeom>
-          <a:solidFill>
-            <a:srgbClr val="2A3C35"/>
-          </a:solidFill>
-          <a:ln w="12700">
-            <a:solidFill>
-              <a:srgbClr val="364A41"/>
-            </a:solidFill>
-            <a:prstDash val="solid"/>
-          </a:ln>
-        </p:spPr>
-      </p:sp>
-      <p:sp>
-        <p:nvSpPr>
-          <p:cNvPr id="6" name="Text 4"/>
-          <p:cNvSpPr txBox="1"/>
-          <p:nvPr/>
-        </p:nvSpPr>
-        <p:spPr>
-          <a:xfrm>
-            <a:off x="822960" y="1874520"/>
-            <a:ext cx="640080" cy="640080"/>
-          </a:xfrm>
-          <a:prstGeom prst="rect">
-            <a:avLst/>
-          </a:prstGeom>
-          <a:noFill/>
-          <a:ln/>
-        </p:spPr>
-        <p:txBody>
-          <a:bodyPr wrap="square" lIns="0" tIns="0" rIns="0" bIns="0" rtlCol="0" anchor="ctr"/>
-          <a:lstStyle/>
-          <a:p>
-            <a:pPr algn="ctr" indent="0" marL="0">
-              <a:buNone/>
-            </a:pPr>
-            <a:r>
-              <a:rPr lang="en-US" sz="2200" b="1" dirty="0">
-                <a:solidFill>
-                  <a:srgbClr val="EDEAE3"/>
-                </a:solidFill>
-                <a:latin typeface="Arial" pitchFamily="34" charset="0"/>
-                <a:ea typeface="Arial" pitchFamily="34" charset="-122"/>
-                <a:cs typeface="Arial" pitchFamily="34" charset="-120"/>
-              </a:rPr>
-              <a:t>1</a:t>
-            </a:r>
-            <a:endParaRPr lang="en-US" sz="2200" dirty="0"/>
-          </a:p>
-        </p:txBody>
-      </p:sp>
-      <p:sp>
-        <p:nvSpPr>
-          <p:cNvPr id="7" name="Text 5"/>
-          <p:cNvSpPr txBox="1"/>
-          <p:nvPr/>
-        </p:nvSpPr>
-        <p:spPr>
-          <a:xfrm>
-            <a:off x="822960" y="2743200"/>
-            <a:ext cx="2148840" cy="457200"/>
-          </a:xfrm>
-          <a:prstGeom prst="rect">
-            <a:avLst/>
-          </a:prstGeom>
-          <a:noFill/>
-          <a:ln/>
-        </p:spPr>
-        <p:txBody>
-          <a:bodyPr wrap="square" lIns="0" tIns="0" rIns="0" bIns="0" rtlCol="0" anchor="ctr"/>
-          <a:lstStyle/>
-          <a:p>
-            <a:pPr indent="0" marL="0">
-              <a:buNone/>
-            </a:pPr>
-            <a:r>
-              <a:rPr lang="en-US" sz="1800" b="1" dirty="0">
-                <a:solidFill>
-                  <a:srgbClr val="EDEAE3"/>
-                </a:solidFill>
-                <a:latin typeface="Malgun Gothic" pitchFamily="34" charset="0"/>
-                <a:ea typeface="Malgun Gothic" pitchFamily="34" charset="-122"/>
-                <a:cs typeface="Malgun Gothic" pitchFamily="34" charset="-120"/>
-              </a:rPr>
-              <a:t>프롬프트 코딩</a:t>
-            </a:r>
-            <a:endParaRPr lang="en-US" sz="1800" dirty="0"/>
-          </a:p>
-        </p:txBody>
-      </p:sp>
-      <p:sp>
-        <p:nvSpPr>
-          <p:cNvPr id="8" name="Text 6"/>
-          <p:cNvSpPr txBox="1"/>
-          <p:nvPr/>
-        </p:nvSpPr>
-        <p:spPr>
-          <a:xfrm>
-            <a:off x="822960" y="3200400"/>
-            <a:ext cx="2148840" cy="320040"/>
-          </a:xfrm>
-          <a:prstGeom prst="rect">
-            <a:avLst/>
-          </a:prstGeom>
-          <a:noFill/>
-          <a:ln/>
-        </p:spPr>
-        <p:txBody>
-          <a:bodyPr wrap="square" lIns="0" tIns="0" rIns="0" bIns="0" rtlCol="0" anchor="ctr"/>
-          <a:lstStyle/>
-          <a:p>
-            <a:pPr indent="0" marL="0">
-              <a:buNone/>
-            </a:pPr>
-            <a:r>
-              <a:rPr lang="en-US" sz="1300" dirty="0">
-                <a:solidFill>
-                  <a:srgbClr val="ABBAB2"/>
-                </a:solidFill>
-                <a:latin typeface="Malgun Gothic" pitchFamily="34" charset="0"/>
-                <a:ea typeface="Malgun Gothic" pitchFamily="34" charset="-122"/>
-                <a:cs typeface="Malgun Gothic" pitchFamily="34" charset="-120"/>
-              </a:rPr>
-              <a:t>2~3월</a:t>
-            </a:r>
-            <a:endParaRPr lang="en-US" sz="1300" dirty="0"/>
-          </a:p>
-        </p:txBody>
-      </p:sp>
-      <p:sp>
-        <p:nvSpPr>
-          <p:cNvPr id="9" name="Text 7"/>
-          <p:cNvSpPr txBox="1"/>
-          <p:nvPr/>
-        </p:nvSpPr>
-        <p:spPr>
-          <a:xfrm>
-            <a:off x="822960" y="3657600"/>
-            <a:ext cx="2194560" cy="1097280"/>
-          </a:xfrm>
-          <a:prstGeom prst="rect">
-            <a:avLst/>
-          </a:prstGeom>
-          <a:noFill/>
-          <a:ln/>
-        </p:spPr>
-        <p:txBody>
-          <a:bodyPr wrap="square" lIns="0" tIns="0" rIns="0" bIns="0" rtlCol="0" anchor="t"/>
-          <a:lstStyle/>
-          <a:p>
-            <a:pPr indent="0" marL="0">
-              <a:buNone/>
-            </a:pPr>
-            <a:r>
-              <a:rPr lang="en-US" sz="1300" dirty="0">
-                <a:solidFill>
-                  <a:srgbClr val="ABBAB2"/>
-                </a:solidFill>
-                <a:latin typeface="Malgun Gothic" pitchFamily="34" charset="0"/>
-                <a:ea typeface="Malgun Gothic" pitchFamily="34" charset="-122"/>
-                <a:cs typeface="Malgun Gothic" pitchFamily="34" charset="-120"/>
-              </a:rPr>
-              <a:t>대화로 기능 단위 구현</a:t>
-            </a:r>
-            <a:endParaRPr lang="en-US" sz="1300" dirty="0"/>
-          </a:p>
-          <a:p>
-            <a:pPr indent="0" marL="0">
-              <a:buNone/>
-            </a:pPr>
-            <a:r>
-              <a:rPr lang="en-US" sz="1300" dirty="0">
-                <a:solidFill>
-                  <a:srgbClr val="ABBAB2"/>
-                </a:solidFill>
-                <a:latin typeface="Malgun Gothic" pitchFamily="34" charset="0"/>
-                <a:ea typeface="Malgun Gothic" pitchFamily="34" charset="-122"/>
-                <a:cs typeface="Malgun Gothic" pitchFamily="34" charset="-120"/>
-              </a:rPr>
-              <a:t>CLAUDE.md 첫 도입</a:t>
-            </a:r>
-            <a:endParaRPr lang="en-US" sz="1300" dirty="0"/>
-          </a:p>
-        </p:txBody>
-      </p:sp>
-      <p:sp>
-        <p:nvSpPr>
-          <p:cNvPr id="10" name="Text 8"/>
-          <p:cNvSpPr txBox="1"/>
-          <p:nvPr/>
-        </p:nvSpPr>
-        <p:spPr>
-          <a:xfrm>
-            <a:off x="822960" y="4800600"/>
-            <a:ext cx="2148840" cy="548640"/>
-          </a:xfrm>
-          <a:prstGeom prst="rect">
-            <a:avLst/>
-          </a:prstGeom>
-          <a:noFill/>
-          <a:ln/>
-        </p:spPr>
-        <p:txBody>
-          <a:bodyPr wrap="square" lIns="0" tIns="0" rIns="0" bIns="0" rtlCol="0" anchor="ctr"/>
-          <a:lstStyle/>
-          <a:p>
-            <a:pPr indent="0" marL="0">
-              <a:buNone/>
-            </a:pPr>
-            <a:r>
-              <a:rPr lang="en-US" sz="1700" b="1" dirty="0">
-                <a:solidFill>
-                  <a:srgbClr val="EDEAE3"/>
-                </a:solidFill>
-                <a:latin typeface="Malgun Gothic" pitchFamily="34" charset="0"/>
-                <a:ea typeface="Malgun Gothic" pitchFamily="34" charset="-122"/>
-                <a:cs typeface="Malgun Gothic" pitchFamily="34" charset="-120"/>
-              </a:rPr>
-              <a:t>PR 55건/월</a:t>
-            </a:r>
-            <a:endParaRPr lang="en-US" sz="1700" dirty="0"/>
-          </a:p>
-        </p:txBody>
-      </p:sp>
-      <p:sp>
-        <p:nvSpPr>
-          <p:cNvPr id="11" name="Shape 9"/>
-          <p:cNvSpPr/>
-          <p:nvPr/>
-        </p:nvSpPr>
-        <p:spPr>
-          <a:xfrm>
-            <a:off x="3136392" y="3703320"/>
-            <a:ext cx="219456" cy="274320"/>
-          </a:xfrm>
-          <a:prstGeom prst="rightArrow">
-            <a:avLst/>
-          </a:prstGeom>
-          <a:solidFill>
-            <a:srgbClr val="94A2DB"/>
-          </a:solidFill>
-          <a:ln w="12700">
-            <a:solidFill>
-              <a:srgbClr val="94A2DB"/>
-            </a:solidFill>
-            <a:prstDash val="solid"/>
-          </a:ln>
-        </p:spPr>
-      </p:sp>
-      <p:sp>
-        <p:nvSpPr>
-          <p:cNvPr id="12" name="Shape 10"/>
-          <p:cNvSpPr/>
-          <p:nvPr/>
-        </p:nvSpPr>
-        <p:spPr>
-          <a:xfrm>
-            <a:off x="3383280" y="1645920"/>
-            <a:ext cx="2560320" cy="3931920"/>
+            <a:off x="6309360" y="1554480"/>
+            <a:ext cx="5303520" cy="4663440"/>
           </a:xfrm>
           <a:prstGeom prst="roundRect">
             <a:avLst>
-              <a:gd name="adj" fmla="val 2857"/>
+              <a:gd name="adj" fmla="val 1569"/>
             </a:avLst>
           </a:prstGeom>
           <a:solidFill>
@@ -13392,129 +15382,59 @@
           </a:ln>
         </p:spPr>
       </p:sp>
-      <p:sp>
-        <p:nvSpPr>
-          <p:cNvPr id="13" name="Shape 11"/>
-          <p:cNvSpPr/>
-          <p:nvPr/>
-        </p:nvSpPr>
-        <p:spPr>
-          <a:xfrm>
-            <a:off x="3657600" y="1874520"/>
-            <a:ext cx="640080" cy="640080"/>
-          </a:xfrm>
-          <a:prstGeom prst="ellipse">
-            <a:avLst/>
-          </a:prstGeom>
-          <a:solidFill>
-            <a:srgbClr val="2A3C35"/>
-          </a:solidFill>
-          <a:ln w="12700">
-            <a:solidFill>
-              <a:srgbClr val="364A41"/>
-            </a:solidFill>
-            <a:prstDash val="solid"/>
-          </a:ln>
-        </p:spPr>
-      </p:sp>
-      <p:sp>
-        <p:nvSpPr>
-          <p:cNvPr id="14" name="Text 12"/>
-          <p:cNvSpPr txBox="1"/>
-          <p:nvPr/>
-        </p:nvSpPr>
-        <p:spPr>
-          <a:xfrm>
-            <a:off x="3657600" y="1874520"/>
-            <a:ext cx="640080" cy="640080"/>
-          </a:xfrm>
-          <a:prstGeom prst="rect">
-            <a:avLst/>
-          </a:prstGeom>
-          <a:noFill/>
-          <a:ln/>
-        </p:spPr>
-        <p:txBody>
-          <a:bodyPr wrap="square" lIns="0" tIns="0" rIns="0" bIns="0" rtlCol="0" anchor="ctr"/>
-          <a:lstStyle/>
-          <a:p>
-            <a:pPr algn="ctr" indent="0" marL="0">
-              <a:buNone/>
-            </a:pPr>
-            <a:r>
-              <a:rPr lang="en-US" sz="2200" b="1" dirty="0">
-                <a:solidFill>
-                  <a:srgbClr val="EDEAE3"/>
-                </a:solidFill>
-                <a:latin typeface="Arial" pitchFamily="34" charset="0"/>
-                <a:ea typeface="Arial" pitchFamily="34" charset="-122"/>
-                <a:cs typeface="Arial" pitchFamily="34" charset="-120"/>
-              </a:rPr>
-              <a:t>2</a:t>
-            </a:r>
-            <a:endParaRPr lang="en-US" sz="2200" dirty="0"/>
-          </a:p>
-        </p:txBody>
-      </p:sp>
-      <p:sp>
-        <p:nvSpPr>
-          <p:cNvPr id="15" name="Text 13"/>
-          <p:cNvSpPr txBox="1"/>
-          <p:nvPr/>
-        </p:nvSpPr>
-        <p:spPr>
-          <a:xfrm>
-            <a:off x="3657600" y="2743200"/>
-            <a:ext cx="2148840" cy="457200"/>
-          </a:xfrm>
-          <a:prstGeom prst="rect">
-            <a:avLst/>
-          </a:prstGeom>
-          <a:noFill/>
-          <a:ln/>
-        </p:spPr>
-        <p:txBody>
-          <a:bodyPr wrap="square" lIns="0" tIns="0" rIns="0" bIns="0" rtlCol="0" anchor="ctr"/>
-          <a:lstStyle/>
-          <a:p>
-            <a:pPr indent="0" marL="0">
-              <a:buNone/>
-            </a:pPr>
-            <a:r>
-              <a:rPr lang="en-US" sz="1800" b="1" dirty="0">
-                <a:solidFill>
-                  <a:srgbClr val="EDEAE3"/>
-                </a:solidFill>
-                <a:latin typeface="Malgun Gothic" pitchFamily="34" charset="0"/>
-                <a:ea typeface="Malgun Gothic" pitchFamily="34" charset="-122"/>
-                <a:cs typeface="Malgun Gothic" pitchFamily="34" charset="-120"/>
-              </a:rPr>
-              <a:t>컨텍스트 문서화</a:t>
-            </a:r>
-            <a:endParaRPr lang="en-US" sz="1800" dirty="0"/>
-          </a:p>
-        </p:txBody>
-      </p:sp>
-      <p:sp>
-        <p:nvSpPr>
-          <p:cNvPr id="16" name="Text 14"/>
-          <p:cNvSpPr txBox="1"/>
-          <p:nvPr/>
-        </p:nvSpPr>
-        <p:spPr>
-          <a:xfrm>
-            <a:off x="3657600" y="3200400"/>
-            <a:ext cx="2148840" cy="320040"/>
-          </a:xfrm>
-          <a:prstGeom prst="rect">
-            <a:avLst/>
-          </a:prstGeom>
-          <a:noFill/>
-          <a:ln/>
-        </p:spPr>
-        <p:txBody>
-          <a:bodyPr wrap="square" lIns="0" tIns="0" rIns="0" bIns="0" rtlCol="0" anchor="ctr"/>
-          <a:lstStyle/>
+      <p:graphicFrame>
+        <p:nvGraphicFramePr>
+          <p:cNvPr id="7" name="Chart 1" descr=""/>
+          <p:cNvGraphicFramePr/>
+          <p:nvPr/>
+        </p:nvGraphicFramePr>
+        <p:xfrm>
+          <a:off x="6446520" y="1691640"/>
+          <a:ext cx="5029200" cy="3200400"/>
+        </p:xfrm>
+        <a:graphic xmlns:a="http://schemas.openxmlformats.org/drawingml/2006/main">
+          <a:graphicData uri="http://schemas.openxmlformats.org/drawingml/2006/chart">
+            <c:chart xmlns:c="http://schemas.openxmlformats.org/drawingml/2006/chart" r:id="rId2"/>
+          </a:graphicData>
+        </a:graphic>
+      </p:graphicFrame>
+      <p:sp>
+        <p:nvSpPr>
+          <p:cNvPr id="8" name="Text 4"/>
+          <p:cNvSpPr txBox="1"/>
+          <p:nvPr/>
+        </p:nvSpPr>
+        <p:spPr>
+          <a:xfrm>
+            <a:off x="6583680" y="4937760"/>
+            <a:ext cx="4846320" cy="1188720"/>
+          </a:xfrm>
+          <a:prstGeom prst="rect">
+            <a:avLst/>
+          </a:prstGeom>
+          <a:noFill/>
+          <a:ln/>
+        </p:spPr>
+        <p:txBody>
+          <a:bodyPr wrap="square" lIns="0" tIns="0" rIns="0" bIns="0" rtlCol="0" anchor="t"/>
+          <a:lstStyle/>
+          <a:p>
+            <a:pPr indent="0" marL="0">
+              <a:buNone/>
+            </a:pPr>
+            <a:r>
+              <a:rPr lang="en-US" sz="1600" b="1" dirty="0">
+                <a:solidFill>
+                  <a:srgbClr val="ADBAEB"/>
+                </a:solidFill>
+                <a:latin typeface="Malgun Gothic" pitchFamily="34" charset="0"/>
+                <a:ea typeface="Malgun Gothic" pitchFamily="34" charset="-122"/>
+                <a:cs typeface="Malgun Gothic" pitchFamily="34" charset="-120"/>
+              </a:rPr>
+              <a:t>7월 fix 비율 50%</a:t>
+            </a:r>
+            <a:endParaRPr lang="en-US" sz="1600" dirty="0"/>
+          </a:p>
           <a:p>
             <a:pPr indent="0" marL="0">
               <a:buNone/>
@@ -13528,688 +15448,15 @@
                 <a:ea typeface="Malgun Gothic" pitchFamily="34" charset="-122"/>
                 <a:cs typeface="Malgun Gothic" pitchFamily="34" charset="-120"/>
               </a:rPr>
-              <a:t>4~5월</a:t>
-            </a:r>
-            <a:endParaRPr lang="en-US" sz="1300" dirty="0"/>
-          </a:p>
-        </p:txBody>
-      </p:sp>
-      <p:sp>
-        <p:nvSpPr>
-          <p:cNvPr id="17" name="Text 15"/>
-          <p:cNvSpPr txBox="1"/>
-          <p:nvPr/>
-        </p:nvSpPr>
-        <p:spPr>
-          <a:xfrm>
-            <a:off x="3657600" y="3657600"/>
-            <a:ext cx="2194560" cy="1097280"/>
-          </a:xfrm>
-          <a:prstGeom prst="rect">
-            <a:avLst/>
-          </a:prstGeom>
-          <a:noFill/>
-          <a:ln/>
-        </p:spPr>
-        <p:txBody>
-          <a:bodyPr wrap="square" lIns="0" tIns="0" rIns="0" bIns="0" rtlCol="0" anchor="t"/>
-          <a:lstStyle/>
-          <a:p>
-            <a:pPr indent="0" marL="0">
-              <a:buNone/>
-            </a:pPr>
-            <a:r>
-              <a:rPr lang="en-US" sz="1300" dirty="0">
-                <a:solidFill>
-                  <a:srgbClr val="ABBAB2"/>
-                </a:solidFill>
-                <a:latin typeface="Malgun Gothic" pitchFamily="34" charset="0"/>
-                <a:ea typeface="Malgun Gothic" pitchFamily="34" charset="-122"/>
-                <a:cs typeface="Malgun Gothic" pitchFamily="34" charset="-120"/>
-              </a:rPr>
-              <a:t>CODE_MAP·디자인 시스템</a:t>
-            </a:r>
-            <a:endParaRPr lang="en-US" sz="1300" dirty="0"/>
-          </a:p>
-          <a:p>
-            <a:pPr indent="0" marL="0">
-              <a:buNone/>
-            </a:pPr>
-            <a:r>
-              <a:rPr lang="en-US" sz="1300" dirty="0">
-                <a:solidFill>
-                  <a:srgbClr val="ABBAB2"/>
-                </a:solidFill>
-                <a:latin typeface="Malgun Gothic" pitchFamily="34" charset="0"/>
-                <a:ea typeface="Malgun Gothic" pitchFamily="34" charset="-122"/>
-                <a:cs typeface="Malgun Gothic" pitchFamily="34" charset="-120"/>
-              </a:rPr>
-              <a:t>문서로 저장소 지도 제공</a:t>
-            </a:r>
-            <a:endParaRPr lang="en-US" sz="1300" dirty="0"/>
-          </a:p>
-        </p:txBody>
-      </p:sp>
-      <p:sp>
-        <p:nvSpPr>
-          <p:cNvPr id="18" name="Text 16"/>
-          <p:cNvSpPr txBox="1"/>
-          <p:nvPr/>
-        </p:nvSpPr>
-        <p:spPr>
-          <a:xfrm>
-            <a:off x="3657600" y="4800600"/>
-            <a:ext cx="2148840" cy="548640"/>
-          </a:xfrm>
-          <a:prstGeom prst="rect">
-            <a:avLst/>
-          </a:prstGeom>
-          <a:noFill/>
-          <a:ln/>
-        </p:spPr>
-        <p:txBody>
-          <a:bodyPr wrap="square" lIns="0" tIns="0" rIns="0" bIns="0" rtlCol="0" anchor="ctr"/>
-          <a:lstStyle/>
-          <a:p>
-            <a:pPr indent="0" marL="0">
-              <a:buNone/>
-            </a:pPr>
-            <a:r>
-              <a:rPr lang="en-US" sz="1700" b="1" dirty="0">
-                <a:solidFill>
-                  <a:srgbClr val="EDEAE3"/>
-                </a:solidFill>
-                <a:latin typeface="Malgun Gothic" pitchFamily="34" charset="0"/>
-                <a:ea typeface="Malgun Gothic" pitchFamily="34" charset="-122"/>
-                <a:cs typeface="Malgun Gothic" pitchFamily="34" charset="-120"/>
-              </a:rPr>
-              <a:t>PR 92건/월</a:t>
-            </a:r>
-            <a:endParaRPr lang="en-US" sz="1700" dirty="0"/>
-          </a:p>
-        </p:txBody>
-      </p:sp>
-      <p:sp>
-        <p:nvSpPr>
-          <p:cNvPr id="19" name="Shape 17"/>
-          <p:cNvSpPr/>
-          <p:nvPr/>
-        </p:nvSpPr>
-        <p:spPr>
-          <a:xfrm>
-            <a:off x="5971032" y="3703320"/>
-            <a:ext cx="219456" cy="274320"/>
-          </a:xfrm>
-          <a:prstGeom prst="rightArrow">
-            <a:avLst/>
-          </a:prstGeom>
-          <a:solidFill>
-            <a:srgbClr val="94A2DB"/>
-          </a:solidFill>
-          <a:ln w="12700">
-            <a:solidFill>
-              <a:srgbClr val="94A2DB"/>
-            </a:solidFill>
-            <a:prstDash val="solid"/>
-          </a:ln>
-        </p:spPr>
-      </p:sp>
-      <p:sp>
-        <p:nvSpPr>
-          <p:cNvPr id="20" name="Shape 18"/>
-          <p:cNvSpPr/>
-          <p:nvPr/>
-        </p:nvSpPr>
-        <p:spPr>
-          <a:xfrm>
-            <a:off x="6217920" y="1645920"/>
-            <a:ext cx="2560320" cy="3931920"/>
-          </a:xfrm>
-          <a:prstGeom prst="roundRect">
-            <a:avLst>
-              <a:gd name="adj" fmla="val 2857"/>
-            </a:avLst>
-          </a:prstGeom>
-          <a:solidFill>
-            <a:srgbClr val="1E2F28"/>
-          </a:solidFill>
-          <a:ln w="9525">
-            <a:solidFill>
-              <a:srgbClr val="364A41"/>
-            </a:solidFill>
-            <a:prstDash val="solid"/>
-          </a:ln>
-        </p:spPr>
-      </p:sp>
-      <p:sp>
-        <p:nvSpPr>
-          <p:cNvPr id="21" name="Shape 19"/>
-          <p:cNvSpPr/>
-          <p:nvPr/>
-        </p:nvSpPr>
-        <p:spPr>
-          <a:xfrm>
-            <a:off x="6492240" y="1874520"/>
-            <a:ext cx="640080" cy="640080"/>
-          </a:xfrm>
-          <a:prstGeom prst="ellipse">
-            <a:avLst/>
-          </a:prstGeom>
-          <a:solidFill>
-            <a:srgbClr val="2A3C35"/>
-          </a:solidFill>
-          <a:ln w="12700">
-            <a:solidFill>
-              <a:srgbClr val="364A41"/>
-            </a:solidFill>
-            <a:prstDash val="solid"/>
-          </a:ln>
-        </p:spPr>
-      </p:sp>
-      <p:sp>
-        <p:nvSpPr>
-          <p:cNvPr id="22" name="Text 20"/>
-          <p:cNvSpPr txBox="1"/>
-          <p:nvPr/>
-        </p:nvSpPr>
-        <p:spPr>
-          <a:xfrm>
-            <a:off x="6492240" y="1874520"/>
-            <a:ext cx="640080" cy="640080"/>
-          </a:xfrm>
-          <a:prstGeom prst="rect">
-            <a:avLst/>
-          </a:prstGeom>
-          <a:noFill/>
-          <a:ln/>
-        </p:spPr>
-        <p:txBody>
-          <a:bodyPr wrap="square" lIns="0" tIns="0" rIns="0" bIns="0" rtlCol="0" anchor="ctr"/>
-          <a:lstStyle/>
-          <a:p>
-            <a:pPr algn="ctr" indent="0" marL="0">
-              <a:buNone/>
-            </a:pPr>
-            <a:r>
-              <a:rPr lang="en-US" sz="2200" b="1" dirty="0">
-                <a:solidFill>
-                  <a:srgbClr val="EDEAE3"/>
-                </a:solidFill>
-                <a:latin typeface="Arial" pitchFamily="34" charset="0"/>
-                <a:ea typeface="Arial" pitchFamily="34" charset="-122"/>
-                <a:cs typeface="Arial" pitchFamily="34" charset="-120"/>
-              </a:rPr>
-              <a:t>3</a:t>
-            </a:r>
-            <a:endParaRPr lang="en-US" sz="2200" dirty="0"/>
-          </a:p>
-        </p:txBody>
-      </p:sp>
-      <p:sp>
-        <p:nvSpPr>
-          <p:cNvPr id="23" name="Text 21"/>
-          <p:cNvSpPr txBox="1"/>
-          <p:nvPr/>
-        </p:nvSpPr>
-        <p:spPr>
-          <a:xfrm>
-            <a:off x="6492240" y="2743200"/>
-            <a:ext cx="2148840" cy="457200"/>
-          </a:xfrm>
-          <a:prstGeom prst="rect">
-            <a:avLst/>
-          </a:prstGeom>
-          <a:noFill/>
-          <a:ln/>
-        </p:spPr>
-        <p:txBody>
-          <a:bodyPr wrap="square" lIns="0" tIns="0" rIns="0" bIns="0" rtlCol="0" anchor="ctr"/>
-          <a:lstStyle/>
-          <a:p>
-            <a:pPr indent="0" marL="0">
-              <a:buNone/>
-            </a:pPr>
-            <a:r>
-              <a:rPr lang="en-US" sz="1800" b="1" dirty="0">
-                <a:solidFill>
-                  <a:srgbClr val="EDEAE3"/>
-                </a:solidFill>
-                <a:latin typeface="Malgun Gothic" pitchFamily="34" charset="0"/>
-                <a:ea typeface="Malgun Gothic" pitchFamily="34" charset="-122"/>
-                <a:cs typeface="Malgun Gothic" pitchFamily="34" charset="-120"/>
-              </a:rPr>
-              <a:t>스킬·자동 게이트</a:t>
-            </a:r>
-            <a:endParaRPr lang="en-US" sz="1800" dirty="0"/>
-          </a:p>
-        </p:txBody>
-      </p:sp>
-      <p:sp>
-        <p:nvSpPr>
-          <p:cNvPr id="24" name="Text 22"/>
-          <p:cNvSpPr txBox="1"/>
-          <p:nvPr/>
-        </p:nvSpPr>
-        <p:spPr>
-          <a:xfrm>
-            <a:off x="6492240" y="3200400"/>
-            <a:ext cx="2148840" cy="320040"/>
-          </a:xfrm>
-          <a:prstGeom prst="rect">
-            <a:avLst/>
-          </a:prstGeom>
-          <a:noFill/>
-          <a:ln/>
-        </p:spPr>
-        <p:txBody>
-          <a:bodyPr wrap="square" lIns="0" tIns="0" rIns="0" bIns="0" rtlCol="0" anchor="ctr"/>
-          <a:lstStyle/>
-          <a:p>
-            <a:pPr indent="0" marL="0">
-              <a:buNone/>
-            </a:pPr>
-            <a:r>
-              <a:rPr lang="en-US" sz="1300" dirty="0">
-                <a:solidFill>
-                  <a:srgbClr val="ABBAB2"/>
-                </a:solidFill>
-                <a:latin typeface="Malgun Gothic" pitchFamily="34" charset="0"/>
-                <a:ea typeface="Malgun Gothic" pitchFamily="34" charset="-122"/>
-                <a:cs typeface="Malgun Gothic" pitchFamily="34" charset="-120"/>
-              </a:rPr>
-              <a:t>6~7월</a:t>
-            </a:r>
-            <a:endParaRPr lang="en-US" sz="1300" dirty="0"/>
-          </a:p>
-        </p:txBody>
-      </p:sp>
-      <p:sp>
-        <p:nvSpPr>
-          <p:cNvPr id="25" name="Text 23"/>
-          <p:cNvSpPr txBox="1"/>
-          <p:nvPr/>
-        </p:nvSpPr>
-        <p:spPr>
-          <a:xfrm>
-            <a:off x="6492240" y="3657600"/>
-            <a:ext cx="2194560" cy="1097280"/>
-          </a:xfrm>
-          <a:prstGeom prst="rect">
-            <a:avLst/>
-          </a:prstGeom>
-          <a:noFill/>
-          <a:ln/>
-        </p:spPr>
-        <p:txBody>
-          <a:bodyPr wrap="square" lIns="0" tIns="0" rIns="0" bIns="0" rtlCol="0" anchor="t"/>
-          <a:lstStyle/>
-          <a:p>
-            <a:pPr indent="0" marL="0">
-              <a:buNone/>
-            </a:pPr>
-            <a:r>
-              <a:rPr lang="en-US" sz="1300" dirty="0">
-                <a:solidFill>
-                  <a:srgbClr val="ABBAB2"/>
-                </a:solidFill>
-                <a:latin typeface="Malgun Gothic" pitchFamily="34" charset="0"/>
-                <a:ea typeface="Malgun Gothic" pitchFamily="34" charset="-122"/>
-                <a:cs typeface="Malgun Gothic" pitchFamily="34" charset="-120"/>
-              </a:rPr>
-              <a:t>스킬 8종, docs-sync CI,</a:t>
-            </a:r>
-            <a:endParaRPr lang="en-US" sz="1300" dirty="0"/>
-          </a:p>
-          <a:p>
-            <a:pPr indent="0" marL="0">
-              <a:buNone/>
-            </a:pPr>
-            <a:r>
-              <a:rPr lang="en-US" sz="1300" dirty="0">
-                <a:solidFill>
-                  <a:srgbClr val="ABBAB2"/>
-                </a:solidFill>
-                <a:latin typeface="Malgun Gothic" pitchFamily="34" charset="0"/>
-                <a:ea typeface="Malgun Gothic" pitchFamily="34" charset="-122"/>
-                <a:cs typeface="Malgun Gothic" pitchFamily="34" charset="-120"/>
-              </a:rPr>
-              <a:t>자동 릴리스·CHANGELOG</a:t>
-            </a:r>
-            <a:endParaRPr lang="en-US" sz="1300" dirty="0"/>
-          </a:p>
-        </p:txBody>
-      </p:sp>
-      <p:sp>
-        <p:nvSpPr>
-          <p:cNvPr id="26" name="Text 24"/>
-          <p:cNvSpPr txBox="1"/>
-          <p:nvPr/>
-        </p:nvSpPr>
-        <p:spPr>
-          <a:xfrm>
-            <a:off x="6492240" y="4800600"/>
-            <a:ext cx="2148840" cy="548640"/>
-          </a:xfrm>
-          <a:prstGeom prst="rect">
-            <a:avLst/>
-          </a:prstGeom>
-          <a:noFill/>
-          <a:ln/>
-        </p:spPr>
-        <p:txBody>
-          <a:bodyPr wrap="square" lIns="0" tIns="0" rIns="0" bIns="0" rtlCol="0" anchor="ctr"/>
-          <a:lstStyle/>
-          <a:p>
-            <a:pPr indent="0" marL="0">
-              <a:buNone/>
-            </a:pPr>
-            <a:r>
-              <a:rPr lang="en-US" sz="1700" b="1" dirty="0">
-                <a:solidFill>
-                  <a:srgbClr val="EDEAE3"/>
-                </a:solidFill>
-                <a:latin typeface="Malgun Gothic" pitchFamily="34" charset="0"/>
-                <a:ea typeface="Malgun Gothic" pitchFamily="34" charset="-122"/>
-                <a:cs typeface="Malgun Gothic" pitchFamily="34" charset="-120"/>
-              </a:rPr>
-              <a:t>PR 175건/월</a:t>
-            </a:r>
-            <a:endParaRPr lang="en-US" sz="1700" dirty="0"/>
-          </a:p>
-        </p:txBody>
-      </p:sp>
-      <p:sp>
-        <p:nvSpPr>
-          <p:cNvPr id="27" name="Shape 25"/>
-          <p:cNvSpPr/>
-          <p:nvPr/>
-        </p:nvSpPr>
-        <p:spPr>
-          <a:xfrm>
-            <a:off x="8805672" y="3703320"/>
-            <a:ext cx="219456" cy="274320"/>
-          </a:xfrm>
-          <a:prstGeom prst="rightArrow">
-            <a:avLst/>
-          </a:prstGeom>
-          <a:solidFill>
-            <a:srgbClr val="94A2DB"/>
-          </a:solidFill>
-          <a:ln w="12700">
-            <a:solidFill>
-              <a:srgbClr val="94A2DB"/>
-            </a:solidFill>
-            <a:prstDash val="solid"/>
-          </a:ln>
-        </p:spPr>
-      </p:sp>
-      <p:sp>
-        <p:nvSpPr>
-          <p:cNvPr id="28" name="Shape 26"/>
-          <p:cNvSpPr/>
-          <p:nvPr/>
-        </p:nvSpPr>
-        <p:spPr>
-          <a:xfrm>
-            <a:off x="9052560" y="1645920"/>
-            <a:ext cx="2560320" cy="3931920"/>
-          </a:xfrm>
-          <a:prstGeom prst="roundRect">
-            <a:avLst>
-              <a:gd name="adj" fmla="val 2857"/>
-            </a:avLst>
-          </a:prstGeom>
-          <a:solidFill>
-            <a:srgbClr val="323853"/>
-          </a:solidFill>
-          <a:ln w="9525">
-            <a:solidFill>
-              <a:srgbClr val="364A41"/>
-            </a:solidFill>
-            <a:prstDash val="solid"/>
-          </a:ln>
-        </p:spPr>
-      </p:sp>
-      <p:sp>
-        <p:nvSpPr>
-          <p:cNvPr id="29" name="Shape 27"/>
-          <p:cNvSpPr/>
-          <p:nvPr/>
-        </p:nvSpPr>
-        <p:spPr>
-          <a:xfrm>
-            <a:off x="9326880" y="1874520"/>
-            <a:ext cx="640080" cy="640080"/>
-          </a:xfrm>
-          <a:prstGeom prst="ellipse">
-            <a:avLst/>
-          </a:prstGeom>
-          <a:solidFill>
-            <a:srgbClr val="94A2DB"/>
-          </a:solidFill>
-          <a:ln w="12700">
-            <a:solidFill>
-              <a:srgbClr val="94A2DB"/>
-            </a:solidFill>
-            <a:prstDash val="solid"/>
-          </a:ln>
-        </p:spPr>
-      </p:sp>
-      <p:sp>
-        <p:nvSpPr>
-          <p:cNvPr id="30" name="Text 28"/>
-          <p:cNvSpPr txBox="1"/>
-          <p:nvPr/>
-        </p:nvSpPr>
-        <p:spPr>
-          <a:xfrm>
-            <a:off x="9326880" y="1874520"/>
-            <a:ext cx="640080" cy="640080"/>
-          </a:xfrm>
-          <a:prstGeom prst="rect">
-            <a:avLst/>
-          </a:prstGeom>
-          <a:noFill/>
-          <a:ln/>
-        </p:spPr>
-        <p:txBody>
-          <a:bodyPr wrap="square" lIns="0" tIns="0" rIns="0" bIns="0" rtlCol="0" anchor="ctr"/>
-          <a:lstStyle/>
-          <a:p>
-            <a:pPr algn="ctr" indent="0" marL="0">
-              <a:buNone/>
-            </a:pPr>
-            <a:r>
-              <a:rPr lang="en-US" sz="2200" b="1" dirty="0">
-                <a:solidFill>
-                  <a:srgbClr val="15231D"/>
-                </a:solidFill>
-                <a:latin typeface="Arial" pitchFamily="34" charset="0"/>
-                <a:ea typeface="Arial" pitchFamily="34" charset="-122"/>
-                <a:cs typeface="Arial" pitchFamily="34" charset="-120"/>
-              </a:rPr>
-              <a:t>4</a:t>
-            </a:r>
-            <a:endParaRPr lang="en-US" sz="2200" dirty="0"/>
-          </a:p>
-        </p:txBody>
-      </p:sp>
-      <p:sp>
-        <p:nvSpPr>
-          <p:cNvPr id="31" name="Text 29"/>
-          <p:cNvSpPr txBox="1"/>
-          <p:nvPr/>
-        </p:nvSpPr>
-        <p:spPr>
-          <a:xfrm>
-            <a:off x="9326880" y="2743200"/>
-            <a:ext cx="2148840" cy="457200"/>
-          </a:xfrm>
-          <a:prstGeom prst="rect">
-            <a:avLst/>
-          </a:prstGeom>
-          <a:noFill/>
-          <a:ln/>
-        </p:spPr>
-        <p:txBody>
-          <a:bodyPr wrap="square" lIns="0" tIns="0" rIns="0" bIns="0" rtlCol="0" anchor="ctr"/>
-          <a:lstStyle/>
-          <a:p>
-            <a:pPr indent="0" marL="0">
-              <a:buNone/>
-            </a:pPr>
-            <a:r>
-              <a:rPr lang="en-US" sz="1800" b="1" dirty="0">
-                <a:solidFill>
-                  <a:srgbClr val="EDEAE3"/>
-                </a:solidFill>
-                <a:latin typeface="Malgun Gothic" pitchFamily="34" charset="0"/>
-                <a:ea typeface="Malgun Gothic" pitchFamily="34" charset="-122"/>
-                <a:cs typeface="Malgun Gothic" pitchFamily="34" charset="-120"/>
-              </a:rPr>
-              <a:t>에이전트 운영</a:t>
-            </a:r>
-            <a:endParaRPr lang="en-US" sz="1800" dirty="0"/>
-          </a:p>
-        </p:txBody>
-      </p:sp>
-      <p:sp>
-        <p:nvSpPr>
-          <p:cNvPr id="32" name="Text 30"/>
-          <p:cNvSpPr txBox="1"/>
-          <p:nvPr/>
-        </p:nvSpPr>
-        <p:spPr>
-          <a:xfrm>
-            <a:off x="9326880" y="3200400"/>
-            <a:ext cx="2148840" cy="320040"/>
-          </a:xfrm>
-          <a:prstGeom prst="rect">
-            <a:avLst/>
-          </a:prstGeom>
-          <a:noFill/>
-          <a:ln/>
-        </p:spPr>
-        <p:txBody>
-          <a:bodyPr wrap="square" lIns="0" tIns="0" rIns="0" bIns="0" rtlCol="0" anchor="ctr"/>
-          <a:lstStyle/>
-          <a:p>
-            <a:pPr indent="0" marL="0">
-              <a:buNone/>
-            </a:pPr>
-            <a:r>
-              <a:rPr lang="en-US" sz="1300" dirty="0">
-                <a:solidFill>
-                  <a:srgbClr val="ADBAEB"/>
-                </a:solidFill>
-                <a:latin typeface="Malgun Gothic" pitchFamily="34" charset="0"/>
-                <a:ea typeface="Malgun Gothic" pitchFamily="34" charset="-122"/>
-                <a:cs typeface="Malgun Gothic" pitchFamily="34" charset="-120"/>
-              </a:rPr>
-              <a:t>8~9월</a:t>
-            </a:r>
-            <a:endParaRPr lang="en-US" sz="1300" dirty="0"/>
-          </a:p>
-        </p:txBody>
-      </p:sp>
-      <p:sp>
-        <p:nvSpPr>
-          <p:cNvPr id="33" name="Text 31"/>
-          <p:cNvSpPr txBox="1"/>
-          <p:nvPr/>
-        </p:nvSpPr>
-        <p:spPr>
-          <a:xfrm>
-            <a:off x="9326880" y="3657600"/>
-            <a:ext cx="2194560" cy="1097280"/>
-          </a:xfrm>
-          <a:prstGeom prst="rect">
-            <a:avLst/>
-          </a:prstGeom>
-          <a:noFill/>
-          <a:ln/>
-        </p:spPr>
-        <p:txBody>
-          <a:bodyPr wrap="square" lIns="0" tIns="0" rIns="0" bIns="0" rtlCol="0" anchor="t"/>
-          <a:lstStyle/>
-          <a:p>
-            <a:pPr indent="0" marL="0">
-              <a:buNone/>
-            </a:pPr>
-            <a:r>
-              <a:rPr lang="en-US" sz="1300" dirty="0">
-                <a:solidFill>
-                  <a:srgbClr val="ABBAB2"/>
-                </a:solidFill>
-                <a:latin typeface="Malgun Gothic" pitchFamily="34" charset="0"/>
-                <a:ea typeface="Malgun Gothic" pitchFamily="34" charset="-122"/>
-                <a:cs typeface="Malgun Gothic" pitchFamily="34" charset="-120"/>
-              </a:rPr>
-              <a:t>UX 감사 에이전트, 테스트</a:t>
-            </a:r>
-            <a:endParaRPr lang="en-US" sz="1300" dirty="0"/>
-          </a:p>
-          <a:p>
-            <a:pPr indent="0" marL="0">
-              <a:buNone/>
-            </a:pPr>
-            <a:r>
-              <a:rPr lang="en-US" sz="1300" dirty="0">
-                <a:solidFill>
-                  <a:srgbClr val="ABBAB2"/>
-                </a:solidFill>
-                <a:latin typeface="Malgun Gothic" pitchFamily="34" charset="0"/>
-                <a:ea typeface="Malgun Gothic" pitchFamily="34" charset="-122"/>
-                <a:cs typeface="Malgun Gothic" pitchFamily="34" charset="-120"/>
-              </a:rPr>
-              <a:t>1,097개, 안정화 우선</a:t>
-            </a:r>
-            <a:endParaRPr lang="en-US" sz="1300" dirty="0"/>
-          </a:p>
-        </p:txBody>
-      </p:sp>
-      <p:sp>
-        <p:nvSpPr>
-          <p:cNvPr id="34" name="Text 32"/>
-          <p:cNvSpPr txBox="1"/>
-          <p:nvPr/>
-        </p:nvSpPr>
-        <p:spPr>
-          <a:xfrm>
-            <a:off x="9326880" y="4800600"/>
-            <a:ext cx="2148840" cy="548640"/>
-          </a:xfrm>
-          <a:prstGeom prst="rect">
-            <a:avLst/>
-          </a:prstGeom>
-          <a:noFill/>
-          <a:ln/>
-        </p:spPr>
-        <p:txBody>
-          <a:bodyPr wrap="square" lIns="0" tIns="0" rIns="0" bIns="0" rtlCol="0" anchor="ctr"/>
-          <a:lstStyle/>
-          <a:p>
-            <a:pPr indent="0" marL="0">
-              <a:buNone/>
-            </a:pPr>
-            <a:r>
-              <a:rPr lang="en-US" sz="1700" b="1" dirty="0">
-                <a:solidFill>
-                  <a:srgbClr val="ADBAEB"/>
-                </a:solidFill>
-                <a:latin typeface="Malgun Gothic" pitchFamily="34" charset="0"/>
-                <a:ea typeface="Malgun Gothic" pitchFamily="34" charset="-122"/>
-                <a:cs typeface="Malgun Gothic" pitchFamily="34" charset="-120"/>
-              </a:rPr>
-              <a:t>테스트 2배</a:t>
-            </a:r>
-            <a:endParaRPr lang="en-US" sz="1700" dirty="0"/>
-          </a:p>
-        </p:txBody>
-      </p:sp>
-      <p:sp>
-        <p:nvSpPr>
-          <p:cNvPr id="35" name="Text 33"/>
+              <a:t>→ 테스트 10배·docs-sync CI·자동 릴리스 도입 → 9월 40% 로 회복, 릴리스 82회 중 revert·hotfix 4건</a:t>
+            </a:r>
+            <a:endParaRPr lang="en-US" sz="1600" dirty="0"/>
+          </a:p>
+        </p:txBody>
+      </p:sp>
+      <p:sp>
+        <p:nvSpPr>
+          <p:cNvPr id="9" name="Text 5"/>
           <p:cNvSpPr txBox="1"/>
           <p:nvPr/>
         </p:nvSpPr>
@@ -14240,7 +15487,7 @@
                 <a:ea typeface="Malgun Gothic" pitchFamily="34" charset="-122"/>
                 <a:cs typeface="Malgun Gothic" pitchFamily="34" charset="-120"/>
               </a:rPr>
-              <a:t>PR/월 = 해당 구간 월평균 병합 PR · 현재 위치 = 4단계</a:t>
+              <a:t>출처: backend/tests 의 def test_ 집계, Conventional Commits prefix 집계</a:t>
             </a:r>
             <a:endParaRPr lang="en-US" sz="1000" dirty="0"/>
           </a:p>
@@ -14248,7 +15495,7 @@
       </p:sp>
       <p:sp>
         <p:nvSpPr>
-          <p:cNvPr id="36" name="Text 34"/>
+          <p:cNvPr id="10" name="Text 6"/>
           <p:cNvSpPr txBox="1"/>
           <p:nvPr/>
         </p:nvSpPr>
